--- a/docs/lectures/03_05_lecture/intro_quarto_markdown.pptx
+++ b/docs/lectures/03_05_lecture/intro_quarto_markdown.pptx
@@ -3360,7 +3360,7 @@
             </a:pPr>
             <a:r>
               <a:rPr/>
-              <a:t>2026-07-02</a:t>
+              <a:t>2026-07-03</a:t>
             </a:r>
           </a:p>
         </p:txBody>

--- a/docs/lectures/03_05_lecture/intro_quarto_markdown.pptx
+++ b/docs/lectures/03_05_lecture/intro_quarto_markdown.pptx
@@ -26,6 +26,19 @@
     <p:sldId id="274" r:id="rId20"/>
     <p:sldId id="275" r:id="rId21"/>
     <p:sldId id="276" r:id="rId22"/>
+    <p:sldId id="277" r:id="rId23"/>
+    <p:sldId id="278" r:id="rId24"/>
+    <p:sldId id="279" r:id="rId25"/>
+    <p:sldId id="280" r:id="rId26"/>
+    <p:sldId id="281" r:id="rId27"/>
+    <p:sldId id="282" r:id="rId28"/>
+    <p:sldId id="283" r:id="rId29"/>
+    <p:sldId id="284" r:id="rId30"/>
+    <p:sldId id="285" r:id="rId31"/>
+    <p:sldId id="286" r:id="rId32"/>
+    <p:sldId id="287" r:id="rId33"/>
+    <p:sldId id="288" r:id="rId34"/>
+    <p:sldId id="289" r:id="rId35"/>
   </p:sldIdLst>
   <p:sldSz cx="9144000" cy="5143500" type="screen16x9"/>
   <p:notesSz cx="6858000" cy="9144000"/>
@@ -3299,7 +3312,7 @@
             </a:pPr>
             <a:r>
               <a:rPr/>
-              <a:t>Lecture 4.5 — From Script to Report</a:t>
+              <a:t>Lecture 5 — From Script to Report</a:t>
             </a:r>
           </a:p>
         </p:txBody>
@@ -3360,7 +3373,7 @@
             </a:pPr>
             <a:r>
               <a:rPr/>
-              <a:t>2026-07-03</a:t>
+              <a:t>2026-07-04</a:t>
             </a:r>
           </a:p>
         </p:txBody>
@@ -3400,11 +3413,8 @@
         <p:spPr>
           <a:xfrm>
             <a:off x="0" y="0"/>
-            <a:ext cx="9144000" cy="602780"/>
+            <a:ext cx="9144000" cy="582780"/>
           </a:xfrm>
-          <a:solidFill>
-            <a:srgbClr val="1A1A2E"/>
-          </a:solidFill>
         </p:spPr>
         <p:txBody>
           <a:bodyPr/>
@@ -3415,7 +3425,7 @@
             </a:pPr>
             <a:r>
               <a:rPr/>
-              <a:t>Ingredient 1 · YAML front matter</a:t>
+              <a:t>🛑 Pause — See It, Then Do Activity Step 1</a:t>
             </a:r>
           </a:p>
         </p:txBody>
@@ -3427,7 +3437,7 @@
             <a:spLocks noGrp="1"/>
           </p:cNvSpPr>
           <p:nvPr>
-            <p:ph idx="1" sz="half"/>
+            <p:ph idx="1"/>
           </p:nvPr>
         </p:nvSpPr>
         <p:spPr/>
@@ -3440,368 +3450,27 @@
             </a:pPr>
             <a:r>
               <a:rPr/>
-              <a:t>The block at the very top, fenced by three dashes </a:t>
-            </a:r>
-            <a:r>
-              <a:rPr>
-                <a:latin typeface="Courier"/>
-              </a:rPr>
-              <a:t>---</a:t>
-            </a:r>
-            <a:r>
-              <a:rPr/>
-              <a:t>. It is the </a:t>
-            </a:r>
-            <a:r>
-              <a:rPr b="1"/>
-              <a:t>recipe</a:t>
-            </a:r>
-            <a:r>
-              <a:rPr/>
-              <a:t> — what to build and how:</a:t>
-            </a:r>
-          </a:p>
-          <a:p>
-            <a:pPr lvl="0" indent="0">
-              <a:buNone/>
-            </a:pPr>
-            <a:r>
-              <a:rPr>
-                <a:solidFill>
-                  <a:srgbClr val="AD0000"/>
-                </a:solidFill>
-                <a:latin typeface="Courier"/>
-              </a:rPr>
-              <a:t>---</a:t>
-            </a:r>
-            <a:br/>
-            <a:r>
-              <a:rPr>
-                <a:solidFill>
-                  <a:srgbClr val="4758AB"/>
-                </a:solidFill>
-                <a:latin typeface="Courier"/>
-              </a:rPr>
-              <a:t>title</a:t>
+              <a:t>Open </a:t>
             </a:r>
             <a:r>
               <a:rPr b="1">
-                <a:solidFill>
-                  <a:srgbClr val="003B4F"/>
-                </a:solidFill>
-                <a:latin typeface="Courier"/>
-              </a:rPr>
-              <a:t>:</a:t>
-            </a:r>
-            <a:r>
-              <a:rPr>
-                <a:solidFill>
-                  <a:srgbClr val="657422"/>
-                </a:solidFill>
-                <a:latin typeface="Courier"/>
-              </a:rPr>
-              <a:t> </a:t>
-            </a:r>
-            <a:r>
-              <a:rPr>
-                <a:solidFill>
-                  <a:srgbClr val="20794D"/>
-                </a:solidFill>
-                <a:latin typeface="Courier"/>
-              </a:rPr>
-              <a:t>"Leaf Morphology Report"</a:t>
-            </a:r>
-            <a:br/>
-            <a:r>
-              <a:rPr>
-                <a:solidFill>
-                  <a:srgbClr val="4758AB"/>
-                </a:solidFill>
-                <a:latin typeface="Courier"/>
-              </a:rPr>
-              <a:t>author</a:t>
-            </a:r>
-            <a:r>
-              <a:rPr b="1">
-                <a:solidFill>
-                  <a:srgbClr val="003B4F"/>
-                </a:solidFill>
-                <a:latin typeface="Courier"/>
-              </a:rPr>
-              <a:t>:</a:t>
-            </a:r>
-            <a:r>
-              <a:rPr>
-                <a:solidFill>
-                  <a:srgbClr val="657422"/>
-                </a:solidFill>
-                <a:latin typeface="Courier"/>
-              </a:rPr>
-              <a:t> </a:t>
-            </a:r>
-            <a:r>
-              <a:rPr>
-                <a:solidFill>
-                  <a:srgbClr val="20794D"/>
-                </a:solidFill>
-                <a:latin typeface="Courier"/>
-              </a:rPr>
-              <a:t>"Your Name"</a:t>
-            </a:r>
-            <a:br/>
-            <a:r>
-              <a:rPr>
-                <a:solidFill>
-                  <a:srgbClr val="4758AB"/>
-                </a:solidFill>
-                <a:latin typeface="Courier"/>
-              </a:rPr>
-              <a:t>date</a:t>
-            </a:r>
-            <a:r>
-              <a:rPr b="1">
-                <a:solidFill>
-                  <a:srgbClr val="003B4F"/>
-                </a:solidFill>
-                <a:latin typeface="Courier"/>
-              </a:rPr>
-              <a:t>:</a:t>
-            </a:r>
-            <a:r>
-              <a:rPr>
-                <a:solidFill>
-                  <a:srgbClr val="657422"/>
-                </a:solidFill>
-                <a:latin typeface="Courier"/>
-              </a:rPr>
-              <a:t> today</a:t>
-            </a:r>
-            <a:br/>
-            <a:r>
-              <a:rPr>
-                <a:solidFill>
-                  <a:srgbClr val="4758AB"/>
-                </a:solidFill>
-                <a:latin typeface="Courier"/>
-              </a:rPr>
-              <a:t>format</a:t>
-            </a:r>
-            <a:r>
-              <a:rPr b="1">
-                <a:solidFill>
-                  <a:srgbClr val="003B4F"/>
-                </a:solidFill>
-                <a:latin typeface="Courier"/>
-              </a:rPr>
-              <a:t>:</a:t>
-            </a:r>
-            <a:r>
-              <a:rPr>
-                <a:solidFill>
-                  <a:srgbClr val="657422"/>
-                </a:solidFill>
-                <a:latin typeface="Courier"/>
-              </a:rPr>
-              <a:t> docx</a:t>
-            </a:r>
-            <a:br/>
-            <a:r>
-              <a:rPr>
-                <a:solidFill>
-                  <a:srgbClr val="AD0000"/>
-                </a:solidFill>
-                <a:latin typeface="Courier"/>
-              </a:rPr>
-              <a:t>---</a:t>
-            </a:r>
-          </a:p>
-          <a:p>
-            <a:pPr lvl="0"/>
-            <a:r>
-              <a:rPr>
-                <a:latin typeface="Courier"/>
-              </a:rPr>
-              <a:t>title</a:t>
-            </a:r>
-            <a:r>
-              <a:rPr/>
-              <a:t>, </a:t>
-            </a:r>
-            <a:r>
-              <a:rPr>
-                <a:latin typeface="Courier"/>
-              </a:rPr>
-              <a:t>author</a:t>
-            </a:r>
-            <a:r>
-              <a:rPr/>
-              <a:t>, </a:t>
-            </a:r>
-            <a:r>
-              <a:rPr>
-                <a:latin typeface="Courier"/>
-              </a:rPr>
-              <a:t>date</a:t>
-            </a:r>
-            <a:r>
-              <a:rPr/>
-              <a:t> — appear at the top of the report</a:t>
-            </a:r>
-          </a:p>
-          <a:p>
-            <a:pPr lvl="0"/>
-            <a:r>
-              <a:rPr>
-                <a:latin typeface="Courier"/>
-              </a:rPr>
-              <a:t>format: docx</a:t>
-            </a:r>
-            <a:r>
-              <a:rPr/>
-              <a:t> — </a:t>
-            </a:r>
-            <a:r>
-              <a:rPr b="1"/>
-              <a:t>make a Word document</a:t>
-            </a:r>
-          </a:p>
-          <a:p>
-            <a:pPr lvl="0" indent="0" marL="1270000">
-              <a:buNone/>
-            </a:pPr>
-            <a:r>
-              <a:rPr sz="2000" b="1"/>
-              <a:t>Warning</a:t>
-            </a:r>
-          </a:p>
-          <a:p>
-            <a:pPr lvl="0" indent="0" marL="1270000">
-              <a:buNone/>
-            </a:pPr>
-            <a:r>
-              <a:rPr sz="2000" b="1"/>
-              <a:t>⚠️ Watch out!</a:t>
-            </a:r>
-          </a:p>
-          <a:p>
-            <a:pPr lvl="0" indent="0" marL="1270000">
-              <a:buNone/>
-            </a:pPr>
-            <a:r>
-              <a:rPr sz="2000"/>
-              <a:t>YAML is </a:t>
-            </a:r>
-            <a:r>
-              <a:rPr sz="2000" b="1"/>
-              <a:t>space-sensitive</a:t>
-            </a:r>
-            <a:r>
-              <a:rPr sz="2000"/>
-              <a:t>. Indent with spaces, never tabs. A stray space is the #1 beginner error.</a:t>
-            </a:r>
-          </a:p>
-        </p:txBody>
-      </p:sp>
-      <p:sp>
-        <p:nvSpPr>
-          <p:cNvPr id="4" name="Content Placeholder 3"/>
-          <p:cNvSpPr>
-            <a:spLocks noGrp="1"/>
-          </p:cNvSpPr>
-          <p:nvPr>
-            <p:ph idx="2" sz="half"/>
-          </p:nvPr>
-        </p:nvSpPr>
-        <p:spPr/>
-        <p:txBody>
-          <a:bodyPr/>
-          <a:lstStyle/>
-          <a:p>
-            <a:pPr lvl="0" indent="0" marL="1270000">
-              <a:buNone/>
-            </a:pPr>
-            <a:r>
-              <a:rPr sz="2000" b="1"/>
-              <a:t>Note</a:t>
-            </a:r>
-          </a:p>
-          <a:p>
-            <a:pPr lvl="0" indent="0" marL="1270000">
-              <a:buNone/>
-            </a:pPr>
-            <a:r>
-              <a:rPr sz="2000" b="1"/>
-              <a:t>📖 New word</a:t>
-            </a:r>
-          </a:p>
-          <a:p>
-            <a:pPr lvl="0" indent="0" marL="1270000">
-              <a:buNone/>
-            </a:pPr>
-            <a:r>
-              <a:rPr sz="2000" b="1"/>
-              <a:t>YAML</a:t>
-            </a:r>
-            <a:r>
-              <a:rPr sz="2000"/>
-              <a:t> = “</a:t>
-            </a:r>
-            <a:r>
-              <a:rPr sz="2000" b="1"/>
-              <a:t>Y</a:t>
-            </a:r>
-            <a:r>
-              <a:rPr sz="2000"/>
-              <a:t>AML </a:t>
-            </a:r>
-            <a:r>
-              <a:rPr sz="2000" b="1"/>
-              <a:t>A</a:t>
-            </a:r>
-            <a:r>
-              <a:rPr sz="2000"/>
-              <a:t>in’t </a:t>
-            </a:r>
-            <a:r>
-              <a:rPr sz="2000" b="1"/>
-              <a:t>M</a:t>
-            </a:r>
-            <a:r>
-              <a:rPr sz="2000"/>
-              <a:t>arkup </a:t>
-            </a:r>
-            <a:r>
-              <a:rPr sz="2000" b="1"/>
-              <a:t>L</a:t>
-            </a:r>
-            <a:r>
-              <a:rPr sz="2000"/>
-              <a:t>anguage.” Just a tidy list of </a:t>
-            </a:r>
-            <a:r>
-              <a:rPr sz="2000">
-                <a:latin typeface="Courier"/>
-              </a:rPr>
-              <a:t>key: value</a:t>
-            </a:r>
-            <a:r>
-              <a:rPr sz="2000"/>
-              <a:t> settings.</a:t>
-            </a:r>
-          </a:p>
-          <a:p>
-            <a:pPr lvl="0" indent="0" marL="0">
-              <a:buNone/>
-            </a:pPr>
-            <a:r>
-              <a:rPr>
-                <a:latin typeface="Courier"/>
-              </a:rPr>
-              <a:t>format:</a:t>
-            </a:r>
-            <a:r>
-              <a:rPr/>
-              <a:t> is the only line you change to get Word vs. HTML vs. PowerPoint.</a:t>
+                <a:latin typeface="Courier"/>
+              </a:rPr>
+              <a:t>t_test_report.qmd</a:t>
+            </a:r>
+            <a:r>
+              <a:rPr/>
+              <a:t>, press Render, and watch a script become a finished Word report. Then make your own new </a:t>
+            </a:r>
+            <a:r>
+              <a:rPr>
+                <a:latin typeface="Courier"/>
+              </a:rPr>
+              <a:t>.qmd</a:t>
+            </a:r>
+            <a:r>
+              <a:rPr/>
+              <a:t> (Step 1).</a:t>
             </a:r>
           </a:p>
         </p:txBody>
@@ -3841,11 +3510,8 @@
         <p:spPr>
           <a:xfrm>
             <a:off x="0" y="0"/>
-            <a:ext cx="9144000" cy="602780"/>
+            <a:ext cx="9144000" cy="582780"/>
           </a:xfrm>
-          <a:solidFill>
-            <a:srgbClr val="1A1A2E"/>
-          </a:solidFill>
         </p:spPr>
         <p:txBody>
           <a:bodyPr/>
@@ -3856,7 +3522,13 @@
             </a:pPr>
             <a:r>
               <a:rPr/>
-              <a:t>Ingredient 2 · Markdown text</a:t>
+              <a:t>🧩 Chunk 2 of 4 · Anatomy of a </a:t>
+            </a:r>
+            <a:r>
+              <a:rPr>
+                <a:latin typeface="Courier"/>
+              </a:rPr>
+              <a:t>.qmd</a:t>
             </a:r>
           </a:p>
         </p:txBody>
@@ -3868,7 +3540,7 @@
             <a:spLocks noGrp="1"/>
           </p:cNvSpPr>
           <p:nvPr>
-            <p:ph idx="1" sz="half"/>
+            <p:ph idx="1"/>
           </p:nvPr>
         </p:nvSpPr>
         <p:spPr/>
@@ -3880,128 +3552,12 @@
               <a:buNone/>
             </a:pPr>
             <a:r>
-              <a:rPr/>
-              <a:t>Markdown is </a:t>
-            </a:r>
-            <a:r>
               <a:rPr b="1"/>
-              <a:t>formatting with symbols</a:t>
-            </a:r>
-            <a:r>
-              <a:rPr/>
-              <a:t> instead of toolbar buttons:</a:t>
-            </a:r>
-          </a:p>
-          <a:p>
-            <a:pPr lvl="0" indent="0">
-              <a:buNone/>
-            </a:pPr>
-            <a:r>
-              <a:rPr>
-                <a:solidFill>
-                  <a:srgbClr val="4758AB"/>
-                </a:solidFill>
-                <a:latin typeface="Courier"/>
-              </a:rPr>
-              <a:t># A big heading</a:t>
-            </a:r>
-            <a:br/>
-            <a:r>
-              <a:rPr>
-                <a:solidFill>
-                  <a:srgbClr val="4758AB"/>
-                </a:solidFill>
-                <a:latin typeface="Courier"/>
-              </a:rPr>
-              <a:t>## A smaller heading</a:t>
-            </a:r>
-            <a:br/>
-            <a:br/>
-            <a:r>
-              <a:rPr>
-                <a:solidFill>
-                  <a:srgbClr val="003B4F"/>
-                </a:solidFill>
-                <a:latin typeface="Courier"/>
-              </a:rPr>
-              <a:t>Normal text. Make it **bold** or *italic*.</a:t>
-            </a:r>
-            <a:br/>
-            <a:br/>
-            <a:r>
-              <a:rPr>
-                <a:solidFill>
-                  <a:srgbClr val="20794D"/>
-                </a:solidFill>
-                <a:latin typeface="Courier"/>
-              </a:rPr>
-              <a:t>- </a:t>
-            </a:r>
-            <a:r>
-              <a:rPr>
-                <a:solidFill>
-                  <a:srgbClr val="003B4F"/>
-                </a:solidFill>
-                <a:latin typeface="Courier"/>
-              </a:rPr>
-              <a:t>a bullet</a:t>
-            </a:r>
-            <a:br/>
-            <a:r>
-              <a:rPr>
-                <a:solidFill>
-                  <a:srgbClr val="20794D"/>
-                </a:solidFill>
-                <a:latin typeface="Courier"/>
-              </a:rPr>
-              <a:t>- </a:t>
-            </a:r>
-            <a:r>
-              <a:rPr>
-                <a:solidFill>
-                  <a:srgbClr val="003B4F"/>
-                </a:solidFill>
-                <a:latin typeface="Courier"/>
-              </a:rPr>
-              <a:t>another bullet</a:t>
-            </a:r>
-            <a:br/>
-            <a:br/>
-            <a:r>
-              <a:rPr>
-                <a:solidFill>
-                  <a:srgbClr val="5E5E5E"/>
-                </a:solidFill>
-                <a:latin typeface="Courier"/>
-              </a:rPr>
-              <a:t>[</a:t>
-            </a:r>
-            <a:r>
-              <a:rPr>
-                <a:solidFill>
-                  <a:srgbClr val="003B4F"/>
-                </a:solidFill>
-                <a:latin typeface="Courier"/>
-              </a:rPr>
-              <a:t>a link</a:t>
-            </a:r>
-            <a:r>
-              <a:rPr>
-                <a:solidFill>
-                  <a:srgbClr val="5E5E5E"/>
-                </a:solidFill>
-                <a:latin typeface="Courier"/>
-              </a:rPr>
-              <a:t>](https://r4ds.hadley.nz)</a:t>
-            </a:r>
-          </a:p>
-          <a:p>
-            <a:pPr lvl="0" indent="0" marL="0">
-              <a:buNone/>
-            </a:pPr>
-            <a:r>
-              <a:rPr/>
-              <a:t>You write the symbols; Quarto turns them into real headings, bullets, and links.</a:t>
+              <a:t>We will cover:</a:t>
+            </a:r>
+            <a:r>
+              <a:rPr/>
+              <a:t> the three ingredients — YAML front matter, Markdown text, and named code chunks.</a:t>
             </a:r>
           </a:p>
           <a:p>
@@ -4010,7 +3566,7 @@
             </a:pPr>
             <a:r>
               <a:rPr sz="2000" b="1"/>
-              <a:t>Note</a:t>
+              <a:t>Tip</a:t>
             </a:r>
           </a:p>
           <a:p>
@@ -4019,115 +3575,11 @@
             </a:pPr>
             <a:r>
               <a:rPr sz="2000" b="1"/>
-              <a:t>📖 New word</a:t>
-            </a:r>
-          </a:p>
-          <a:p>
-            <a:pPr lvl="0" indent="0" marL="1270000">
-              <a:buNone/>
-            </a:pPr>
-            <a:r>
-              <a:rPr sz="2000" b="1"/>
-              <a:t>Markdown</a:t>
+              <a:t>🖐 After this chunk: Activity Steps 2–4</a:t>
             </a:r>
             <a:r>
               <a:rPr sz="2000"/>
-              <a:t> = a simple way to format plain text using a few symbols like </a:t>
-            </a:r>
-            <a:r>
-              <a:rPr sz="2000">
-                <a:latin typeface="Courier"/>
-              </a:rPr>
-              <a:t>#</a:t>
-            </a:r>
-            <a:r>
-              <a:rPr sz="2000"/>
-              <a:t>, </a:t>
-            </a:r>
-            <a:r>
-              <a:rPr sz="2000">
-                <a:latin typeface="Courier"/>
-              </a:rPr>
-              <a:t>*</a:t>
-            </a:r>
-            <a:r>
-              <a:rPr sz="2000"/>
-              <a:t>, and </a:t>
-            </a:r>
-            <a:r>
-              <a:rPr sz="2000">
-                <a:latin typeface="Courier"/>
-              </a:rPr>
-              <a:t>-</a:t>
-            </a:r>
-            <a:r>
-              <a:rPr sz="2000"/>
-              <a:t>.</a:t>
-            </a:r>
-          </a:p>
-        </p:txBody>
-      </p:sp>
-      <p:sp>
-        <p:nvSpPr>
-          <p:cNvPr id="4" name="Content Placeholder 3"/>
-          <p:cNvSpPr>
-            <a:spLocks noGrp="1"/>
-          </p:cNvSpPr>
-          <p:nvPr>
-            <p:ph idx="2" sz="half"/>
-          </p:nvPr>
-        </p:nvSpPr>
-        <p:spPr/>
-        <p:txBody>
-          <a:bodyPr/>
-          <a:lstStyle/>
-          <a:p>
-            <a:pPr lvl="0" indent="0" marL="1270000">
-              <a:buNone/>
-            </a:pPr>
-            <a:r>
-              <a:rPr sz="2000" b="1"/>
-              <a:t>Note</a:t>
-            </a:r>
-          </a:p>
-          <a:p>
-            <a:pPr lvl="0" indent="0" marL="1270000">
-              <a:buNone/>
-            </a:pPr>
-            <a:r>
-              <a:rPr sz="2000" b="1"/>
-              <a:t>📊 Coming from Word?</a:t>
-            </a:r>
-          </a:p>
-          <a:p>
-            <a:pPr lvl="0" indent="0" marL="1270000">
-              <a:buNone/>
-            </a:pPr>
-            <a:r>
-              <a:rPr sz="2000">
-                <a:latin typeface="Courier"/>
-              </a:rPr>
-              <a:t>**bold**</a:t>
-            </a:r>
-            <a:r>
-              <a:rPr sz="2000"/>
-              <a:t> is just the </a:t>
-            </a:r>
-            <a:r>
-              <a:rPr sz="2000" i="1"/>
-              <a:t>keyboard</a:t>
-            </a:r>
-            <a:r>
-              <a:rPr sz="2000"/>
-              <a:t> version of clicking the </a:t>
-            </a:r>
-            <a:r>
-              <a:rPr sz="2000" b="1"/>
-              <a:t>B</a:t>
-            </a:r>
-            <a:r>
-              <a:rPr sz="2000"/>
-              <a:t> button. Same result, no mouse.</a:t>
+              <a:t> (write the YAML, add Markdown, add named chunks).</a:t>
             </a:r>
           </a:p>
         </p:txBody>
@@ -4167,11 +3619,8 @@
         <p:spPr>
           <a:xfrm>
             <a:off x="0" y="0"/>
-            <a:ext cx="9144000" cy="602780"/>
+            <a:ext cx="9144000" cy="582780"/>
           </a:xfrm>
-          <a:solidFill>
-            <a:srgbClr val="1A1A2E"/>
-          </a:solidFill>
         </p:spPr>
         <p:txBody>
           <a:bodyPr/>
@@ -4182,7 +3631,17 @@
             </a:pPr>
             <a:r>
               <a:rPr/>
-              <a:t>Ingredient 3 · Code chunks</a:t>
+              <a:t>Part 2 · Anatomy of a </a:t>
+            </a:r>
+            <a:r>
+              <a:rPr>
+                <a:latin typeface="Courier"/>
+              </a:rPr>
+              <a:t>.qmd</a:t>
+            </a:r>
+            <a:r>
+              <a:rPr/>
+              <a:t> file</a:t>
             </a:r>
           </a:p>
         </p:txBody>
@@ -4194,7 +3653,7 @@
             <a:spLocks noGrp="1"/>
           </p:cNvSpPr>
           <p:nvPr>
-            <p:ph idx="1" sz="half"/>
+            <p:ph idx="1"/>
           </p:nvPr>
         </p:nvSpPr>
         <p:spPr/>
@@ -4203,380 +3662,14 @@
           <a:lstStyle/>
           <a:p>
             <a:pPr lvl="0" indent="0" marL="0">
-              <a:buNone/>
-            </a:pPr>
-            <a:r>
-              <a:rPr/>
-              <a:t>A </a:t>
-            </a:r>
+              <a:spcBef>
+                <a:spcPts val="3000"/>
+              </a:spcBef>
+              <a:buNone/>
+            </a:pPr>
             <a:r>
               <a:rPr b="1"/>
-              <a:t>code chunk</a:t>
-            </a:r>
-            <a:r>
-              <a:rPr/>
-              <a:t> is a fenced block of R that actually </a:t>
-            </a:r>
-            <a:r>
-              <a:rPr b="1"/>
-              <a:t>runs</a:t>
-            </a:r>
-            <a:r>
-              <a:rPr/>
-              <a:t> when you render:</a:t>
-            </a:r>
-          </a:p>
-          <a:p>
-            <a:pPr lvl="0" indent="0">
-              <a:buNone/>
-            </a:pPr>
-            <a:br/>
-            <a:r>
-              <a:rPr>
-                <a:solidFill>
-                  <a:srgbClr val="003B4F"/>
-                </a:solidFill>
-                <a:latin typeface="Courier"/>
-              </a:rPr>
-              <a:t>::: {.cell}</a:t>
-            </a:r>
-            <a:br/>
-            <a:br/>
-            <a:r>
-              <a:rPr>
-                <a:solidFill>
-                  <a:srgbClr val="5E5E5E"/>
-                </a:solidFill>
-                <a:latin typeface="Courier"/>
-              </a:rPr>
-              <a:t>```{.r .cell-code}</a:t>
-            </a:r>
-            <a:br/>
-            <a:r>
-              <a:rPr>
-                <a:solidFill>
-                  <a:srgbClr val="4758AB"/>
-                </a:solidFill>
-                <a:latin typeface="Courier"/>
-              </a:rPr>
-              <a:t>mean</a:t>
-            </a:r>
-            <a:r>
-              <a:rPr>
-                <a:solidFill>
-                  <a:srgbClr val="003B4F"/>
-                </a:solidFill>
-                <a:latin typeface="Courier"/>
-              </a:rPr>
-              <a:t>(</a:t>
-            </a:r>
-            <a:r>
-              <a:rPr>
-                <a:solidFill>
-                  <a:srgbClr val="4758AB"/>
-                </a:solidFill>
-                <a:latin typeface="Courier"/>
-              </a:rPr>
-              <a:t>c</a:t>
-            </a:r>
-            <a:r>
-              <a:rPr>
-                <a:solidFill>
-                  <a:srgbClr val="003B4F"/>
-                </a:solidFill>
-                <a:latin typeface="Courier"/>
-              </a:rPr>
-              <a:t>(</a:t>
-            </a:r>
-            <a:r>
-              <a:rPr>
-                <a:solidFill>
-                  <a:srgbClr val="AD0000"/>
-                </a:solidFill>
-                <a:latin typeface="Courier"/>
-              </a:rPr>
-              <a:t>4</a:t>
-            </a:r>
-            <a:r>
-              <a:rPr>
-                <a:solidFill>
-                  <a:srgbClr val="003B4F"/>
-                </a:solidFill>
-                <a:latin typeface="Courier"/>
-              </a:rPr>
-              <a:t>, </a:t>
-            </a:r>
-            <a:r>
-              <a:rPr>
-                <a:solidFill>
-                  <a:srgbClr val="AD0000"/>
-                </a:solidFill>
-                <a:latin typeface="Courier"/>
-              </a:rPr>
-              <a:t>3</a:t>
-            </a:r>
-            <a:r>
-              <a:rPr>
-                <a:solidFill>
-                  <a:srgbClr val="003B4F"/>
-                </a:solidFill>
-                <a:latin typeface="Courier"/>
-              </a:rPr>
-              <a:t>, </a:t>
-            </a:r>
-            <a:r>
-              <a:rPr>
-                <a:solidFill>
-                  <a:srgbClr val="AD0000"/>
-                </a:solidFill>
-                <a:latin typeface="Courier"/>
-              </a:rPr>
-              <a:t>5</a:t>
-            </a:r>
-            <a:r>
-              <a:rPr>
-                <a:solidFill>
-                  <a:srgbClr val="003B4F"/>
-                </a:solidFill>
-                <a:latin typeface="Courier"/>
-              </a:rPr>
-              <a:t>, </a:t>
-            </a:r>
-            <a:r>
-              <a:rPr>
-                <a:solidFill>
-                  <a:srgbClr val="AD0000"/>
-                </a:solidFill>
-                <a:latin typeface="Courier"/>
-              </a:rPr>
-              <a:t>7</a:t>
-            </a:r>
-            <a:r>
-              <a:rPr>
-                <a:solidFill>
-                  <a:srgbClr val="003B4F"/>
-                </a:solidFill>
-                <a:latin typeface="Courier"/>
-              </a:rPr>
-              <a:t>))</a:t>
-            </a:r>
-            <a:br/>
-            <a:r>
-              <a:rPr>
-                <a:solidFill>
-                  <a:srgbClr val="5E5E5E"/>
-                </a:solidFill>
-                <a:latin typeface="Courier"/>
-              </a:rPr>
-              <a:t>```</a:t>
-            </a:r>
-            <a:br/>
-            <a:br/>
-            <a:r>
-              <a:rPr>
-                <a:solidFill>
-                  <a:srgbClr val="003B4F"/>
-                </a:solidFill>
-                <a:latin typeface="Courier"/>
-              </a:rPr>
-              <a:t>::: {.cell-output .cell-output-stdout}</a:t>
-            </a:r>
-            <a:br/>
-            <a:br/>
-            <a:r>
-              <a:rPr>
-                <a:solidFill>
-                  <a:srgbClr val="5E5E5E"/>
-                </a:solidFill>
-                <a:latin typeface="Courier"/>
-              </a:rPr>
-              <a:t>```</a:t>
-            </a:r>
-            <a:br/>
-            <a:r>
-              <a:rPr>
-                <a:solidFill>
-                  <a:srgbClr val="5E5E5E"/>
-                </a:solidFill>
-                <a:latin typeface="Courier"/>
-              </a:rPr>
-              <a:t>[1] 4.75</a:t>
-            </a:r>
-            <a:br/>
-            <a:r>
-              <a:rPr>
-                <a:solidFill>
-                  <a:srgbClr val="5E5E5E"/>
-                </a:solidFill>
-                <a:latin typeface="Courier"/>
-              </a:rPr>
-              <a:t>```</a:t>
-            </a:r>
-            <a:br/>
-            <a:br/>
-            <a:br/>
-            <a:r>
-              <a:rPr>
-                <a:solidFill>
-                  <a:srgbClr val="003B4F"/>
-                </a:solidFill>
-                <a:latin typeface="Courier"/>
-              </a:rPr>
-              <a:t>:::</a:t>
-            </a:r>
-            <a:br/>
-            <a:r>
-              <a:rPr>
-                <a:solidFill>
-                  <a:srgbClr val="003B4F"/>
-                </a:solidFill>
-                <a:latin typeface="Courier"/>
-              </a:rPr>
-              <a:t>:::</a:t>
-            </a:r>
-          </a:p>
-          <a:p>
-            <a:pPr lvl="0"/>
-            <a:r>
-              <a:rPr/>
-              <a:t>Opening fence: </a:t>
-            </a:r>
-            <a:r>
-              <a:rPr>
-                <a:latin typeface="Courier"/>
-              </a:rPr>
-              <a:t>```{r}</a:t>
-            </a:r>
-            <a:r>
-              <a:rPr/>
-              <a:t> — the </a:t>
-            </a:r>
-            <a:r>
-              <a:rPr>
-                <a:latin typeface="Courier"/>
-              </a:rPr>
-              <a:t>{r}</a:t>
-            </a:r>
-            <a:r>
-              <a:rPr/>
-              <a:t> means “this is R”</a:t>
-            </a:r>
-          </a:p>
-          <a:p>
-            <a:pPr lvl="0"/>
-            <a:r>
-              <a:rPr/>
-              <a:t>Closing fence: </a:t>
-            </a:r>
-            <a:r>
-              <a:rPr>
-                <a:latin typeface="Courier"/>
-              </a:rPr>
-              <a:t>```</a:t>
-            </a:r>
-          </a:p>
-          <a:p>
-            <a:pPr lvl="0"/>
-            <a:r>
-              <a:rPr/>
-              <a:t>The </a:t>
-            </a:r>
-            <a:r>
-              <a:rPr b="1"/>
-              <a:t>code</a:t>
-            </a:r>
-            <a:r>
-              <a:rPr/>
-              <a:t> </a:t>
-            </a:r>
-            <a:r>
-              <a:rPr i="1"/>
-              <a:t>and</a:t>
-            </a:r>
-            <a:r>
-              <a:rPr/>
-              <a:t> its </a:t>
-            </a:r>
-            <a:r>
-              <a:rPr b="1"/>
-              <a:t>output</a:t>
-            </a:r>
-            <a:r>
-              <a:rPr/>
-              <a:t> land in your document</a:t>
-            </a:r>
-          </a:p>
-          <a:p>
-            <a:pPr lvl="0" indent="0" marL="1270000">
-              <a:buNone/>
-            </a:pPr>
-            <a:r>
-              <a:rPr sz="2000" b="1"/>
-              <a:t>Tip</a:t>
-            </a:r>
-          </a:p>
-          <a:p>
-            <a:pPr lvl="0" indent="0" marL="1270000">
-              <a:buNone/>
-            </a:pPr>
-            <a:r>
-              <a:rPr sz="2000"/>
-              <a:t>Shortcut to insert a chunk: </a:t>
-            </a:r>
-            <a:r>
-              <a:rPr sz="2000" b="1"/>
-              <a:t>Ctrl/Cmd + Alt + I</a:t>
-            </a:r>
-          </a:p>
-        </p:txBody>
-      </p:sp>
-      <p:sp>
-        <p:nvSpPr>
-          <p:cNvPr id="4" name="Content Placeholder 3"/>
-          <p:cNvSpPr>
-            <a:spLocks noGrp="1"/>
-          </p:cNvSpPr>
-          <p:nvPr>
-            <p:ph idx="2" sz="half"/>
-          </p:nvPr>
-        </p:nvSpPr>
-        <p:spPr/>
-        <p:txBody>
-          <a:bodyPr/>
-          <a:lstStyle/>
-          <a:p>
-            <a:pPr lvl="0" indent="0" marL="1270000">
-              <a:buNone/>
-            </a:pPr>
-            <a:r>
-              <a:rPr sz="2000" b="1"/>
-              <a:t>Note</a:t>
-            </a:r>
-          </a:p>
-          <a:p>
-            <a:pPr lvl="0" indent="0" marL="1270000">
-              <a:buNone/>
-            </a:pPr>
-            <a:r>
-              <a:rPr sz="2000" b="1"/>
-              <a:t>✅ Key idea</a:t>
-            </a:r>
-          </a:p>
-          <a:p>
-            <a:pPr lvl="0" indent="0" marL="1270000">
-              <a:buNone/>
-            </a:pPr>
-            <a:r>
-              <a:rPr sz="2000"/>
-              <a:t>This is why we write code chunks: the result you see in the report is </a:t>
-            </a:r>
-            <a:r>
-              <a:rPr sz="2000" b="1"/>
-              <a:t>computed live</a:t>
-            </a:r>
-            <a:r>
-              <a:rPr sz="2000"/>
-              <a:t>, so it can never disagree with your code.</a:t>
+              <a:t>Three parts, top to bottom</a:t>
             </a:r>
           </a:p>
         </p:txBody>
@@ -4605,23 +3698,15 @@
       </p:grpSpPr>
       <p:sp>
         <p:nvSpPr>
-          <p:cNvPr id="2" name="Title 1"/>
-          <p:cNvSpPr>
-            <a:spLocks noGrp="1"/>
-          </p:cNvSpPr>
-          <p:nvPr>
-            <p:ph type="title"/>
-          </p:nvPr>
-        </p:nvSpPr>
-        <p:spPr>
-          <a:xfrm>
-            <a:off x="0" y="0"/>
-            <a:ext cx="9144000" cy="602780"/>
-          </a:xfrm>
-          <a:solidFill>
-            <a:srgbClr val="1A1A2E"/>
-          </a:solidFill>
-        </p:spPr>
+          <p:cNvPr id="3" name="Content Placeholder 2"/>
+          <p:cNvSpPr>
+            <a:spLocks noGrp="1"/>
+          </p:cNvSpPr>
+          <p:nvPr>
+            <p:ph idx="1" sz="half"/>
+          </p:nvPr>
+        </p:nvSpPr>
+        <p:spPr/>
         <p:txBody>
           <a:bodyPr/>
           <a:lstStyle/>
@@ -4631,256 +3716,49 @@
             </a:pPr>
             <a:r>
               <a:rPr/>
-              <a:t>Name every chunk (just like your scripts)</a:t>
-            </a:r>
-          </a:p>
-        </p:txBody>
-      </p:sp>
-      <p:sp>
-        <p:nvSpPr>
-          <p:cNvPr id="3" name="Content Placeholder 2"/>
-          <p:cNvSpPr>
-            <a:spLocks noGrp="1"/>
-          </p:cNvSpPr>
-          <p:nvPr>
-            <p:ph idx="1" sz="half"/>
-          </p:nvPr>
-        </p:nvSpPr>
-        <p:spPr/>
-        <p:txBody>
-          <a:bodyPr/>
-          <a:lstStyle/>
+              <a:t>Every Quarto document has the same three ingredients:</a:t>
+            </a:r>
+          </a:p>
+          <a:p>
+            <a:pPr lvl="0" indent="0">
+              <a:buNone/>
+            </a:pPr>
+            <a:r>
+              <a:rPr>
+                <a:latin typeface="Courier"/>
+              </a:rPr>
+              <a:t>1. YAML front matter  ← the recipe (title, output type)
+2. Markdown text      ← your writing, formatted
+3. Code chunks        ← R that runs and shows results</a:t>
+            </a:r>
+          </a:p>
           <a:p>
             <a:pPr lvl="0" indent="0" marL="0">
               <a:buNone/>
             </a:pPr>
             <a:r>
               <a:rPr/>
-              <a:t>Give each chunk a short </a:t>
-            </a:r>
-            <a:r>
-              <a:rPr b="1"/>
-              <a:t>label</a:t>
-            </a:r>
-            <a:r>
-              <a:rPr/>
-              <a:t> after </a:t>
-            </a:r>
-            <a:r>
-              <a:rPr>
-                <a:latin typeface="Courier"/>
-              </a:rPr>
-              <a:t>r</a:t>
-            </a:r>
-            <a:r>
-              <a:rPr/>
-              <a:t>:</a:t>
-            </a:r>
-          </a:p>
-          <a:p>
-            <a:pPr lvl="0" indent="0">
-              <a:buNone/>
-            </a:pPr>
-            <a:br/>
-            <a:r>
-              <a:rPr>
-                <a:solidFill>
-                  <a:srgbClr val="003B4F"/>
-                </a:solidFill>
-                <a:latin typeface="Courier"/>
-              </a:rPr>
-              <a:t>::: {.cell}</a:t>
-            </a:r>
-            <a:br/>
-            <a:br/>
-            <a:r>
-              <a:rPr>
-                <a:solidFill>
-                  <a:srgbClr val="5E5E5E"/>
-                </a:solidFill>
-                <a:latin typeface="Courier"/>
-              </a:rPr>
-              <a:t>```{.r .cell-code}</a:t>
-            </a:r>
-            <a:br/>
-            <a:r>
-              <a:rPr>
-                <a:solidFill>
-                  <a:srgbClr val="4758AB"/>
-                </a:solidFill>
-                <a:latin typeface="Courier"/>
-              </a:rPr>
-              <a:t>library</a:t>
-            </a:r>
-            <a:r>
-              <a:rPr>
-                <a:solidFill>
-                  <a:srgbClr val="003B4F"/>
-                </a:solidFill>
-                <a:latin typeface="Courier"/>
-              </a:rPr>
-              <a:t>(readxl)</a:t>
-            </a:r>
-            <a:br/>
-            <a:r>
-              <a:rPr>
-                <a:solidFill>
-                  <a:srgbClr val="003B4F"/>
-                </a:solidFill>
-                <a:latin typeface="Courier"/>
-              </a:rPr>
-              <a:t>tree_df &lt;- </a:t>
-            </a:r>
-            <a:r>
-              <a:rPr>
-                <a:solidFill>
-                  <a:srgbClr val="4758AB"/>
-                </a:solidFill>
-                <a:latin typeface="Courier"/>
-              </a:rPr>
-              <a:t>read_excel</a:t>
-            </a:r>
-            <a:r>
-              <a:rPr>
-                <a:solidFill>
-                  <a:srgbClr val="003B4F"/>
-                </a:solidFill>
-                <a:latin typeface="Courier"/>
-              </a:rPr>
-              <a:t>(</a:t>
-            </a:r>
-            <a:r>
-              <a:rPr>
-                <a:solidFill>
-                  <a:srgbClr val="20794D"/>
-                </a:solidFill>
-                <a:latin typeface="Courier"/>
-              </a:rPr>
-              <a:t>"data/paper_area_weights.xlsx"</a:t>
-            </a:r>
-            <a:r>
-              <a:rPr>
-                <a:solidFill>
-                  <a:srgbClr val="003B4F"/>
-                </a:solidFill>
-                <a:latin typeface="Courier"/>
-              </a:rPr>
-              <a:t>)</a:t>
-            </a:r>
-            <a:br/>
-            <a:r>
-              <a:rPr>
-                <a:solidFill>
-                  <a:srgbClr val="5E5E5E"/>
-                </a:solidFill>
-                <a:latin typeface="Courier"/>
-              </a:rPr>
-              <a:t>```</a:t>
-            </a:r>
-            <a:br/>
-            <a:r>
-              <a:rPr>
-                <a:solidFill>
-                  <a:srgbClr val="003B4F"/>
-                </a:solidFill>
-                <a:latin typeface="Courier"/>
-              </a:rPr>
-              <a:t>:::</a:t>
-            </a:r>
-          </a:p>
-          <a:p>
-            <a:pPr lvl="0"/>
-            <a:r>
-              <a:rPr/>
-              <a:t>If rendering fails, Quarto tells you </a:t>
-            </a:r>
-            <a:r>
-              <a:rPr b="1"/>
-              <a:t>which named chunk</a:t>
-            </a:r>
-            <a:r>
-              <a:rPr/>
-              <a:t> broke</a:t>
-            </a:r>
-          </a:p>
-          <a:p>
-            <a:pPr lvl="0"/>
-            <a:r>
-              <a:rPr/>
-              <a:t>Same habit as our small, named steps in Lectures 03–04</a:t>
-            </a:r>
-          </a:p>
-          <a:p>
-            <a:pPr lvl="0" indent="0" marL="1270000">
-              <a:buNone/>
-            </a:pPr>
-            <a:r>
-              <a:rPr sz="2000" b="1"/>
-              <a:t>Warning</a:t>
-            </a:r>
-          </a:p>
-          <a:p>
-            <a:pPr lvl="0" indent="0" marL="1270000">
-              <a:buNone/>
-            </a:pPr>
-            <a:r>
-              <a:rPr sz="2000" b="1"/>
-              <a:t>⚠️ Watch out!</a:t>
-            </a:r>
-          </a:p>
-          <a:p>
-            <a:pPr lvl="0" indent="0" marL="1270000">
-              <a:buNone/>
-            </a:pPr>
-            <a:r>
-              <a:rPr sz="2000"/>
-              <a:t>Chunk labels must be </a:t>
-            </a:r>
-            <a:r>
-              <a:rPr sz="2000" b="1"/>
-              <a:t>unique</a:t>
-            </a:r>
-            <a:r>
-              <a:rPr sz="2000"/>
-              <a:t> — no two chunks named </a:t>
-            </a:r>
-            <a:r>
-              <a:rPr sz="2000">
-                <a:latin typeface="Courier"/>
-              </a:rPr>
-              <a:t>plot</a:t>
-            </a:r>
-            <a:r>
-              <a:rPr sz="2000"/>
-              <a:t>. Same rule as never overwriting a </a:t>
-            </a:r>
-            <a:r>
-              <a:rPr sz="2000">
-                <a:latin typeface="Courier"/>
-              </a:rPr>
-              <a:t>_plot</a:t>
-            </a:r>
-            <a:r>
-              <a:rPr sz="2000"/>
-              <a:t> object.</a:t>
-            </a:r>
-          </a:p>
-        </p:txBody>
-      </p:sp>
-      <p:sp>
-        <p:nvSpPr>
-          <p:cNvPr id="4" name="Content Placeholder 3"/>
-          <p:cNvSpPr>
-            <a:spLocks noGrp="1"/>
-          </p:cNvSpPr>
-          <p:nvPr>
-            <p:ph idx="2" sz="half"/>
-          </p:nvPr>
-        </p:nvSpPr>
-        <p:spPr/>
-        <p:txBody>
-          <a:bodyPr/>
-          <a:lstStyle/>
+              <a:t>You already </a:t>
+            </a:r>
+            <a:r>
+              <a:rPr i="1"/>
+              <a:t>read</a:t>
+            </a:r>
+            <a:r>
+              <a:rPr/>
+              <a:t> these every day — this whole lecture is a </a:t>
+            </a:r>
+            <a:r>
+              <a:rPr>
+                <a:latin typeface="Courier"/>
+              </a:rPr>
+              <a:t>.qmd</a:t>
+            </a:r>
+            <a:r>
+              <a:rPr/>
+              <a:t> file.</a:t>
+            </a:r>
+          </a:p>
           <a:p>
             <a:pPr lvl="0" indent="0" marL="1270000">
               <a:buNone/>
@@ -4896,6 +3774,79 @@
             </a:pPr>
             <a:r>
               <a:rPr sz="2000" b="1"/>
+              <a:t>📖 New word</a:t>
+            </a:r>
+          </a:p>
+          <a:p>
+            <a:pPr lvl="0" indent="0" marL="1270000">
+              <a:buNone/>
+            </a:pPr>
+            <a:r>
+              <a:rPr sz="2000" b="1">
+                <a:latin typeface="Courier"/>
+              </a:rPr>
+              <a:t>.qmd</a:t>
+            </a:r>
+            <a:r>
+              <a:rPr sz="2000"/>
+              <a:t> = a </a:t>
+            </a:r>
+            <a:r>
+              <a:rPr sz="2000" b="1"/>
+              <a:t>Q</a:t>
+            </a:r>
+            <a:r>
+              <a:rPr sz="2000"/>
+              <a:t>uarto </a:t>
+            </a:r>
+            <a:r>
+              <a:rPr sz="2000" b="1"/>
+              <a:t>m</a:t>
+            </a:r>
+            <a:r>
+              <a:rPr sz="2000"/>
+              <a:t>ark</a:t>
+            </a:r>
+            <a:r>
+              <a:rPr sz="2000" b="1"/>
+              <a:t>d</a:t>
+            </a:r>
+            <a:r>
+              <a:rPr sz="2000"/>
+              <a:t>own file. Plain text you can open anywhere.</a:t>
+            </a:r>
+          </a:p>
+        </p:txBody>
+      </p:sp>
+      <p:sp>
+        <p:nvSpPr>
+          <p:cNvPr id="4" name="Content Placeholder 3"/>
+          <p:cNvSpPr>
+            <a:spLocks noGrp="1"/>
+          </p:cNvSpPr>
+          <p:nvPr>
+            <p:ph idx="2" sz="half"/>
+          </p:nvPr>
+        </p:nvSpPr>
+        <p:spPr/>
+        <p:txBody>
+          <a:bodyPr/>
+          <a:lstStyle/>
+          <a:p>
+            <a:pPr lvl="0" indent="0" marL="1270000">
+              <a:buNone/>
+            </a:pPr>
+            <a:r>
+              <a:rPr sz="2000" b="1"/>
+              <a:t>Note</a:t>
+            </a:r>
+          </a:p>
+          <a:p>
+            <a:pPr lvl="0" indent="0" marL="1270000">
+              <a:buNone/>
+            </a:pPr>
+            <a:r>
+              <a:rPr sz="2000" b="1"/>
               <a:t>✅ Key idea</a:t>
             </a:r>
           </a:p>
@@ -4905,15 +3856,15 @@
             </a:pPr>
             <a:r>
               <a:rPr sz="2000"/>
-              <a:t>Small, </a:t>
+              <a:t>If you can write a script and write an email, you already know two of the three parts. Only the </a:t>
             </a:r>
             <a:r>
               <a:rPr sz="2000" b="1"/>
-              <a:t>named</a:t>
+              <a:t>YAML</a:t>
             </a:r>
             <a:r>
               <a:rPr sz="2000"/>
-              <a:t> chunks = easy to find the one line that failed. This is the same debugging strategy from your scripts.</a:t>
+              <a:t> is new.</a:t>
             </a:r>
           </a:p>
         </p:txBody>
@@ -4952,6 +3903,2282 @@
         </p:nvSpPr>
         <p:spPr>
           <a:xfrm>
+            <a:off x="0" y="0"/>
+            <a:ext cx="9144000" cy="602780"/>
+          </a:xfrm>
+          <a:solidFill>
+            <a:srgbClr val="1A1A2E"/>
+          </a:solidFill>
+        </p:spPr>
+        <p:txBody>
+          <a:bodyPr/>
+          <a:lstStyle/>
+          <a:p>
+            <a:pPr lvl="0" indent="0" marL="0">
+              <a:buNone/>
+            </a:pPr>
+            <a:r>
+              <a:rPr/>
+              <a:t>Ingredient 1 · YAML front matter</a:t>
+            </a:r>
+          </a:p>
+        </p:txBody>
+      </p:sp>
+      <p:sp>
+        <p:nvSpPr>
+          <p:cNvPr id="3" name="Content Placeholder 2"/>
+          <p:cNvSpPr>
+            <a:spLocks noGrp="1"/>
+          </p:cNvSpPr>
+          <p:nvPr>
+            <p:ph idx="1" sz="half"/>
+          </p:nvPr>
+        </p:nvSpPr>
+        <p:spPr/>
+        <p:txBody>
+          <a:bodyPr/>
+          <a:lstStyle/>
+          <a:p>
+            <a:pPr lvl="0" indent="0" marL="0">
+              <a:buNone/>
+            </a:pPr>
+            <a:r>
+              <a:rPr/>
+              <a:t>The block at the very top, fenced by three dashes </a:t>
+            </a:r>
+            <a:r>
+              <a:rPr>
+                <a:latin typeface="Courier"/>
+              </a:rPr>
+              <a:t>---</a:t>
+            </a:r>
+            <a:r>
+              <a:rPr/>
+              <a:t>. It is the </a:t>
+            </a:r>
+            <a:r>
+              <a:rPr b="1"/>
+              <a:t>recipe</a:t>
+            </a:r>
+            <a:r>
+              <a:rPr/>
+              <a:t> — what to build and how:</a:t>
+            </a:r>
+          </a:p>
+          <a:p>
+            <a:pPr lvl="0" indent="0">
+              <a:buNone/>
+            </a:pPr>
+            <a:r>
+              <a:rPr>
+                <a:solidFill>
+                  <a:srgbClr val="AD0000"/>
+                </a:solidFill>
+                <a:latin typeface="Courier"/>
+              </a:rPr>
+              <a:t>---</a:t>
+            </a:r>
+            <a:br/>
+            <a:r>
+              <a:rPr>
+                <a:solidFill>
+                  <a:srgbClr val="4758AB"/>
+                </a:solidFill>
+                <a:latin typeface="Courier"/>
+              </a:rPr>
+              <a:t>title</a:t>
+            </a:r>
+            <a:r>
+              <a:rPr b="1">
+                <a:solidFill>
+                  <a:srgbClr val="003B4F"/>
+                </a:solidFill>
+                <a:latin typeface="Courier"/>
+              </a:rPr>
+              <a:t>:</a:t>
+            </a:r>
+            <a:r>
+              <a:rPr>
+                <a:solidFill>
+                  <a:srgbClr val="657422"/>
+                </a:solidFill>
+                <a:latin typeface="Courier"/>
+              </a:rPr>
+              <a:t> </a:t>
+            </a:r>
+            <a:r>
+              <a:rPr>
+                <a:solidFill>
+                  <a:srgbClr val="20794D"/>
+                </a:solidFill>
+                <a:latin typeface="Courier"/>
+              </a:rPr>
+              <a:t>"Leaf Morphology Report"</a:t>
+            </a:r>
+            <a:br/>
+            <a:r>
+              <a:rPr>
+                <a:solidFill>
+                  <a:srgbClr val="4758AB"/>
+                </a:solidFill>
+                <a:latin typeface="Courier"/>
+              </a:rPr>
+              <a:t>author</a:t>
+            </a:r>
+            <a:r>
+              <a:rPr b="1">
+                <a:solidFill>
+                  <a:srgbClr val="003B4F"/>
+                </a:solidFill>
+                <a:latin typeface="Courier"/>
+              </a:rPr>
+              <a:t>:</a:t>
+            </a:r>
+            <a:r>
+              <a:rPr>
+                <a:solidFill>
+                  <a:srgbClr val="657422"/>
+                </a:solidFill>
+                <a:latin typeface="Courier"/>
+              </a:rPr>
+              <a:t> </a:t>
+            </a:r>
+            <a:r>
+              <a:rPr>
+                <a:solidFill>
+                  <a:srgbClr val="20794D"/>
+                </a:solidFill>
+                <a:latin typeface="Courier"/>
+              </a:rPr>
+              <a:t>"Your Name"</a:t>
+            </a:r>
+            <a:br/>
+            <a:r>
+              <a:rPr>
+                <a:solidFill>
+                  <a:srgbClr val="4758AB"/>
+                </a:solidFill>
+                <a:latin typeface="Courier"/>
+              </a:rPr>
+              <a:t>date</a:t>
+            </a:r>
+            <a:r>
+              <a:rPr b="1">
+                <a:solidFill>
+                  <a:srgbClr val="003B4F"/>
+                </a:solidFill>
+                <a:latin typeface="Courier"/>
+              </a:rPr>
+              <a:t>:</a:t>
+            </a:r>
+            <a:r>
+              <a:rPr>
+                <a:solidFill>
+                  <a:srgbClr val="657422"/>
+                </a:solidFill>
+                <a:latin typeface="Courier"/>
+              </a:rPr>
+              <a:t> today</a:t>
+            </a:r>
+            <a:br/>
+            <a:r>
+              <a:rPr>
+                <a:solidFill>
+                  <a:srgbClr val="4758AB"/>
+                </a:solidFill>
+                <a:latin typeface="Courier"/>
+              </a:rPr>
+              <a:t>format</a:t>
+            </a:r>
+            <a:r>
+              <a:rPr b="1">
+                <a:solidFill>
+                  <a:srgbClr val="003B4F"/>
+                </a:solidFill>
+                <a:latin typeface="Courier"/>
+              </a:rPr>
+              <a:t>:</a:t>
+            </a:r>
+            <a:r>
+              <a:rPr>
+                <a:solidFill>
+                  <a:srgbClr val="657422"/>
+                </a:solidFill>
+                <a:latin typeface="Courier"/>
+              </a:rPr>
+              <a:t> docx</a:t>
+            </a:r>
+            <a:br/>
+            <a:r>
+              <a:rPr>
+                <a:solidFill>
+                  <a:srgbClr val="AD0000"/>
+                </a:solidFill>
+                <a:latin typeface="Courier"/>
+              </a:rPr>
+              <a:t>---</a:t>
+            </a:r>
+          </a:p>
+          <a:p>
+            <a:pPr lvl="0"/>
+            <a:r>
+              <a:rPr>
+                <a:latin typeface="Courier"/>
+              </a:rPr>
+              <a:t>title</a:t>
+            </a:r>
+            <a:r>
+              <a:rPr/>
+              <a:t>, </a:t>
+            </a:r>
+            <a:r>
+              <a:rPr>
+                <a:latin typeface="Courier"/>
+              </a:rPr>
+              <a:t>author</a:t>
+            </a:r>
+            <a:r>
+              <a:rPr/>
+              <a:t>, </a:t>
+            </a:r>
+            <a:r>
+              <a:rPr>
+                <a:latin typeface="Courier"/>
+              </a:rPr>
+              <a:t>date</a:t>
+            </a:r>
+            <a:r>
+              <a:rPr/>
+              <a:t> — appear at the top of the report</a:t>
+            </a:r>
+          </a:p>
+          <a:p>
+            <a:pPr lvl="0"/>
+            <a:r>
+              <a:rPr>
+                <a:latin typeface="Courier"/>
+              </a:rPr>
+              <a:t>format: docx</a:t>
+            </a:r>
+            <a:r>
+              <a:rPr/>
+              <a:t> — </a:t>
+            </a:r>
+            <a:r>
+              <a:rPr b="1"/>
+              <a:t>make a Word document</a:t>
+            </a:r>
+          </a:p>
+          <a:p>
+            <a:pPr lvl="0" indent="0" marL="1270000">
+              <a:buNone/>
+            </a:pPr>
+            <a:r>
+              <a:rPr sz="2000" b="1"/>
+              <a:t>Warning</a:t>
+            </a:r>
+          </a:p>
+          <a:p>
+            <a:pPr lvl="0" indent="0" marL="1270000">
+              <a:buNone/>
+            </a:pPr>
+            <a:r>
+              <a:rPr sz="2000" b="1"/>
+              <a:t>⚠️ Watch out!</a:t>
+            </a:r>
+          </a:p>
+          <a:p>
+            <a:pPr lvl="0" indent="0" marL="1270000">
+              <a:buNone/>
+            </a:pPr>
+            <a:r>
+              <a:rPr sz="2000"/>
+              <a:t>YAML is </a:t>
+            </a:r>
+            <a:r>
+              <a:rPr sz="2000" b="1"/>
+              <a:t>space-sensitive</a:t>
+            </a:r>
+            <a:r>
+              <a:rPr sz="2000"/>
+              <a:t>. Indent with spaces, never tabs. A stray space is the #1 beginner error.</a:t>
+            </a:r>
+          </a:p>
+        </p:txBody>
+      </p:sp>
+      <p:sp>
+        <p:nvSpPr>
+          <p:cNvPr id="4" name="Content Placeholder 3"/>
+          <p:cNvSpPr>
+            <a:spLocks noGrp="1"/>
+          </p:cNvSpPr>
+          <p:nvPr>
+            <p:ph idx="2" sz="half"/>
+          </p:nvPr>
+        </p:nvSpPr>
+        <p:spPr/>
+        <p:txBody>
+          <a:bodyPr/>
+          <a:lstStyle/>
+          <a:p>
+            <a:pPr lvl="0" indent="0" marL="1270000">
+              <a:buNone/>
+            </a:pPr>
+            <a:r>
+              <a:rPr sz="2000" b="1"/>
+              <a:t>Note</a:t>
+            </a:r>
+          </a:p>
+          <a:p>
+            <a:pPr lvl="0" indent="0" marL="1270000">
+              <a:buNone/>
+            </a:pPr>
+            <a:r>
+              <a:rPr sz="2000" b="1"/>
+              <a:t>📖 New word</a:t>
+            </a:r>
+          </a:p>
+          <a:p>
+            <a:pPr lvl="0" indent="0" marL="1270000">
+              <a:buNone/>
+            </a:pPr>
+            <a:r>
+              <a:rPr sz="2000" b="1"/>
+              <a:t>YAML</a:t>
+            </a:r>
+            <a:r>
+              <a:rPr sz="2000"/>
+              <a:t> = “</a:t>
+            </a:r>
+            <a:r>
+              <a:rPr sz="2000" b="1"/>
+              <a:t>Y</a:t>
+            </a:r>
+            <a:r>
+              <a:rPr sz="2000"/>
+              <a:t>AML </a:t>
+            </a:r>
+            <a:r>
+              <a:rPr sz="2000" b="1"/>
+              <a:t>A</a:t>
+            </a:r>
+            <a:r>
+              <a:rPr sz="2000"/>
+              <a:t>in’t </a:t>
+            </a:r>
+            <a:r>
+              <a:rPr sz="2000" b="1"/>
+              <a:t>M</a:t>
+            </a:r>
+            <a:r>
+              <a:rPr sz="2000"/>
+              <a:t>arkup </a:t>
+            </a:r>
+            <a:r>
+              <a:rPr sz="2000" b="1"/>
+              <a:t>L</a:t>
+            </a:r>
+            <a:r>
+              <a:rPr sz="2000"/>
+              <a:t>anguage.” Just a tidy list of </a:t>
+            </a:r>
+            <a:r>
+              <a:rPr sz="2000">
+                <a:latin typeface="Courier"/>
+              </a:rPr>
+              <a:t>key: value</a:t>
+            </a:r>
+            <a:r>
+              <a:rPr sz="2000"/>
+              <a:t> settings.</a:t>
+            </a:r>
+          </a:p>
+          <a:p>
+            <a:pPr lvl="0" indent="0" marL="0">
+              <a:buNone/>
+            </a:pPr>
+            <a:r>
+              <a:rPr>
+                <a:latin typeface="Courier"/>
+              </a:rPr>
+              <a:t>format:</a:t>
+            </a:r>
+            <a:r>
+              <a:rPr/>
+              <a:t> is the only line you change to get Word vs. HTML vs. PowerPoint.</a:t>
+            </a:r>
+          </a:p>
+        </p:txBody>
+      </p:sp>
+    </p:spTree>
+  </p:cSld>
+</p:sld>
+</file>
+
+<file path=ppt/slides/slide15.xml><?xml version="1.0" encoding="utf-8"?>
+<p:sld xmlns:a="http://schemas.openxmlformats.org/drawingml/2006/main" xmlns:r="http://schemas.openxmlformats.org/officeDocument/2006/relationships" xmlns:p="http://schemas.openxmlformats.org/presentationml/2006/main">
+  <p:cSld>
+    <p:spTree>
+      <p:nvGrpSpPr>
+        <p:cNvPr id="1" name=""/>
+        <p:cNvGrpSpPr/>
+        <p:nvPr/>
+      </p:nvGrpSpPr>
+      <p:grpSpPr>
+        <a:xfrm>
+          <a:off x="0" y="0"/>
+          <a:ext cx="0" cy="0"/>
+          <a:chOff x="0" y="0"/>
+          <a:chExt cx="0" cy="0"/>
+        </a:xfrm>
+      </p:grpSpPr>
+      <p:sp>
+        <p:nvSpPr>
+          <p:cNvPr id="2" name="Title 1"/>
+          <p:cNvSpPr>
+            <a:spLocks noGrp="1"/>
+          </p:cNvSpPr>
+          <p:nvPr>
+            <p:ph type="title"/>
+          </p:nvPr>
+        </p:nvSpPr>
+        <p:spPr>
+          <a:xfrm>
+            <a:off x="0" y="0"/>
+            <a:ext cx="9144000" cy="582780"/>
+          </a:xfrm>
+        </p:spPr>
+        <p:txBody>
+          <a:bodyPr/>
+          <a:lstStyle/>
+          <a:p>
+            <a:pPr lvl="0" indent="0" marL="0">
+              <a:buNone/>
+            </a:pPr>
+            <a:r>
+              <a:rPr/>
+              <a:t>Ingredient 2 · Markdown text</a:t>
+            </a:r>
+          </a:p>
+        </p:txBody>
+      </p:sp>
+      <p:sp>
+        <p:nvSpPr>
+          <p:cNvPr id="3" name="Content Placeholder 2"/>
+          <p:cNvSpPr>
+            <a:spLocks noGrp="1"/>
+          </p:cNvSpPr>
+          <p:nvPr>
+            <p:ph idx="1"/>
+          </p:nvPr>
+        </p:nvSpPr>
+        <p:spPr/>
+        <p:txBody>
+          <a:bodyPr/>
+          <a:lstStyle/>
+          <a:p>
+            <a:pPr lvl="0" indent="0" marL="1270000">
+              <a:buNone/>
+            </a:pPr>
+            <a:r>
+              <a:rPr sz="2000" b="1"/>
+              <a:t>Note</a:t>
+            </a:r>
+          </a:p>
+          <a:p>
+            <a:pPr lvl="0" indent="0" marL="1270000">
+              <a:buNone/>
+            </a:pPr>
+            <a:r>
+              <a:rPr sz="2000" b="1"/>
+              <a:t>🔮 Predict first:</a:t>
+            </a:r>
+            <a:r>
+              <a:rPr sz="2000"/>
+              <a:t> Look at the Markdown block below. Before it renders, sketch what it becomes — which line is a big heading, which are bullets, what turns bold?</a:t>
+            </a:r>
+          </a:p>
+        </p:txBody>
+      </p:sp>
+    </p:spTree>
+  </p:cSld>
+</p:sld>
+</file>
+
+<file path=ppt/slides/slide16.xml><?xml version="1.0" encoding="utf-8"?>
+<p:sld xmlns:a="http://schemas.openxmlformats.org/drawingml/2006/main" xmlns:r="http://schemas.openxmlformats.org/officeDocument/2006/relationships" xmlns:p="http://schemas.openxmlformats.org/presentationml/2006/main">
+  <p:cSld>
+    <p:spTree>
+      <p:nvGrpSpPr>
+        <p:cNvPr id="1" name=""/>
+        <p:cNvGrpSpPr/>
+        <p:nvPr/>
+      </p:nvGrpSpPr>
+      <p:grpSpPr>
+        <a:xfrm>
+          <a:off x="0" y="0"/>
+          <a:ext cx="0" cy="0"/>
+          <a:chOff x="0" y="0"/>
+          <a:chExt cx="0" cy="0"/>
+        </a:xfrm>
+      </p:grpSpPr>
+      <p:sp>
+        <p:nvSpPr>
+          <p:cNvPr id="3" name="Content Placeholder 2"/>
+          <p:cNvSpPr>
+            <a:spLocks noGrp="1"/>
+          </p:cNvSpPr>
+          <p:nvPr>
+            <p:ph idx="1" sz="half"/>
+          </p:nvPr>
+        </p:nvSpPr>
+        <p:spPr/>
+        <p:txBody>
+          <a:bodyPr/>
+          <a:lstStyle/>
+          <a:p>
+            <a:pPr lvl="0" indent="0" marL="0">
+              <a:buNone/>
+            </a:pPr>
+            <a:r>
+              <a:rPr/>
+              <a:t>Markdown is </a:t>
+            </a:r>
+            <a:r>
+              <a:rPr b="1"/>
+              <a:t>formatting with symbols</a:t>
+            </a:r>
+            <a:r>
+              <a:rPr/>
+              <a:t> instead of toolbar buttons:</a:t>
+            </a:r>
+          </a:p>
+          <a:p>
+            <a:pPr lvl="0" indent="0">
+              <a:buNone/>
+            </a:pPr>
+            <a:r>
+              <a:rPr>
+                <a:solidFill>
+                  <a:srgbClr val="4758AB"/>
+                </a:solidFill>
+                <a:latin typeface="Courier"/>
+              </a:rPr>
+              <a:t># A big heading</a:t>
+            </a:r>
+            <a:br/>
+            <a:r>
+              <a:rPr>
+                <a:solidFill>
+                  <a:srgbClr val="4758AB"/>
+                </a:solidFill>
+                <a:latin typeface="Courier"/>
+              </a:rPr>
+              <a:t>## A smaller heading</a:t>
+            </a:r>
+            <a:br/>
+            <a:br/>
+            <a:r>
+              <a:rPr>
+                <a:solidFill>
+                  <a:srgbClr val="003B4F"/>
+                </a:solidFill>
+                <a:latin typeface="Courier"/>
+              </a:rPr>
+              <a:t>Normal text. Make it **bold** or *italic*.</a:t>
+            </a:r>
+            <a:br/>
+            <a:br/>
+            <a:r>
+              <a:rPr>
+                <a:solidFill>
+                  <a:srgbClr val="20794D"/>
+                </a:solidFill>
+                <a:latin typeface="Courier"/>
+              </a:rPr>
+              <a:t>- </a:t>
+            </a:r>
+            <a:r>
+              <a:rPr>
+                <a:solidFill>
+                  <a:srgbClr val="003B4F"/>
+                </a:solidFill>
+                <a:latin typeface="Courier"/>
+              </a:rPr>
+              <a:t>a bullet</a:t>
+            </a:r>
+            <a:br/>
+            <a:r>
+              <a:rPr>
+                <a:solidFill>
+                  <a:srgbClr val="20794D"/>
+                </a:solidFill>
+                <a:latin typeface="Courier"/>
+              </a:rPr>
+              <a:t>- </a:t>
+            </a:r>
+            <a:r>
+              <a:rPr>
+                <a:solidFill>
+                  <a:srgbClr val="003B4F"/>
+                </a:solidFill>
+                <a:latin typeface="Courier"/>
+              </a:rPr>
+              <a:t>another bullet</a:t>
+            </a:r>
+            <a:br/>
+            <a:br/>
+            <a:r>
+              <a:rPr>
+                <a:solidFill>
+                  <a:srgbClr val="5E5E5E"/>
+                </a:solidFill>
+                <a:latin typeface="Courier"/>
+              </a:rPr>
+              <a:t>[</a:t>
+            </a:r>
+            <a:r>
+              <a:rPr>
+                <a:solidFill>
+                  <a:srgbClr val="003B4F"/>
+                </a:solidFill>
+                <a:latin typeface="Courier"/>
+              </a:rPr>
+              <a:t>a link</a:t>
+            </a:r>
+            <a:r>
+              <a:rPr>
+                <a:solidFill>
+                  <a:srgbClr val="5E5E5E"/>
+                </a:solidFill>
+                <a:latin typeface="Courier"/>
+              </a:rPr>
+              <a:t>](https://r4ds.hadley.nz)</a:t>
+            </a:r>
+          </a:p>
+          <a:p>
+            <a:pPr lvl="0" indent="0" marL="0">
+              <a:buNone/>
+            </a:pPr>
+            <a:r>
+              <a:rPr/>
+              <a:t>You write the symbols; Quarto turns them into real headings, bullets, and links.</a:t>
+            </a:r>
+          </a:p>
+          <a:p>
+            <a:pPr lvl="0" indent="0" marL="1270000">
+              <a:buNone/>
+            </a:pPr>
+            <a:r>
+              <a:rPr sz="2000" b="1"/>
+              <a:t>Note</a:t>
+            </a:r>
+          </a:p>
+          <a:p>
+            <a:pPr lvl="0" indent="0" marL="1270000">
+              <a:buNone/>
+            </a:pPr>
+            <a:r>
+              <a:rPr sz="2000" b="1"/>
+              <a:t>📖 New word</a:t>
+            </a:r>
+          </a:p>
+          <a:p>
+            <a:pPr lvl="0" indent="0" marL="1270000">
+              <a:buNone/>
+            </a:pPr>
+            <a:r>
+              <a:rPr sz="2000" b="1"/>
+              <a:t>Markdown</a:t>
+            </a:r>
+            <a:r>
+              <a:rPr sz="2000"/>
+              <a:t> = a simple way to format plain text using a few symbols like </a:t>
+            </a:r>
+            <a:r>
+              <a:rPr sz="2000">
+                <a:latin typeface="Courier"/>
+              </a:rPr>
+              <a:t>#</a:t>
+            </a:r>
+            <a:r>
+              <a:rPr sz="2000"/>
+              <a:t>, </a:t>
+            </a:r>
+            <a:r>
+              <a:rPr sz="2000">
+                <a:latin typeface="Courier"/>
+              </a:rPr>
+              <a:t>*</a:t>
+            </a:r>
+            <a:r>
+              <a:rPr sz="2000"/>
+              <a:t>, and </a:t>
+            </a:r>
+            <a:r>
+              <a:rPr sz="2000">
+                <a:latin typeface="Courier"/>
+              </a:rPr>
+              <a:t>-</a:t>
+            </a:r>
+            <a:r>
+              <a:rPr sz="2000"/>
+              <a:t>.</a:t>
+            </a:r>
+          </a:p>
+        </p:txBody>
+      </p:sp>
+      <p:sp>
+        <p:nvSpPr>
+          <p:cNvPr id="4" name="Content Placeholder 3"/>
+          <p:cNvSpPr>
+            <a:spLocks noGrp="1"/>
+          </p:cNvSpPr>
+          <p:nvPr>
+            <p:ph idx="2" sz="half"/>
+          </p:nvPr>
+        </p:nvSpPr>
+        <p:spPr/>
+        <p:txBody>
+          <a:bodyPr/>
+          <a:lstStyle/>
+          <a:p>
+            <a:pPr lvl="0" indent="0" marL="1270000">
+              <a:buNone/>
+            </a:pPr>
+            <a:r>
+              <a:rPr sz="2000" b="1"/>
+              <a:t>Note</a:t>
+            </a:r>
+          </a:p>
+          <a:p>
+            <a:pPr lvl="0" indent="0" marL="1270000">
+              <a:buNone/>
+            </a:pPr>
+            <a:r>
+              <a:rPr sz="2000" b="1"/>
+              <a:t>📊 Coming from Word?</a:t>
+            </a:r>
+          </a:p>
+          <a:p>
+            <a:pPr lvl="0" indent="0" marL="1270000">
+              <a:buNone/>
+            </a:pPr>
+            <a:r>
+              <a:rPr sz="2000">
+                <a:latin typeface="Courier"/>
+              </a:rPr>
+              <a:t>**bold**</a:t>
+            </a:r>
+            <a:r>
+              <a:rPr sz="2000"/>
+              <a:t> is just the </a:t>
+            </a:r>
+            <a:r>
+              <a:rPr sz="2000" i="1"/>
+              <a:t>keyboard</a:t>
+            </a:r>
+            <a:r>
+              <a:rPr sz="2000"/>
+              <a:t> version of clicking the </a:t>
+            </a:r>
+            <a:r>
+              <a:rPr sz="2000" b="1"/>
+              <a:t>B</a:t>
+            </a:r>
+            <a:r>
+              <a:rPr sz="2000"/>
+              <a:t> button. Same result, no mouse.</a:t>
+            </a:r>
+          </a:p>
+        </p:txBody>
+      </p:sp>
+    </p:spTree>
+  </p:cSld>
+</p:sld>
+</file>
+
+<file path=ppt/slides/slide17.xml><?xml version="1.0" encoding="utf-8"?>
+<p:sld xmlns:a="http://schemas.openxmlformats.org/drawingml/2006/main" xmlns:r="http://schemas.openxmlformats.org/officeDocument/2006/relationships" xmlns:p="http://schemas.openxmlformats.org/presentationml/2006/main">
+  <p:cSld>
+    <p:spTree>
+      <p:nvGrpSpPr>
+        <p:cNvPr id="1" name=""/>
+        <p:cNvGrpSpPr/>
+        <p:nvPr/>
+      </p:nvGrpSpPr>
+      <p:grpSpPr>
+        <a:xfrm>
+          <a:off x="0" y="0"/>
+          <a:ext cx="0" cy="0"/>
+          <a:chOff x="0" y="0"/>
+          <a:chExt cx="0" cy="0"/>
+        </a:xfrm>
+      </p:grpSpPr>
+      <p:sp>
+        <p:nvSpPr>
+          <p:cNvPr id="2" name="Title 1"/>
+          <p:cNvSpPr>
+            <a:spLocks noGrp="1"/>
+          </p:cNvSpPr>
+          <p:nvPr>
+            <p:ph type="title"/>
+          </p:nvPr>
+        </p:nvSpPr>
+        <p:spPr>
+          <a:xfrm>
+            <a:off x="0" y="0"/>
+            <a:ext cx="9144000" cy="582780"/>
+          </a:xfrm>
+        </p:spPr>
+        <p:txBody>
+          <a:bodyPr/>
+          <a:lstStyle/>
+          <a:p>
+            <a:pPr lvl="0" indent="0" marL="0">
+              <a:buNone/>
+            </a:pPr>
+            <a:r>
+              <a:rPr/>
+              <a:t>Ingredient 3 · Code chunks</a:t>
+            </a:r>
+          </a:p>
+        </p:txBody>
+      </p:sp>
+      <p:sp>
+        <p:nvSpPr>
+          <p:cNvPr id="3" name="Content Placeholder 2"/>
+          <p:cNvSpPr>
+            <a:spLocks noGrp="1"/>
+          </p:cNvSpPr>
+          <p:nvPr>
+            <p:ph idx="1"/>
+          </p:nvPr>
+        </p:nvSpPr>
+        <p:spPr/>
+        <p:txBody>
+          <a:bodyPr/>
+          <a:lstStyle/>
+          <a:p>
+            <a:pPr lvl="0" indent="0" marL="1270000">
+              <a:buNone/>
+            </a:pPr>
+            <a:r>
+              <a:rPr sz="2000" b="1"/>
+              <a:t>Note</a:t>
+            </a:r>
+          </a:p>
+          <a:p>
+            <a:pPr lvl="0" indent="0" marL="1270000">
+              <a:buNone/>
+            </a:pPr>
+            <a:r>
+              <a:rPr sz="2000" b="1"/>
+              <a:t>🔮 Predict first:</a:t>
+            </a:r>
+            <a:r>
+              <a:rPr sz="2000"/>
+              <a:t> The chunk below runs </a:t>
+            </a:r>
+            <a:r>
+              <a:rPr sz="2000">
+                <a:latin typeface="Courier"/>
+              </a:rPr>
+              <a:t>mean(c(4, 3, 5, 7))</a:t>
+            </a:r>
+            <a:r>
+              <a:rPr sz="2000"/>
+              <a:t>. What number will land in the document? Predict before you look.</a:t>
+            </a:r>
+          </a:p>
+        </p:txBody>
+      </p:sp>
+    </p:spTree>
+  </p:cSld>
+</p:sld>
+</file>
+
+<file path=ppt/slides/slide18.xml><?xml version="1.0" encoding="utf-8"?>
+<p:sld xmlns:a="http://schemas.openxmlformats.org/drawingml/2006/main" xmlns:r="http://schemas.openxmlformats.org/officeDocument/2006/relationships" xmlns:p="http://schemas.openxmlformats.org/presentationml/2006/main">
+  <p:cSld>
+    <p:spTree>
+      <p:nvGrpSpPr>
+        <p:cNvPr id="1" name=""/>
+        <p:cNvGrpSpPr/>
+        <p:nvPr/>
+      </p:nvGrpSpPr>
+      <p:grpSpPr>
+        <a:xfrm>
+          <a:off x="0" y="0"/>
+          <a:ext cx="0" cy="0"/>
+          <a:chOff x="0" y="0"/>
+          <a:chExt cx="0" cy="0"/>
+        </a:xfrm>
+      </p:grpSpPr>
+      <p:sp>
+        <p:nvSpPr>
+          <p:cNvPr id="3" name="Content Placeholder 2"/>
+          <p:cNvSpPr>
+            <a:spLocks noGrp="1"/>
+          </p:cNvSpPr>
+          <p:nvPr>
+            <p:ph idx="1" sz="half"/>
+          </p:nvPr>
+        </p:nvSpPr>
+        <p:spPr/>
+        <p:txBody>
+          <a:bodyPr/>
+          <a:lstStyle/>
+          <a:p>
+            <a:pPr lvl="0" indent="0" marL="0">
+              <a:buNone/>
+            </a:pPr>
+            <a:r>
+              <a:rPr/>
+              <a:t>A </a:t>
+            </a:r>
+            <a:r>
+              <a:rPr b="1"/>
+              <a:t>code chunk</a:t>
+            </a:r>
+            <a:r>
+              <a:rPr/>
+              <a:t> is a fenced block of R that actually </a:t>
+            </a:r>
+            <a:r>
+              <a:rPr b="1"/>
+              <a:t>runs</a:t>
+            </a:r>
+            <a:r>
+              <a:rPr/>
+              <a:t> when you render:</a:t>
+            </a:r>
+          </a:p>
+          <a:p>
+            <a:pPr lvl="0" indent="0">
+              <a:buNone/>
+            </a:pPr>
+            <a:r>
+              <a:rPr>
+                <a:solidFill>
+                  <a:srgbClr val="5E5E5E"/>
+                </a:solidFill>
+                <a:latin typeface="Courier"/>
+              </a:rPr>
+              <a:t>```{r}</a:t>
+            </a:r>
+            <a:br/>
+            <a:r>
+              <a:rPr>
+                <a:solidFill>
+                  <a:srgbClr val="4758AB"/>
+                </a:solidFill>
+                <a:latin typeface="Courier"/>
+              </a:rPr>
+              <a:t>mean</a:t>
+            </a:r>
+            <a:r>
+              <a:rPr>
+                <a:solidFill>
+                  <a:srgbClr val="003B4F"/>
+                </a:solidFill>
+                <a:latin typeface="Courier"/>
+              </a:rPr>
+              <a:t>(</a:t>
+            </a:r>
+            <a:r>
+              <a:rPr>
+                <a:solidFill>
+                  <a:srgbClr val="4758AB"/>
+                </a:solidFill>
+                <a:latin typeface="Courier"/>
+              </a:rPr>
+              <a:t>c</a:t>
+            </a:r>
+            <a:r>
+              <a:rPr>
+                <a:solidFill>
+                  <a:srgbClr val="003B4F"/>
+                </a:solidFill>
+                <a:latin typeface="Courier"/>
+              </a:rPr>
+              <a:t>(</a:t>
+            </a:r>
+            <a:r>
+              <a:rPr>
+                <a:solidFill>
+                  <a:srgbClr val="AD0000"/>
+                </a:solidFill>
+                <a:latin typeface="Courier"/>
+              </a:rPr>
+              <a:t>4</a:t>
+            </a:r>
+            <a:r>
+              <a:rPr>
+                <a:solidFill>
+                  <a:srgbClr val="003B4F"/>
+                </a:solidFill>
+                <a:latin typeface="Courier"/>
+              </a:rPr>
+              <a:t>, </a:t>
+            </a:r>
+            <a:r>
+              <a:rPr>
+                <a:solidFill>
+                  <a:srgbClr val="AD0000"/>
+                </a:solidFill>
+                <a:latin typeface="Courier"/>
+              </a:rPr>
+              <a:t>3</a:t>
+            </a:r>
+            <a:r>
+              <a:rPr>
+                <a:solidFill>
+                  <a:srgbClr val="003B4F"/>
+                </a:solidFill>
+                <a:latin typeface="Courier"/>
+              </a:rPr>
+              <a:t>, </a:t>
+            </a:r>
+            <a:r>
+              <a:rPr>
+                <a:solidFill>
+                  <a:srgbClr val="AD0000"/>
+                </a:solidFill>
+                <a:latin typeface="Courier"/>
+              </a:rPr>
+              <a:t>5</a:t>
+            </a:r>
+            <a:r>
+              <a:rPr>
+                <a:solidFill>
+                  <a:srgbClr val="003B4F"/>
+                </a:solidFill>
+                <a:latin typeface="Courier"/>
+              </a:rPr>
+              <a:t>, </a:t>
+            </a:r>
+            <a:r>
+              <a:rPr>
+                <a:solidFill>
+                  <a:srgbClr val="AD0000"/>
+                </a:solidFill>
+                <a:latin typeface="Courier"/>
+              </a:rPr>
+              <a:t>7</a:t>
+            </a:r>
+            <a:r>
+              <a:rPr>
+                <a:solidFill>
+                  <a:srgbClr val="003B4F"/>
+                </a:solidFill>
+                <a:latin typeface="Courier"/>
+              </a:rPr>
+              <a:t>))</a:t>
+            </a:r>
+            <a:br/>
+            <a:r>
+              <a:rPr>
+                <a:solidFill>
+                  <a:srgbClr val="5E5E5E"/>
+                </a:solidFill>
+                <a:latin typeface="Courier"/>
+              </a:rPr>
+              <a:t>```</a:t>
+            </a:r>
+          </a:p>
+          <a:p>
+            <a:pPr lvl="0"/>
+            <a:r>
+              <a:rPr/>
+              <a:t>Opening fence: </a:t>
+            </a:r>
+            <a:r>
+              <a:rPr>
+                <a:latin typeface="Courier"/>
+              </a:rPr>
+              <a:t>```{r}</a:t>
+            </a:r>
+            <a:r>
+              <a:rPr/>
+              <a:t> — the </a:t>
+            </a:r>
+            <a:r>
+              <a:rPr>
+                <a:latin typeface="Courier"/>
+              </a:rPr>
+              <a:t>{r}</a:t>
+            </a:r>
+            <a:r>
+              <a:rPr/>
+              <a:t> means “this is R”</a:t>
+            </a:r>
+          </a:p>
+          <a:p>
+            <a:pPr lvl="0"/>
+            <a:r>
+              <a:rPr/>
+              <a:t>Closing fence: </a:t>
+            </a:r>
+            <a:r>
+              <a:rPr>
+                <a:latin typeface="Courier"/>
+              </a:rPr>
+              <a:t>```</a:t>
+            </a:r>
+          </a:p>
+          <a:p>
+            <a:pPr lvl="0"/>
+            <a:r>
+              <a:rPr/>
+              <a:t>The </a:t>
+            </a:r>
+            <a:r>
+              <a:rPr b="1"/>
+              <a:t>code</a:t>
+            </a:r>
+            <a:r>
+              <a:rPr/>
+              <a:t> </a:t>
+            </a:r>
+            <a:r>
+              <a:rPr i="1"/>
+              <a:t>and</a:t>
+            </a:r>
+            <a:r>
+              <a:rPr/>
+              <a:t> its </a:t>
+            </a:r>
+            <a:r>
+              <a:rPr b="1"/>
+              <a:t>output</a:t>
+            </a:r>
+            <a:r>
+              <a:rPr/>
+              <a:t> land in your document</a:t>
+            </a:r>
+          </a:p>
+          <a:p>
+            <a:pPr lvl="0" indent="0" marL="1270000">
+              <a:buNone/>
+            </a:pPr>
+            <a:r>
+              <a:rPr sz="2000" b="1"/>
+              <a:t>Tip</a:t>
+            </a:r>
+          </a:p>
+          <a:p>
+            <a:pPr lvl="0" indent="0" marL="1270000">
+              <a:buNone/>
+            </a:pPr>
+            <a:r>
+              <a:rPr sz="2000"/>
+              <a:t>Shortcut to insert a chunk: </a:t>
+            </a:r>
+            <a:r>
+              <a:rPr sz="2000" b="1"/>
+              <a:t>Ctrl/Cmd + Alt + I</a:t>
+            </a:r>
+          </a:p>
+        </p:txBody>
+      </p:sp>
+      <p:sp>
+        <p:nvSpPr>
+          <p:cNvPr id="4" name="Content Placeholder 3"/>
+          <p:cNvSpPr>
+            <a:spLocks noGrp="1"/>
+          </p:cNvSpPr>
+          <p:nvPr>
+            <p:ph idx="2" sz="half"/>
+          </p:nvPr>
+        </p:nvSpPr>
+        <p:spPr/>
+        <p:txBody>
+          <a:bodyPr/>
+          <a:lstStyle/>
+          <a:p>
+            <a:pPr lvl="0" indent="0" marL="1270000">
+              <a:buNone/>
+            </a:pPr>
+            <a:r>
+              <a:rPr sz="2000" b="1"/>
+              <a:t>Note</a:t>
+            </a:r>
+          </a:p>
+          <a:p>
+            <a:pPr lvl="0" indent="0" marL="1270000">
+              <a:buNone/>
+            </a:pPr>
+            <a:r>
+              <a:rPr sz="2000" b="1"/>
+              <a:t>✅ Key idea</a:t>
+            </a:r>
+          </a:p>
+          <a:p>
+            <a:pPr lvl="0" indent="0" marL="1270000">
+              <a:buNone/>
+            </a:pPr>
+            <a:r>
+              <a:rPr sz="2000"/>
+              <a:t>This is why we write code chunks: the result you see in the report is </a:t>
+            </a:r>
+            <a:r>
+              <a:rPr sz="2000" b="1"/>
+              <a:t>computed live</a:t>
+            </a:r>
+            <a:r>
+              <a:rPr sz="2000"/>
+              <a:t>, so it can never disagree with your code.</a:t>
+            </a:r>
+          </a:p>
+        </p:txBody>
+      </p:sp>
+    </p:spTree>
+  </p:cSld>
+</p:sld>
+</file>
+
+<file path=ppt/slides/slide19.xml><?xml version="1.0" encoding="utf-8"?>
+<p:sld xmlns:a="http://schemas.openxmlformats.org/drawingml/2006/main" xmlns:r="http://schemas.openxmlformats.org/officeDocument/2006/relationships" xmlns:p="http://schemas.openxmlformats.org/presentationml/2006/main">
+  <p:cSld>
+    <p:spTree>
+      <p:nvGrpSpPr>
+        <p:cNvPr id="1" name=""/>
+        <p:cNvGrpSpPr/>
+        <p:nvPr/>
+      </p:nvGrpSpPr>
+      <p:grpSpPr>
+        <a:xfrm>
+          <a:off x="0" y="0"/>
+          <a:ext cx="0" cy="0"/>
+          <a:chOff x="0" y="0"/>
+          <a:chExt cx="0" cy="0"/>
+        </a:xfrm>
+      </p:grpSpPr>
+      <p:sp>
+        <p:nvSpPr>
+          <p:cNvPr id="2" name="Title 1"/>
+          <p:cNvSpPr>
+            <a:spLocks noGrp="1"/>
+          </p:cNvSpPr>
+          <p:nvPr>
+            <p:ph type="title"/>
+          </p:nvPr>
+        </p:nvSpPr>
+        <p:spPr>
+          <a:xfrm>
+            <a:off x="0" y="0"/>
+            <a:ext cx="9144000" cy="602780"/>
+          </a:xfrm>
+          <a:solidFill>
+            <a:srgbClr val="1A1A2E"/>
+          </a:solidFill>
+        </p:spPr>
+        <p:txBody>
+          <a:bodyPr/>
+          <a:lstStyle/>
+          <a:p>
+            <a:pPr lvl="0" indent="0" marL="0">
+              <a:buNone/>
+            </a:pPr>
+            <a:r>
+              <a:rPr/>
+              <a:t>Name every chunk (just like your scripts)</a:t>
+            </a:r>
+          </a:p>
+        </p:txBody>
+      </p:sp>
+      <p:sp>
+        <p:nvSpPr>
+          <p:cNvPr id="3" name="Content Placeholder 2"/>
+          <p:cNvSpPr>
+            <a:spLocks noGrp="1"/>
+          </p:cNvSpPr>
+          <p:nvPr>
+            <p:ph idx="1" sz="half"/>
+          </p:nvPr>
+        </p:nvSpPr>
+        <p:spPr/>
+        <p:txBody>
+          <a:bodyPr/>
+          <a:lstStyle/>
+          <a:p>
+            <a:pPr lvl="0" indent="0" marL="0">
+              <a:buNone/>
+            </a:pPr>
+            <a:r>
+              <a:rPr/>
+              <a:t>Give each chunk a short </a:t>
+            </a:r>
+            <a:r>
+              <a:rPr b="1"/>
+              <a:t>label</a:t>
+            </a:r>
+            <a:r>
+              <a:rPr/>
+              <a:t> after </a:t>
+            </a:r>
+            <a:r>
+              <a:rPr>
+                <a:latin typeface="Courier"/>
+              </a:rPr>
+              <a:t>r</a:t>
+            </a:r>
+            <a:r>
+              <a:rPr/>
+              <a:t>:</a:t>
+            </a:r>
+          </a:p>
+          <a:p>
+            <a:pPr lvl="0" indent="0">
+              <a:buNone/>
+            </a:pPr>
+            <a:r>
+              <a:rPr>
+                <a:solidFill>
+                  <a:srgbClr val="5E5E5E"/>
+                </a:solidFill>
+                <a:latin typeface="Courier"/>
+              </a:rPr>
+              <a:t>```{r load-data}</a:t>
+            </a:r>
+            <a:br/>
+            <a:r>
+              <a:rPr>
+                <a:solidFill>
+                  <a:srgbClr val="4758AB"/>
+                </a:solidFill>
+                <a:latin typeface="Courier"/>
+              </a:rPr>
+              <a:t>library</a:t>
+            </a:r>
+            <a:r>
+              <a:rPr>
+                <a:solidFill>
+                  <a:srgbClr val="003B4F"/>
+                </a:solidFill>
+                <a:latin typeface="Courier"/>
+              </a:rPr>
+              <a:t>(readxl)</a:t>
+            </a:r>
+            <a:br/>
+            <a:r>
+              <a:rPr>
+                <a:solidFill>
+                  <a:srgbClr val="003B4F"/>
+                </a:solidFill>
+                <a:latin typeface="Courier"/>
+              </a:rPr>
+              <a:t>tree_df &lt;- </a:t>
+            </a:r>
+            <a:r>
+              <a:rPr>
+                <a:solidFill>
+                  <a:srgbClr val="4758AB"/>
+                </a:solidFill>
+                <a:latin typeface="Courier"/>
+              </a:rPr>
+              <a:t>read_excel</a:t>
+            </a:r>
+            <a:r>
+              <a:rPr>
+                <a:solidFill>
+                  <a:srgbClr val="003B4F"/>
+                </a:solidFill>
+                <a:latin typeface="Courier"/>
+              </a:rPr>
+              <a:t>(</a:t>
+            </a:r>
+            <a:r>
+              <a:rPr>
+                <a:solidFill>
+                  <a:srgbClr val="20794D"/>
+                </a:solidFill>
+                <a:latin typeface="Courier"/>
+              </a:rPr>
+              <a:t>"data/paper_area_weights.xlsx"</a:t>
+            </a:r>
+            <a:r>
+              <a:rPr>
+                <a:solidFill>
+                  <a:srgbClr val="003B4F"/>
+                </a:solidFill>
+                <a:latin typeface="Courier"/>
+              </a:rPr>
+              <a:t>)</a:t>
+            </a:r>
+            <a:br/>
+            <a:r>
+              <a:rPr>
+                <a:solidFill>
+                  <a:srgbClr val="5E5E5E"/>
+                </a:solidFill>
+                <a:latin typeface="Courier"/>
+              </a:rPr>
+              <a:t>```</a:t>
+            </a:r>
+          </a:p>
+          <a:p>
+            <a:pPr lvl="0"/>
+            <a:r>
+              <a:rPr/>
+              <a:t>If rendering fails, Quarto tells you </a:t>
+            </a:r>
+            <a:r>
+              <a:rPr b="1"/>
+              <a:t>which named chunk</a:t>
+            </a:r>
+            <a:r>
+              <a:rPr/>
+              <a:t> broke</a:t>
+            </a:r>
+          </a:p>
+          <a:p>
+            <a:pPr lvl="0"/>
+            <a:r>
+              <a:rPr/>
+              <a:t>Same habit as our small, named steps in Lectures 03–04</a:t>
+            </a:r>
+          </a:p>
+          <a:p>
+            <a:pPr lvl="0" indent="0" marL="1270000">
+              <a:buNone/>
+            </a:pPr>
+            <a:r>
+              <a:rPr sz="2000" b="1"/>
+              <a:t>Warning</a:t>
+            </a:r>
+          </a:p>
+          <a:p>
+            <a:pPr lvl="0" indent="0" marL="1270000">
+              <a:buNone/>
+            </a:pPr>
+            <a:r>
+              <a:rPr sz="2000" b="1"/>
+              <a:t>⚠️ Watch out!</a:t>
+            </a:r>
+          </a:p>
+          <a:p>
+            <a:pPr lvl="0" indent="0" marL="1270000">
+              <a:buNone/>
+            </a:pPr>
+            <a:r>
+              <a:rPr sz="2000"/>
+              <a:t>Chunk labels must be </a:t>
+            </a:r>
+            <a:r>
+              <a:rPr sz="2000" b="1"/>
+              <a:t>unique</a:t>
+            </a:r>
+            <a:r>
+              <a:rPr sz="2000"/>
+              <a:t> — no two chunks named </a:t>
+            </a:r>
+            <a:r>
+              <a:rPr sz="2000">
+                <a:latin typeface="Courier"/>
+              </a:rPr>
+              <a:t>plot</a:t>
+            </a:r>
+            <a:r>
+              <a:rPr sz="2000"/>
+              <a:t>. Same rule as never overwriting a </a:t>
+            </a:r>
+            <a:r>
+              <a:rPr sz="2000">
+                <a:latin typeface="Courier"/>
+              </a:rPr>
+              <a:t>_plot</a:t>
+            </a:r>
+            <a:r>
+              <a:rPr sz="2000"/>
+              <a:t> object.</a:t>
+            </a:r>
+          </a:p>
+        </p:txBody>
+      </p:sp>
+      <p:sp>
+        <p:nvSpPr>
+          <p:cNvPr id="4" name="Content Placeholder 3"/>
+          <p:cNvSpPr>
+            <a:spLocks noGrp="1"/>
+          </p:cNvSpPr>
+          <p:nvPr>
+            <p:ph idx="2" sz="half"/>
+          </p:nvPr>
+        </p:nvSpPr>
+        <p:spPr/>
+        <p:txBody>
+          <a:bodyPr/>
+          <a:lstStyle/>
+          <a:p>
+            <a:pPr lvl="0" indent="0" marL="1270000">
+              <a:buNone/>
+            </a:pPr>
+            <a:r>
+              <a:rPr sz="2000" b="1"/>
+              <a:t>Note</a:t>
+            </a:r>
+          </a:p>
+          <a:p>
+            <a:pPr lvl="0" indent="0" marL="1270000">
+              <a:buNone/>
+            </a:pPr>
+            <a:r>
+              <a:rPr sz="2000" b="1"/>
+              <a:t>✅ Key idea</a:t>
+            </a:r>
+          </a:p>
+          <a:p>
+            <a:pPr lvl="0" indent="0" marL="1270000">
+              <a:buNone/>
+            </a:pPr>
+            <a:r>
+              <a:rPr sz="2000"/>
+              <a:t>Small, </a:t>
+            </a:r>
+            <a:r>
+              <a:rPr sz="2000" b="1"/>
+              <a:t>named</a:t>
+            </a:r>
+            <a:r>
+              <a:rPr sz="2000"/>
+              <a:t> chunks = easy to find the one line that failed. This is the same debugging strategy from your scripts.</a:t>
+            </a:r>
+          </a:p>
+        </p:txBody>
+      </p:sp>
+    </p:spTree>
+  </p:cSld>
+</p:sld>
+</file>
+
+<file path=ppt/slides/slide2.xml><?xml version="1.0" encoding="utf-8"?>
+<p:sld xmlns:a="http://schemas.openxmlformats.org/drawingml/2006/main" xmlns:r="http://schemas.openxmlformats.org/officeDocument/2006/relationships" xmlns:p="http://schemas.openxmlformats.org/presentationml/2006/main">
+  <p:cSld>
+    <p:spTree>
+      <p:nvGrpSpPr>
+        <p:cNvPr id="1" name=""/>
+        <p:cNvGrpSpPr/>
+        <p:nvPr/>
+      </p:nvGrpSpPr>
+      <p:grpSpPr>
+        <a:xfrm>
+          <a:off x="0" y="0"/>
+          <a:ext cx="0" cy="0"/>
+          <a:chOff x="0" y="0"/>
+          <a:chExt cx="0" cy="0"/>
+        </a:xfrm>
+      </p:grpSpPr>
+      <p:sp>
+        <p:nvSpPr>
+          <p:cNvPr id="2" name="Title 1"/>
+          <p:cNvSpPr>
+            <a:spLocks noGrp="1"/>
+          </p:cNvSpPr>
+          <p:nvPr>
+            <p:ph type="title"/>
+          </p:nvPr>
+        </p:nvSpPr>
+        <p:spPr>
+          <a:xfrm>
+            <a:off x="0" y="0"/>
+            <a:ext cx="9144000" cy="582780"/>
+          </a:xfrm>
+        </p:spPr>
+        <p:txBody>
+          <a:bodyPr/>
+          <a:lstStyle/>
+          <a:p>
+            <a:pPr lvl="0" indent="0" marL="0">
+              <a:buNone/>
+            </a:pPr>
+            <a:r>
+              <a:rPr/>
+              <a:t>Where we left off (Lecture 04)</a:t>
+            </a:r>
+          </a:p>
+        </p:txBody>
+      </p:sp>
+      <p:sp>
+        <p:nvSpPr>
+          <p:cNvPr id="3" name="Content Placeholder 2"/>
+          <p:cNvSpPr>
+            <a:spLocks noGrp="1"/>
+          </p:cNvSpPr>
+          <p:nvPr>
+            <p:ph idx="1"/>
+          </p:nvPr>
+        </p:nvSpPr>
+        <p:spPr/>
+        <p:txBody>
+          <a:bodyPr/>
+          <a:lstStyle/>
+          <a:p>
+            <a:pPr lvl="0"/>
+            <a:r>
+              <a:rPr b="1"/>
+              <a:t>Wrangling</a:t>
+            </a:r>
+            <a:r>
+              <a:rPr/>
+              <a:t> — </a:t>
+            </a:r>
+            <a:r>
+              <a:rPr>
+                <a:latin typeface="Courier"/>
+              </a:rPr>
+              <a:t>filter()</a:t>
+            </a:r>
+            <a:r>
+              <a:rPr/>
+              <a:t>, </a:t>
+            </a:r>
+            <a:r>
+              <a:rPr>
+                <a:latin typeface="Courier"/>
+              </a:rPr>
+              <a:t>select()</a:t>
+            </a:r>
+            <a:r>
+              <a:rPr/>
+              <a:t>, </a:t>
+            </a:r>
+            <a:r>
+              <a:rPr>
+                <a:latin typeface="Courier"/>
+              </a:rPr>
+              <a:t>mutate()</a:t>
+            </a:r>
+            <a:r>
+              <a:rPr/>
+              <a:t>, </a:t>
+            </a:r>
+            <a:r>
+              <a:rPr>
+                <a:latin typeface="Courier"/>
+              </a:rPr>
+              <a:t>arrange()</a:t>
+            </a:r>
+          </a:p>
+          <a:p>
+            <a:pPr lvl="0"/>
+            <a:r>
+              <a:rPr b="1"/>
+              <a:t>Descriptive stats</a:t>
+            </a:r>
+            <a:r>
+              <a:rPr/>
+              <a:t> — mean, median, SD, SE with </a:t>
+            </a:r>
+            <a:r>
+              <a:rPr>
+                <a:latin typeface="Courier"/>
+              </a:rPr>
+              <a:t>group_by()</a:t>
+            </a:r>
+            <a:r>
+              <a:rPr/>
+              <a:t> + </a:t>
+            </a:r>
+            <a:r>
+              <a:rPr>
+                <a:latin typeface="Courier"/>
+              </a:rPr>
+              <a:t>summarize()</a:t>
+            </a:r>
+          </a:p>
+          <a:p>
+            <a:pPr lvl="0"/>
+            <a:r>
+              <a:rPr b="1"/>
+              <a:t>Welch’s t-test</a:t>
+            </a:r>
+            <a:r>
+              <a:rPr/>
+              <a:t> — shady leaves significantly heavier than sunny</a:t>
+            </a:r>
+          </a:p>
+          <a:p>
+            <a:pPr lvl="0"/>
+            <a:r>
+              <a:rPr b="1"/>
+              <a:t>Figures</a:t>
+            </a:r>
+            <a:r>
+              <a:rPr/>
+              <a:t> — boxplots and mean ± SE, saved as PNG</a:t>
+            </a:r>
+          </a:p>
+          <a:p>
+            <a:pPr lvl="0"/>
+            <a:r>
+              <a:rPr/>
+              <a:t>Everything so far lives in a </a:t>
+            </a:r>
+            <a:r>
+              <a:rPr b="1">
+                <a:latin typeface="Courier"/>
+              </a:rPr>
+              <a:t>.R</a:t>
+            </a:r>
+            <a:r>
+              <a:rPr b="1"/>
+              <a:t> script</a:t>
+            </a:r>
+          </a:p>
+          <a:p>
+            <a:pPr lvl="0" indent="0" marL="1270000">
+              <a:buNone/>
+            </a:pPr>
+            <a:r>
+              <a:rPr sz="2000" b="1"/>
+              <a:t>Note</a:t>
+            </a:r>
+          </a:p>
+          <a:p>
+            <a:pPr lvl="0" indent="0" marL="1270000">
+              <a:buNone/>
+            </a:pPr>
+            <a:r>
+              <a:rPr sz="2000" b="1"/>
+              <a:t>✅ Key idea from Lecture 04</a:t>
+            </a:r>
+          </a:p>
+          <a:p>
+            <a:pPr lvl="0" indent="0" marL="1270000">
+              <a:buNone/>
+            </a:pPr>
+            <a:r>
+              <a:rPr sz="2000"/>
+              <a:t>You now have a complete analysis and a real result. Today we turn that pile of code into a </a:t>
+            </a:r>
+            <a:r>
+              <a:rPr sz="2000" b="1"/>
+              <a:t>report a human can read</a:t>
+            </a:r>
+            <a:r>
+              <a:rPr sz="2000"/>
+              <a:t>.</a:t>
+            </a:r>
+          </a:p>
+        </p:txBody>
+      </p:sp>
+    </p:spTree>
+  </p:cSld>
+</p:sld>
+</file>
+
+<file path=ppt/slides/slide20.xml><?xml version="1.0" encoding="utf-8"?>
+<p:sld xmlns:a="http://schemas.openxmlformats.org/drawingml/2006/main" xmlns:r="http://schemas.openxmlformats.org/officeDocument/2006/relationships" xmlns:p="http://schemas.openxmlformats.org/presentationml/2006/main">
+  <p:cSld>
+    <p:spTree>
+      <p:nvGrpSpPr>
+        <p:cNvPr id="1" name=""/>
+        <p:cNvGrpSpPr/>
+        <p:nvPr/>
+      </p:nvGrpSpPr>
+      <p:grpSpPr>
+        <a:xfrm>
+          <a:off x="0" y="0"/>
+          <a:ext cx="0" cy="0"/>
+          <a:chOff x="0" y="0"/>
+          <a:chExt cx="0" cy="0"/>
+        </a:xfrm>
+      </p:grpSpPr>
+      <p:sp>
+        <p:nvSpPr>
+          <p:cNvPr id="2" name="Title 1"/>
+          <p:cNvSpPr>
+            <a:spLocks noGrp="1"/>
+          </p:cNvSpPr>
+          <p:nvPr>
+            <p:ph type="title"/>
+          </p:nvPr>
+        </p:nvSpPr>
+        <p:spPr>
+          <a:xfrm>
+            <a:off x="0" y="0"/>
+            <a:ext cx="9144000" cy="602780"/>
+          </a:xfrm>
+          <a:solidFill>
+            <a:srgbClr val="1A1A2E"/>
+          </a:solidFill>
+        </p:spPr>
+        <p:txBody>
+          <a:bodyPr/>
+          <a:lstStyle/>
+          <a:p>
+            <a:pPr lvl="0" indent="0" marL="0">
+              <a:buNone/>
+            </a:pPr>
+            <a:r>
+              <a:rPr/>
+              <a:t>Live Demo — Watch It Break (on purpose)</a:t>
+            </a:r>
+          </a:p>
+        </p:txBody>
+      </p:sp>
+      <p:sp>
+        <p:nvSpPr>
+          <p:cNvPr id="3" name="Content Placeholder 2"/>
+          <p:cNvSpPr>
+            <a:spLocks noGrp="1"/>
+          </p:cNvSpPr>
+          <p:nvPr>
+            <p:ph idx="1" sz="half"/>
+          </p:nvPr>
+        </p:nvSpPr>
+        <p:spPr/>
+        <p:txBody>
+          <a:bodyPr/>
+          <a:lstStyle/>
+          <a:p>
+            <a:pPr lvl="0" indent="0" marL="0">
+              <a:buNone/>
+            </a:pPr>
+            <a:r>
+              <a:rPr/>
+              <a:t>I’ll give </a:t>
+            </a:r>
+            <a:r>
+              <a:rPr b="1"/>
+              <a:t>two chunks the same label</a:t>
+            </a:r>
+            <a:r>
+              <a:rPr/>
+              <a:t> and Render:</a:t>
+            </a:r>
+          </a:p>
+          <a:p>
+            <a:pPr lvl="0" indent="0">
+              <a:buNone/>
+            </a:pPr>
+            <a:r>
+              <a:rPr>
+                <a:solidFill>
+                  <a:srgbClr val="5E5E5E"/>
+                </a:solidFill>
+                <a:latin typeface="Courier"/>
+              </a:rPr>
+              <a:t>```{r plot}</a:t>
+            </a:r>
+            <a:br/>
+            <a:r>
+              <a:rPr>
+                <a:solidFill>
+                  <a:srgbClr val="003B4F"/>
+                </a:solidFill>
+                <a:latin typeface="Courier"/>
+              </a:rPr>
+              <a:t>tree_box_plot</a:t>
+            </a:r>
+            <a:br/>
+            <a:r>
+              <a:rPr>
+                <a:solidFill>
+                  <a:srgbClr val="5E5E5E"/>
+                </a:solidFill>
+                <a:latin typeface="Courier"/>
+              </a:rPr>
+              <a:t>```</a:t>
+            </a:r>
+          </a:p>
+          <a:p>
+            <a:pPr lvl="0" indent="0" marL="0">
+              <a:buNone/>
+            </a:pPr>
+            <a:r>
+              <a:rPr/>
+              <a:t>… the </a:t>
+            </a:r>
+            <a:r>
+              <a:rPr i="1"/>
+              <a:t>same</a:t>
+            </a:r>
+            <a:r>
+              <a:rPr/>
+              <a:t> label again …</a:t>
+            </a:r>
+          </a:p>
+          <a:p>
+            <a:pPr lvl="0" indent="0">
+              <a:buNone/>
+            </a:pPr>
+            <a:r>
+              <a:rPr>
+                <a:solidFill>
+                  <a:srgbClr val="5E5E5E"/>
+                </a:solidFill>
+                <a:latin typeface="Courier"/>
+              </a:rPr>
+              <a:t>```{r plot}</a:t>
+            </a:r>
+            <a:br/>
+            <a:r>
+              <a:rPr>
+                <a:solidFill>
+                  <a:srgbClr val="003B4F"/>
+                </a:solidFill>
+                <a:latin typeface="Courier"/>
+              </a:rPr>
+              <a:t>leaf_mean_se_plot</a:t>
+            </a:r>
+            <a:br/>
+            <a:r>
+              <a:rPr>
+                <a:solidFill>
+                  <a:srgbClr val="5E5E5E"/>
+                </a:solidFill>
+                <a:latin typeface="Courier"/>
+              </a:rPr>
+              <a:t>```</a:t>
+            </a:r>
+          </a:p>
+          <a:p>
+            <a:pPr lvl="0" indent="0" marL="0">
+              <a:buNone/>
+            </a:pPr>
+            <a:r>
+              <a:rPr/>
+              <a:t>Quarto stops:</a:t>
+            </a:r>
+          </a:p>
+          <a:p>
+            <a:pPr lvl="0" indent="0">
+              <a:buNone/>
+            </a:pPr>
+            <a:r>
+              <a:rPr>
+                <a:latin typeface="Courier"/>
+              </a:rPr>
+              <a:t>ERROR: Duplicate chunk label 'plot'</a:t>
+            </a:r>
+          </a:p>
+          <a:p>
+            <a:pPr lvl="0" indent="0" marL="0">
+              <a:buNone/>
+            </a:pPr>
+            <a:r>
+              <a:rPr/>
+              <a:t>The fix — make every label unique: </a:t>
+            </a:r>
+            <a:r>
+              <a:rPr>
+                <a:latin typeface="Courier"/>
+              </a:rPr>
+              <a:t>plot-box</a:t>
+            </a:r>
+            <a:r>
+              <a:rPr/>
+              <a:t> and </a:t>
+            </a:r>
+            <a:r>
+              <a:rPr>
+                <a:latin typeface="Courier"/>
+              </a:rPr>
+              <a:t>plot-mean-se</a:t>
+            </a:r>
+            <a:r>
+              <a:rPr/>
+              <a:t>.</a:t>
+            </a:r>
+          </a:p>
+        </p:txBody>
+      </p:sp>
+      <p:sp>
+        <p:nvSpPr>
+          <p:cNvPr id="4" name="Content Placeholder 3"/>
+          <p:cNvSpPr>
+            <a:spLocks noGrp="1"/>
+          </p:cNvSpPr>
+          <p:nvPr>
+            <p:ph idx="2" sz="half"/>
+          </p:nvPr>
+        </p:nvSpPr>
+        <p:spPr/>
+        <p:txBody>
+          <a:bodyPr/>
+          <a:lstStyle/>
+          <a:p>
+            <a:pPr lvl="0" indent="0" marL="1270000">
+              <a:buNone/>
+            </a:pPr>
+            <a:r>
+              <a:rPr sz="2000" b="1"/>
+              <a:t>Tip</a:t>
+            </a:r>
+          </a:p>
+          <a:p>
+            <a:pPr lvl="0" indent="0" marL="1270000">
+              <a:buNone/>
+            </a:pPr>
+            <a:r>
+              <a:rPr sz="2000" b="1"/>
+              <a:t>✅ Why show a broken render?</a:t>
+            </a:r>
+          </a:p>
+          <a:p>
+            <a:pPr lvl="0" indent="0" marL="1270000">
+              <a:buNone/>
+            </a:pPr>
+            <a:r>
+              <a:rPr sz="2000"/>
+              <a:t>Quarto names the exact problem — </a:t>
+            </a:r>
+            <a:r>
+              <a:rPr sz="2000" i="1"/>
+              <a:t>“Duplicate chunk label ‘plot’”</a:t>
+            </a:r>
+            <a:r>
+              <a:rPr sz="2000"/>
+              <a:t>. Learning to </a:t>
+            </a:r>
+            <a:r>
+              <a:rPr sz="2000" i="1"/>
+              <a:t>read</a:t>
+            </a:r>
+            <a:r>
+              <a:rPr sz="2000"/>
+              <a:t> that message is the whole skill. When it happens to you, you’ll go straight to the repeated name.</a:t>
+            </a:r>
+          </a:p>
+        </p:txBody>
+      </p:sp>
+    </p:spTree>
+  </p:cSld>
+</p:sld>
+</file>
+
+<file path=ppt/slides/slide21.xml><?xml version="1.0" encoding="utf-8"?>
+<p:sld xmlns:a="http://schemas.openxmlformats.org/drawingml/2006/main" xmlns:r="http://schemas.openxmlformats.org/officeDocument/2006/relationships" xmlns:p="http://schemas.openxmlformats.org/presentationml/2006/main">
+  <p:cSld>
+    <p:spTree>
+      <p:nvGrpSpPr>
+        <p:cNvPr id="1" name=""/>
+        <p:cNvGrpSpPr/>
+        <p:nvPr/>
+      </p:nvGrpSpPr>
+      <p:grpSpPr>
+        <a:xfrm>
+          <a:off x="0" y="0"/>
+          <a:ext cx="0" cy="0"/>
+          <a:chOff x="0" y="0"/>
+          <a:chExt cx="0" cy="0"/>
+        </a:xfrm>
+      </p:grpSpPr>
+      <p:sp>
+        <p:nvSpPr>
+          <p:cNvPr id="2" name="Title 1"/>
+          <p:cNvSpPr>
+            <a:spLocks noGrp="1"/>
+          </p:cNvSpPr>
+          <p:nvPr>
+            <p:ph type="title"/>
+          </p:nvPr>
+        </p:nvSpPr>
+        <p:spPr>
+          <a:xfrm>
+            <a:off x="0" y="0"/>
+            <a:ext cx="9144000" cy="582780"/>
+          </a:xfrm>
+        </p:spPr>
+        <p:txBody>
+          <a:bodyPr/>
+          <a:lstStyle/>
+          <a:p>
+            <a:pPr lvl="0" indent="0" marL="0">
+              <a:buNone/>
+            </a:pPr>
+            <a:r>
+              <a:rPr/>
+              <a:t>🛑 Pause — Do Activity Steps 2–4 Now</a:t>
+            </a:r>
+          </a:p>
+        </p:txBody>
+      </p:sp>
+      <p:sp>
+        <p:nvSpPr>
+          <p:cNvPr id="3" name="Content Placeholder 2"/>
+          <p:cNvSpPr>
+            <a:spLocks noGrp="1"/>
+          </p:cNvSpPr>
+          <p:nvPr>
+            <p:ph idx="1"/>
+          </p:nvPr>
+        </p:nvSpPr>
+        <p:spPr/>
+        <p:txBody>
+          <a:bodyPr/>
+          <a:lstStyle/>
+          <a:p>
+            <a:pPr lvl="0" indent="0" marL="0">
+              <a:buNone/>
+            </a:pPr>
+            <a:r>
+              <a:rPr/>
+              <a:t>Type the YAML by hand (spaces, not tabs), add a heading and bullets in Markdown, and create two uniquely named chunks. Predict what each renders before you press Render.</a:t>
+            </a:r>
+          </a:p>
+        </p:txBody>
+      </p:sp>
+    </p:spTree>
+  </p:cSld>
+</p:sld>
+</file>
+
+<file path=ppt/slides/slide22.xml><?xml version="1.0" encoding="utf-8"?>
+<p:sld xmlns:a="http://schemas.openxmlformats.org/drawingml/2006/main" xmlns:r="http://schemas.openxmlformats.org/officeDocument/2006/relationships" xmlns:p="http://schemas.openxmlformats.org/presentationml/2006/main">
+  <p:cSld>
+    <p:spTree>
+      <p:nvGrpSpPr>
+        <p:cNvPr id="1" name=""/>
+        <p:cNvGrpSpPr/>
+        <p:nvPr/>
+      </p:nvGrpSpPr>
+      <p:grpSpPr>
+        <a:xfrm>
+          <a:off x="0" y="0"/>
+          <a:ext cx="0" cy="0"/>
+          <a:chOff x="0" y="0"/>
+          <a:chExt cx="0" cy="0"/>
+        </a:xfrm>
+      </p:grpSpPr>
+      <p:sp>
+        <p:nvSpPr>
+          <p:cNvPr id="2" name="Title 1"/>
+          <p:cNvSpPr>
+            <a:spLocks noGrp="1"/>
+          </p:cNvSpPr>
+          <p:nvPr>
+            <p:ph type="title"/>
+          </p:nvPr>
+        </p:nvSpPr>
+        <p:spPr>
+          <a:xfrm>
+            <a:off x="0" y="0"/>
+            <a:ext cx="9144000" cy="582780"/>
+          </a:xfrm>
+        </p:spPr>
+        <p:txBody>
+          <a:bodyPr/>
+          <a:lstStyle/>
+          <a:p>
+            <a:pPr lvl="0" indent="0" marL="0">
+              <a:buNone/>
+            </a:pPr>
+            <a:r>
+              <a:rPr/>
+              <a:t>🧩 Chunk 3 of 4 · Chunk Options &amp; Inline Code</a:t>
+            </a:r>
+          </a:p>
+        </p:txBody>
+      </p:sp>
+      <p:sp>
+        <p:nvSpPr>
+          <p:cNvPr id="3" name="Content Placeholder 2"/>
+          <p:cNvSpPr>
+            <a:spLocks noGrp="1"/>
+          </p:cNvSpPr>
+          <p:nvPr>
+            <p:ph idx="1"/>
+          </p:nvPr>
+        </p:nvSpPr>
+        <p:spPr/>
+        <p:txBody>
+          <a:bodyPr/>
+          <a:lstStyle/>
+          <a:p>
+            <a:pPr lvl="0" indent="0" marL="0">
+              <a:buNone/>
+            </a:pPr>
+            <a:r>
+              <a:rPr b="1"/>
+              <a:t>We will cover:</a:t>
+            </a:r>
+            <a:r>
+              <a:rPr/>
+              <a:t> </a:t>
+            </a:r>
+            <a:r>
+              <a:rPr>
+                <a:latin typeface="Courier"/>
+              </a:rPr>
+              <a:t>#|</a:t>
+            </a:r>
+            <a:r>
+              <a:rPr/>
+              <a:t> options to control what shows, and inline </a:t>
+            </a:r>
+            <a:r>
+              <a:rPr>
+                <a:latin typeface="Courier"/>
+              </a:rPr>
+              <a:t>`r `</a:t>
+            </a:r>
+            <a:r>
+              <a:rPr/>
+              <a:t> to drop live numbers into sentences.</a:t>
+            </a:r>
+          </a:p>
+          <a:p>
+            <a:pPr lvl="0" indent="0" marL="1270000">
+              <a:buNone/>
+            </a:pPr>
+            <a:r>
+              <a:rPr sz="2000" b="1"/>
+              <a:t>Tip</a:t>
+            </a:r>
+          </a:p>
+          <a:p>
+            <a:pPr lvl="0" indent="0" marL="1270000">
+              <a:buNone/>
+            </a:pPr>
+            <a:r>
+              <a:rPr sz="2000" b="1"/>
+              <a:t>🖐 After this chunk: Activity Step 5</a:t>
+            </a:r>
+            <a:r>
+              <a:rPr sz="2000"/>
+              <a:t> (compute a value and drop it into a sentence).</a:t>
+            </a:r>
+          </a:p>
+        </p:txBody>
+      </p:sp>
+    </p:spTree>
+  </p:cSld>
+</p:sld>
+</file>
+
+<file path=ppt/slides/slide23.xml><?xml version="1.0" encoding="utf-8"?>
+<p:sld xmlns:a="http://schemas.openxmlformats.org/drawingml/2006/main" xmlns:r="http://schemas.openxmlformats.org/officeDocument/2006/relationships" xmlns:p="http://schemas.openxmlformats.org/presentationml/2006/main">
+  <p:cSld>
+    <p:spTree>
+      <p:nvGrpSpPr>
+        <p:cNvPr id="1" name=""/>
+        <p:cNvGrpSpPr/>
+        <p:nvPr/>
+      </p:nvGrpSpPr>
+      <p:grpSpPr>
+        <a:xfrm>
+          <a:off x="0" y="0"/>
+          <a:ext cx="0" cy="0"/>
+          <a:chOff x="0" y="0"/>
+          <a:chExt cx="0" cy="0"/>
+        </a:xfrm>
+      </p:grpSpPr>
+      <p:sp>
+        <p:nvSpPr>
+          <p:cNvPr id="2" name="Title 1"/>
+          <p:cNvSpPr>
+            <a:spLocks noGrp="1"/>
+          </p:cNvSpPr>
+          <p:nvPr>
+            <p:ph type="title"/>
+          </p:nvPr>
+        </p:nvSpPr>
+        <p:spPr>
+          <a:xfrm>
             <a:off x="139485" y="78119"/>
             <a:ext cx="8229600" cy="607682"/>
           </a:xfrm>
@@ -5015,26 +6242,54 @@
             <a:pPr lvl="0" indent="0">
               <a:buNone/>
             </a:pPr>
+            <a:r>
+              <a:rPr>
+                <a:solidFill>
+                  <a:srgbClr val="5E5E5E"/>
+                </a:solidFill>
+                <a:latin typeface="Courier"/>
+              </a:rPr>
+              <a:t>```{r leaf-plot}</a:t>
+            </a:r>
             <a:br/>
             <a:r>
               <a:rPr>
                 <a:solidFill>
-                  <a:srgbClr val="003B4F"/>
-                </a:solidFill>
-                <a:latin typeface="Courier"/>
-              </a:rPr>
-              <a:t>::: {.cell}</a:t>
+                  <a:srgbClr val="5E5E5E"/>
+                </a:solidFill>
+                <a:latin typeface="Courier"/>
+              </a:rPr>
+              <a:t>#| echo: false      # hide the code, show the plot</a:t>
             </a:r>
             <a:br/>
+            <a:r>
+              <a:rPr>
+                <a:solidFill>
+                  <a:srgbClr val="5E5E5E"/>
+                </a:solidFill>
+                <a:latin typeface="Courier"/>
+              </a:rPr>
+              <a:t>#| fig-width: 6</a:t>
+            </a:r>
             <a:br/>
             <a:r>
               <a:rPr>
                 <a:solidFill>
-                  <a:srgbClr val="003B4F"/>
-                </a:solidFill>
-                <a:latin typeface="Courier"/>
-              </a:rPr>
-              <a:t>:::</a:t>
+                  <a:srgbClr val="5E5E5E"/>
+                </a:solidFill>
+                <a:latin typeface="Courier"/>
+              </a:rPr>
+              <a:t>#tree_box_plot</a:t>
+            </a:r>
+            <a:br/>
+            <a:r>
+              <a:rPr>
+                <a:solidFill>
+                  <a:srgbClr val="5E5E5E"/>
+                </a:solidFill>
+                <a:latin typeface="Courier"/>
+              </a:rPr>
+              <a:t>```</a:t>
             </a:r>
           </a:p>
         </p:txBody>
@@ -5336,7 +6591,7 @@
 </p:sld>
 </file>
 
-<file path=ppt/slides/slide15.xml><?xml version="1.0" encoding="utf-8"?>
+<file path=ppt/slides/slide24.xml><?xml version="1.0" encoding="utf-8"?>
 <p:sld xmlns:a="http://schemas.openxmlformats.org/drawingml/2006/main" xmlns:r="http://schemas.openxmlformats.org/officeDocument/2006/relationships" xmlns:p="http://schemas.openxmlformats.org/presentationml/2006/main">
   <p:cSld>
     <p:spTree>
@@ -5366,11 +6621,8 @@
         <p:spPr>
           <a:xfrm>
             <a:off x="0" y="0"/>
-            <a:ext cx="9144000" cy="602780"/>
+            <a:ext cx="9144000" cy="582780"/>
           </a:xfrm>
-          <a:solidFill>
-            <a:srgbClr val="1A1A2E"/>
-          </a:solidFill>
         </p:spPr>
         <p:txBody>
           <a:bodyPr/>
@@ -5393,102 +6645,13 @@
             <a:spLocks noGrp="1"/>
           </p:cNvSpPr>
           <p:nvPr>
-            <p:ph idx="1" sz="half"/>
+            <p:ph idx="1"/>
           </p:nvPr>
         </p:nvSpPr>
         <p:spPr/>
         <p:txBody>
           <a:bodyPr/>
           <a:lstStyle/>
-          <a:p>
-            <a:pPr lvl="0" indent="0" marL="0">
-              <a:buNone/>
-            </a:pPr>
-            <a:r>
-              <a:rPr/>
-              <a:t>Drop a live result </a:t>
-            </a:r>
-            <a:r>
-              <a:rPr b="1"/>
-              <a:t>into a sentence</a:t>
-            </a:r>
-            <a:r>
-              <a:rPr/>
-              <a:t> with </a:t>
-            </a:r>
-            <a:r>
-              <a:rPr>
-                <a:latin typeface="Courier"/>
-              </a:rPr>
-              <a:t>`r `</a:t>
-            </a:r>
-            <a:r>
-              <a:rPr/>
-              <a:t>:</a:t>
-            </a:r>
-          </a:p>
-          <a:p>
-            <a:pPr lvl="0" indent="0">
-              <a:buNone/>
-            </a:pPr>
-            <a:r>
-              <a:rPr>
-                <a:solidFill>
-                  <a:srgbClr val="4758AB"/>
-                </a:solidFill>
-                <a:latin typeface="Courier"/>
-              </a:rPr>
-              <a:t># Shady leaves averaged `# r mean(shady_wt)` g.</a:t>
-            </a:r>
-          </a:p>
-          <a:p>
-            <a:pPr lvl="0" indent="0" marL="0">
-              <a:buNone/>
-            </a:pPr>
-            <a:r>
-              <a:rPr/>
-              <a:t>renders as:</a:t>
-            </a:r>
-          </a:p>
-          <a:p>
-            <a:pPr lvl="0" indent="0" marL="1270000">
-              <a:buNone/>
-            </a:pPr>
-            <a:r>
-              <a:rPr sz="2000"/>
-              <a:t>Shady leaves averaged </a:t>
-            </a:r>
-            <a:r>
-              <a:rPr sz="2000" b="1"/>
-              <a:t>7.8</a:t>
-            </a:r>
-            <a:r>
-              <a:rPr sz="2000"/>
-              <a:t> g.</a:t>
-            </a:r>
-          </a:p>
-          <a:p>
-            <a:pPr lvl="0"/>
-            <a:r>
-              <a:rPr/>
-              <a:t>The number is </a:t>
-            </a:r>
-            <a:r>
-              <a:rPr b="1"/>
-              <a:t>computed</a:t>
-            </a:r>
-            <a:r>
-              <a:rPr/>
-              <a:t>, never typed</a:t>
-            </a:r>
-          </a:p>
-          <a:p>
-            <a:pPr lvl="0"/>
-            <a:r>
-              <a:rPr/>
-              <a:t>Fix the data → the sentence fixes itself</a:t>
-            </a:r>
-          </a:p>
           <a:p>
             <a:pPr lvl="0" indent="0" marL="1270000">
               <a:buNone/>
@@ -5504,83 +6667,21 @@
             </a:pPr>
             <a:r>
               <a:rPr sz="2000" b="1"/>
-              <a:t>✅ Key idea</a:t>
-            </a:r>
-          </a:p>
-          <a:p>
-            <a:pPr lvl="0" indent="0" marL="1270000">
-              <a:buNone/>
-            </a:pPr>
+              <a:t>🔮 Predict first:</a:t>
+            </a:r>
             <a:r>
               <a:rPr sz="2000"/>
-              <a:t>This is the magic of Quarto: your </a:t>
-            </a:r>
-            <a:r>
-              <a:rPr sz="2000" i="1"/>
-              <a:t>prose</a:t>
+              <a:t> If </a:t>
+            </a:r>
+            <a:r>
+              <a:rPr sz="2000">
+                <a:latin typeface="Courier"/>
+              </a:rPr>
+              <a:t>mean(shady_wt)</a:t>
             </a:r>
             <a:r>
               <a:rPr sz="2000"/>
-              <a:t> stays true to your </a:t>
-            </a:r>
-            <a:r>
-              <a:rPr sz="2000" i="1"/>
-              <a:t>data</a:t>
-            </a:r>
-            <a:r>
-              <a:rPr sz="2000"/>
-              <a:t>, automatically.</a:t>
-            </a:r>
-          </a:p>
-        </p:txBody>
-      </p:sp>
-      <p:sp>
-        <p:nvSpPr>
-          <p:cNvPr id="4" name="Content Placeholder 3"/>
-          <p:cNvSpPr>
-            <a:spLocks noGrp="1"/>
-          </p:cNvSpPr>
-          <p:nvPr>
-            <p:ph idx="2" sz="half"/>
-          </p:nvPr>
-        </p:nvSpPr>
-        <p:spPr/>
-        <p:txBody>
-          <a:bodyPr/>
-          <a:lstStyle/>
-          <a:p>
-            <a:pPr lvl="0" indent="0" marL="1270000">
-              <a:buNone/>
-            </a:pPr>
-            <a:r>
-              <a:rPr sz="2000" b="1"/>
-              <a:t>Warning</a:t>
-            </a:r>
-          </a:p>
-          <a:p>
-            <a:pPr lvl="0" indent="0" marL="1270000">
-              <a:buNone/>
-            </a:pPr>
-            <a:r>
-              <a:rPr sz="2000" b="1"/>
-              <a:t>⚠️ Watch out!</a:t>
-            </a:r>
-          </a:p>
-          <a:p>
-            <a:pPr lvl="0" indent="0" marL="1270000">
-              <a:buNone/>
-            </a:pPr>
-            <a:r>
-              <a:rPr sz="2000"/>
-              <a:t>Inline code only works if the object exists. Load and compute it in a chunk </a:t>
-            </a:r>
-            <a:r>
-              <a:rPr sz="2000" b="1"/>
-              <a:t>above</a:t>
-            </a:r>
-            <a:r>
-              <a:rPr sz="2000"/>
-              <a:t> the sentence.</a:t>
+              <a:t> is 7.8, what exact sentence will render from the inline-code line below? Say it out loud before you check.</a:t>
             </a:r>
           </a:p>
         </p:txBody>
@@ -5590,7 +6691,7 @@
 </p:sld>
 </file>
 
-<file path=ppt/slides/slide16.xml><?xml version="1.0" encoding="utf-8"?>
+<file path=ppt/slides/slide25.xml><?xml version="1.0" encoding="utf-8"?>
 <p:sld xmlns:a="http://schemas.openxmlformats.org/drawingml/2006/main" xmlns:r="http://schemas.openxmlformats.org/officeDocument/2006/relationships" xmlns:p="http://schemas.openxmlformats.org/presentationml/2006/main">
   <p:cSld>
     <p:spTree>
@@ -5609,20 +6710,15 @@
       </p:grpSpPr>
       <p:sp>
         <p:nvSpPr>
-          <p:cNvPr id="2" name="Title 1"/>
-          <p:cNvSpPr>
-            <a:spLocks noGrp="1"/>
-          </p:cNvSpPr>
-          <p:nvPr>
-            <p:ph type="title"/>
-          </p:nvPr>
-        </p:nvSpPr>
-        <p:spPr>
-          <a:xfrm>
-            <a:off x="0" y="0"/>
-            <a:ext cx="9144000" cy="582780"/>
-          </a:xfrm>
-        </p:spPr>
+          <p:cNvPr id="3" name="Content Placeholder 2"/>
+          <p:cNvSpPr>
+            <a:spLocks noGrp="1"/>
+          </p:cNvSpPr>
+          <p:nvPr>
+            <p:ph idx="1" sz="half"/>
+          </p:nvPr>
+        </p:nvSpPr>
+        <p:spPr/>
         <p:txBody>
           <a:bodyPr/>
           <a:lstStyle/>
@@ -5632,19 +6728,142 @@
             </a:pPr>
             <a:r>
               <a:rPr/>
-              <a:t>Part 3 · Rendering to Word</a:t>
-            </a:r>
-          </a:p>
-        </p:txBody>
-      </p:sp>
-      <p:sp>
-        <p:nvSpPr>
-          <p:cNvPr id="3" name="Content Placeholder 2"/>
-          <p:cNvSpPr>
-            <a:spLocks noGrp="1"/>
-          </p:cNvSpPr>
-          <p:nvPr>
-            <p:ph idx="1"/>
+              <a:t>Drop a live result </a:t>
+            </a:r>
+            <a:r>
+              <a:rPr b="1"/>
+              <a:t>into a sentence</a:t>
+            </a:r>
+            <a:r>
+              <a:rPr/>
+              <a:t> with </a:t>
+            </a:r>
+            <a:r>
+              <a:rPr>
+                <a:latin typeface="Courier"/>
+              </a:rPr>
+              <a:t>`r `</a:t>
+            </a:r>
+            <a:r>
+              <a:rPr/>
+              <a:t>:</a:t>
+            </a:r>
+          </a:p>
+          <a:p>
+            <a:pPr lvl="0" indent="0">
+              <a:buNone/>
+            </a:pPr>
+            <a:r>
+              <a:rPr>
+                <a:solidFill>
+                  <a:srgbClr val="4758AB"/>
+                </a:solidFill>
+                <a:latin typeface="Courier"/>
+              </a:rPr>
+              <a:t># Shady leaves averaged `# r mean(shady_wt)` g.</a:t>
+            </a:r>
+          </a:p>
+          <a:p>
+            <a:pPr lvl="0" indent="0" marL="0">
+              <a:buNone/>
+            </a:pPr>
+            <a:r>
+              <a:rPr/>
+              <a:t>renders as:</a:t>
+            </a:r>
+          </a:p>
+          <a:p>
+            <a:pPr lvl="0" indent="0" marL="1270000">
+              <a:buNone/>
+            </a:pPr>
+            <a:r>
+              <a:rPr sz="2000"/>
+              <a:t>Shady leaves averaged </a:t>
+            </a:r>
+            <a:r>
+              <a:rPr sz="2000" b="1"/>
+              <a:t>7.8</a:t>
+            </a:r>
+            <a:r>
+              <a:rPr sz="2000"/>
+              <a:t> g.</a:t>
+            </a:r>
+          </a:p>
+          <a:p>
+            <a:pPr lvl="0"/>
+            <a:r>
+              <a:rPr/>
+              <a:t>The number is </a:t>
+            </a:r>
+            <a:r>
+              <a:rPr b="1"/>
+              <a:t>computed</a:t>
+            </a:r>
+            <a:r>
+              <a:rPr/>
+              <a:t>, never typed</a:t>
+            </a:r>
+          </a:p>
+          <a:p>
+            <a:pPr lvl="0"/>
+            <a:r>
+              <a:rPr/>
+              <a:t>Fix the data → the sentence fixes itself</a:t>
+            </a:r>
+          </a:p>
+          <a:p>
+            <a:pPr lvl="0" indent="0" marL="1270000">
+              <a:buNone/>
+            </a:pPr>
+            <a:r>
+              <a:rPr sz="2000" b="1"/>
+              <a:t>Note</a:t>
+            </a:r>
+          </a:p>
+          <a:p>
+            <a:pPr lvl="0" indent="0" marL="1270000">
+              <a:buNone/>
+            </a:pPr>
+            <a:r>
+              <a:rPr sz="2000" b="1"/>
+              <a:t>✅ Key idea</a:t>
+            </a:r>
+          </a:p>
+          <a:p>
+            <a:pPr lvl="0" indent="0" marL="1270000">
+              <a:buNone/>
+            </a:pPr>
+            <a:r>
+              <a:rPr sz="2000"/>
+              <a:t>This is the magic of Quarto: your </a:t>
+            </a:r>
+            <a:r>
+              <a:rPr sz="2000" i="1"/>
+              <a:t>prose</a:t>
+            </a:r>
+            <a:r>
+              <a:rPr sz="2000"/>
+              <a:t> stays true to your </a:t>
+            </a:r>
+            <a:r>
+              <a:rPr sz="2000" i="1"/>
+              <a:t>data</a:t>
+            </a:r>
+            <a:r>
+              <a:rPr sz="2000"/>
+              <a:t>, automatically.</a:t>
+            </a:r>
+          </a:p>
+        </p:txBody>
+      </p:sp>
+      <p:sp>
+        <p:nvSpPr>
+          <p:cNvPr id="4" name="Content Placeholder 3"/>
+          <p:cNvSpPr>
+            <a:spLocks noGrp="1"/>
+          </p:cNvSpPr>
+          <p:nvPr>
+            <p:ph idx="2" sz="half"/>
           </p:nvPr>
         </p:nvSpPr>
         <p:spPr/>
@@ -5652,21 +6871,38 @@
           <a:bodyPr/>
           <a:lstStyle/>
           <a:p>
-            <a:pPr lvl="0" indent="0" marL="0">
-              <a:spcBef>
-                <a:spcPts val="3000"/>
-              </a:spcBef>
-              <a:buNone/>
-            </a:pPr>
-            <a:r>
-              <a:rPr b="1"/>
-              <a:t>One YAML block, a professional </a:t>
-            </a:r>
-            <a:r>
-              <a:rPr b="1">
-                <a:latin typeface="Courier"/>
-              </a:rPr>
-              <a:t>.docx</a:t>
+            <a:pPr lvl="0" indent="0" marL="1270000">
+              <a:buNone/>
+            </a:pPr>
+            <a:r>
+              <a:rPr sz="2000" b="1"/>
+              <a:t>Warning</a:t>
+            </a:r>
+          </a:p>
+          <a:p>
+            <a:pPr lvl="0" indent="0" marL="1270000">
+              <a:buNone/>
+            </a:pPr>
+            <a:r>
+              <a:rPr sz="2000" b="1"/>
+              <a:t>⚠️ Watch out!</a:t>
+            </a:r>
+          </a:p>
+          <a:p>
+            <a:pPr lvl="0" indent="0" marL="1270000">
+              <a:buNone/>
+            </a:pPr>
+            <a:r>
+              <a:rPr sz="2000"/>
+              <a:t>Inline code only works if the object exists. Load and compute it in a chunk </a:t>
+            </a:r>
+            <a:r>
+              <a:rPr sz="2000" b="1"/>
+              <a:t>above</a:t>
+            </a:r>
+            <a:r>
+              <a:rPr sz="2000"/>
+              <a:t> the sentence.</a:t>
             </a:r>
           </a:p>
         </p:txBody>
@@ -5676,7 +6912,7 @@
 </p:sld>
 </file>
 
-<file path=ppt/slides/slide17.xml><?xml version="1.0" encoding="utf-8"?>
+<file path=ppt/slides/slide26.xml><?xml version="1.0" encoding="utf-8"?>
 <p:sld xmlns:a="http://schemas.openxmlformats.org/drawingml/2006/main" xmlns:r="http://schemas.openxmlformats.org/officeDocument/2006/relationships" xmlns:p="http://schemas.openxmlformats.org/presentationml/2006/main">
   <p:cSld>
     <p:spTree>
@@ -5695,12 +6931,42 @@
       </p:grpSpPr>
       <p:sp>
         <p:nvSpPr>
+          <p:cNvPr id="2" name="Title 1"/>
+          <p:cNvSpPr>
+            <a:spLocks noGrp="1"/>
+          </p:cNvSpPr>
+          <p:nvPr>
+            <p:ph type="title"/>
+          </p:nvPr>
+        </p:nvSpPr>
+        <p:spPr>
+          <a:xfrm>
+            <a:off x="0" y="0"/>
+            <a:ext cx="9144000" cy="582780"/>
+          </a:xfrm>
+        </p:spPr>
+        <p:txBody>
+          <a:bodyPr/>
+          <a:lstStyle/>
+          <a:p>
+            <a:pPr lvl="0" indent="0" marL="0">
+              <a:buNone/>
+            </a:pPr>
+            <a:r>
+              <a:rPr/>
+              <a:t>🛑 Pause — Do Activity Step 5 Now</a:t>
+            </a:r>
+          </a:p>
+        </p:txBody>
+      </p:sp>
+      <p:sp>
+        <p:nvSpPr>
           <p:cNvPr id="3" name="Content Placeholder 2"/>
           <p:cNvSpPr>
             <a:spLocks noGrp="1"/>
           </p:cNvSpPr>
           <p:nvPr>
-            <p:ph idx="1" sz="half"/>
+            <p:ph idx="1"/>
           </p:nvPr>
         </p:nvSpPr>
         <p:spPr/>
@@ -5713,507 +6979,7 @@
             </a:pPr>
             <a:r>
               <a:rPr/>
-              <a:t>This front matter produces a clean, structured Word document:</a:t>
-            </a:r>
-          </a:p>
-          <a:p>
-            <a:pPr lvl="0" indent="0">
-              <a:buNone/>
-            </a:pPr>
-            <a:r>
-              <a:rPr>
-                <a:solidFill>
-                  <a:srgbClr val="AD0000"/>
-                </a:solidFill>
-                <a:latin typeface="Courier"/>
-              </a:rPr>
-              <a:t>---</a:t>
-            </a:r>
-            <a:br/>
-            <a:r>
-              <a:rPr>
-                <a:solidFill>
-                  <a:srgbClr val="4758AB"/>
-                </a:solidFill>
-                <a:latin typeface="Courier"/>
-              </a:rPr>
-              <a:t>title</a:t>
-            </a:r>
-            <a:r>
-              <a:rPr b="1">
-                <a:solidFill>
-                  <a:srgbClr val="003B4F"/>
-                </a:solidFill>
-                <a:latin typeface="Courier"/>
-              </a:rPr>
-              <a:t>:</a:t>
-            </a:r>
-            <a:r>
-              <a:rPr>
-                <a:solidFill>
-                  <a:srgbClr val="657422"/>
-                </a:solidFill>
-                <a:latin typeface="Courier"/>
-              </a:rPr>
-              <a:t> </a:t>
-            </a:r>
-            <a:r>
-              <a:rPr>
-                <a:solidFill>
-                  <a:srgbClr val="20794D"/>
-                </a:solidFill>
-                <a:latin typeface="Courier"/>
-              </a:rPr>
-              <a:t>"Leaf Morphology Report"</a:t>
-            </a:r>
-            <a:br/>
-            <a:r>
-              <a:rPr>
-                <a:solidFill>
-                  <a:srgbClr val="4758AB"/>
-                </a:solidFill>
-                <a:latin typeface="Courier"/>
-              </a:rPr>
-              <a:t>author</a:t>
-            </a:r>
-            <a:r>
-              <a:rPr b="1">
-                <a:solidFill>
-                  <a:srgbClr val="003B4F"/>
-                </a:solidFill>
-                <a:latin typeface="Courier"/>
-              </a:rPr>
-              <a:t>:</a:t>
-            </a:r>
-            <a:r>
-              <a:rPr>
-                <a:solidFill>
-                  <a:srgbClr val="657422"/>
-                </a:solidFill>
-                <a:latin typeface="Courier"/>
-              </a:rPr>
-              <a:t> </a:t>
-            </a:r>
-            <a:r>
-              <a:rPr>
-                <a:solidFill>
-                  <a:srgbClr val="20794D"/>
-                </a:solidFill>
-                <a:latin typeface="Courier"/>
-              </a:rPr>
-              <a:t>"Your Name"</a:t>
-            </a:r>
-            <a:br/>
-            <a:r>
-              <a:rPr>
-                <a:solidFill>
-                  <a:srgbClr val="4758AB"/>
-                </a:solidFill>
-                <a:latin typeface="Courier"/>
-              </a:rPr>
-              <a:t>date</a:t>
-            </a:r>
-            <a:r>
-              <a:rPr b="1">
-                <a:solidFill>
-                  <a:srgbClr val="003B4F"/>
-                </a:solidFill>
-                <a:latin typeface="Courier"/>
-              </a:rPr>
-              <a:t>:</a:t>
-            </a:r>
-            <a:r>
-              <a:rPr>
-                <a:solidFill>
-                  <a:srgbClr val="657422"/>
-                </a:solidFill>
-                <a:latin typeface="Courier"/>
-              </a:rPr>
-              <a:t> today</a:t>
-            </a:r>
-            <a:br/>
-            <a:r>
-              <a:rPr>
-                <a:solidFill>
-                  <a:srgbClr val="4758AB"/>
-                </a:solidFill>
-                <a:latin typeface="Courier"/>
-              </a:rPr>
-              <a:t>format</a:t>
-            </a:r>
-            <a:r>
-              <a:rPr b="1">
-                <a:solidFill>
-                  <a:srgbClr val="003B4F"/>
-                </a:solidFill>
-                <a:latin typeface="Courier"/>
-              </a:rPr>
-              <a:t>:</a:t>
-            </a:r>
-            <a:br/>
-            <a:r>
-              <a:rPr>
-                <a:solidFill>
-                  <a:srgbClr val="657422"/>
-                </a:solidFill>
-                <a:latin typeface="Courier"/>
-              </a:rPr>
-              <a:t>  </a:t>
-            </a:r>
-            <a:r>
-              <a:rPr>
-                <a:solidFill>
-                  <a:srgbClr val="4758AB"/>
-                </a:solidFill>
-                <a:latin typeface="Courier"/>
-              </a:rPr>
-              <a:t>docx</a:t>
-            </a:r>
-            <a:r>
-              <a:rPr b="1">
-                <a:solidFill>
-                  <a:srgbClr val="003B4F"/>
-                </a:solidFill>
-                <a:latin typeface="Courier"/>
-              </a:rPr>
-              <a:t>:</a:t>
-            </a:r>
-            <a:br/>
-            <a:r>
-              <a:rPr>
-                <a:solidFill>
-                  <a:srgbClr val="657422"/>
-                </a:solidFill>
-                <a:latin typeface="Courier"/>
-              </a:rPr>
-              <a:t>    </a:t>
-            </a:r>
-            <a:r>
-              <a:rPr>
-                <a:solidFill>
-                  <a:srgbClr val="4758AB"/>
-                </a:solidFill>
-                <a:latin typeface="Courier"/>
-              </a:rPr>
-              <a:t>toc</a:t>
-            </a:r>
-            <a:r>
-              <a:rPr b="1">
-                <a:solidFill>
-                  <a:srgbClr val="003B4F"/>
-                </a:solidFill>
-                <a:latin typeface="Courier"/>
-              </a:rPr>
-              <a:t>:</a:t>
-            </a:r>
-            <a:r>
-              <a:rPr>
-                <a:solidFill>
-                  <a:srgbClr val="657422"/>
-                </a:solidFill>
-                <a:latin typeface="Courier"/>
-              </a:rPr>
-              <a:t> </a:t>
-            </a:r>
-            <a:r>
-              <a:rPr>
-                <a:solidFill>
-                  <a:srgbClr val="20794D"/>
-                </a:solidFill>
-                <a:latin typeface="Courier"/>
-              </a:rPr>
-              <a:t>true</a:t>
-            </a:r>
-            <a:r>
-              <a:rPr>
-                <a:solidFill>
-                  <a:srgbClr val="5E5E5E"/>
-                </a:solidFill>
-                <a:latin typeface="Courier"/>
-              </a:rPr>
-              <a:t>            # table of contents</a:t>
-            </a:r>
-            <a:br/>
-            <a:r>
-              <a:rPr>
-                <a:solidFill>
-                  <a:srgbClr val="657422"/>
-                </a:solidFill>
-                <a:latin typeface="Courier"/>
-              </a:rPr>
-              <a:t>    </a:t>
-            </a:r>
-            <a:r>
-              <a:rPr>
-                <a:solidFill>
-                  <a:srgbClr val="4758AB"/>
-                </a:solidFill>
-                <a:latin typeface="Courier"/>
-              </a:rPr>
-              <a:t>number-sections</a:t>
-            </a:r>
-            <a:r>
-              <a:rPr b="1">
-                <a:solidFill>
-                  <a:srgbClr val="003B4F"/>
-                </a:solidFill>
-                <a:latin typeface="Courier"/>
-              </a:rPr>
-              <a:t>:</a:t>
-            </a:r>
-            <a:r>
-              <a:rPr>
-                <a:solidFill>
-                  <a:srgbClr val="657422"/>
-                </a:solidFill>
-                <a:latin typeface="Courier"/>
-              </a:rPr>
-              <a:t> </a:t>
-            </a:r>
-            <a:r>
-              <a:rPr>
-                <a:solidFill>
-                  <a:srgbClr val="20794D"/>
-                </a:solidFill>
-                <a:latin typeface="Courier"/>
-              </a:rPr>
-              <a:t>true</a:t>
-            </a:r>
-            <a:br/>
-            <a:r>
-              <a:rPr>
-                <a:solidFill>
-                  <a:srgbClr val="657422"/>
-                </a:solidFill>
-                <a:latin typeface="Courier"/>
-              </a:rPr>
-              <a:t>    </a:t>
-            </a:r>
-            <a:r>
-              <a:rPr>
-                <a:solidFill>
-                  <a:srgbClr val="4758AB"/>
-                </a:solidFill>
-                <a:latin typeface="Courier"/>
-              </a:rPr>
-              <a:t>fig-width</a:t>
-            </a:r>
-            <a:r>
-              <a:rPr b="1">
-                <a:solidFill>
-                  <a:srgbClr val="003B4F"/>
-                </a:solidFill>
-                <a:latin typeface="Courier"/>
-              </a:rPr>
-              <a:t>:</a:t>
-            </a:r>
-            <a:r>
-              <a:rPr>
-                <a:solidFill>
-                  <a:srgbClr val="657422"/>
-                </a:solidFill>
-                <a:latin typeface="Courier"/>
-              </a:rPr>
-              <a:t> </a:t>
-            </a:r>
-            <a:r>
-              <a:rPr>
-                <a:solidFill>
-                  <a:srgbClr val="AD0000"/>
-                </a:solidFill>
-                <a:latin typeface="Courier"/>
-              </a:rPr>
-              <a:t>6</a:t>
-            </a:r>
-            <a:br/>
-            <a:r>
-              <a:rPr>
-                <a:solidFill>
-                  <a:srgbClr val="657422"/>
-                </a:solidFill>
-                <a:latin typeface="Courier"/>
-              </a:rPr>
-              <a:t>    </a:t>
-            </a:r>
-            <a:r>
-              <a:rPr>
-                <a:solidFill>
-                  <a:srgbClr val="4758AB"/>
-                </a:solidFill>
-                <a:latin typeface="Courier"/>
-              </a:rPr>
-              <a:t>fig-height</a:t>
-            </a:r>
-            <a:r>
-              <a:rPr b="1">
-                <a:solidFill>
-                  <a:srgbClr val="003B4F"/>
-                </a:solidFill>
-                <a:latin typeface="Courier"/>
-              </a:rPr>
-              <a:t>:</a:t>
-            </a:r>
-            <a:r>
-              <a:rPr>
-                <a:solidFill>
-                  <a:srgbClr val="657422"/>
-                </a:solidFill>
-                <a:latin typeface="Courier"/>
-              </a:rPr>
-              <a:t> </a:t>
-            </a:r>
-            <a:r>
-              <a:rPr>
-                <a:solidFill>
-                  <a:srgbClr val="AD0000"/>
-                </a:solidFill>
-                <a:latin typeface="Courier"/>
-              </a:rPr>
-              <a:t>4</a:t>
-            </a:r>
-            <a:br/>
-            <a:r>
-              <a:rPr>
-                <a:solidFill>
-                  <a:srgbClr val="AD0000"/>
-                </a:solidFill>
-                <a:latin typeface="Courier"/>
-              </a:rPr>
-              <a:t>---</a:t>
-            </a:r>
-          </a:p>
-          <a:p>
-            <a:pPr lvl="0" indent="0" marL="0">
-              <a:buNone/>
-            </a:pPr>
-            <a:r>
-              <a:rPr/>
-              <a:t>Then press </a:t>
-            </a:r>
-            <a:r>
-              <a:rPr b="1"/>
-              <a:t>Render</a:t>
-            </a:r>
-            <a:r>
-              <a:rPr/>
-              <a:t> (or </a:t>
-            </a:r>
-            <a:r>
-              <a:rPr b="1"/>
-              <a:t>Ctrl/Cmd + Shift + K</a:t>
-            </a:r>
-            <a:r>
-              <a:rPr/>
-              <a:t>).</a:t>
-            </a:r>
-          </a:p>
-          <a:p>
-            <a:pPr lvl="0" indent="0" marL="1270000">
-              <a:buNone/>
-            </a:pPr>
-            <a:r>
-              <a:rPr sz="2000" b="1"/>
-              <a:t>Note</a:t>
-            </a:r>
-          </a:p>
-          <a:p>
-            <a:pPr lvl="0" indent="0" marL="1270000">
-              <a:buNone/>
-            </a:pPr>
-            <a:r>
-              <a:rPr sz="2000" b="1"/>
-              <a:t>✅ Key idea</a:t>
-            </a:r>
-          </a:p>
-          <a:p>
-            <a:pPr lvl="0" indent="0" marL="1270000">
-              <a:buNone/>
-            </a:pPr>
-            <a:r>
-              <a:rPr sz="2000">
-                <a:latin typeface="Courier"/>
-              </a:rPr>
-              <a:t>toc: true</a:t>
-            </a:r>
-            <a:r>
-              <a:rPr sz="2000"/>
-              <a:t> and </a:t>
-            </a:r>
-            <a:r>
-              <a:rPr sz="2000">
-                <a:latin typeface="Courier"/>
-              </a:rPr>
-              <a:t>number-sections: true</a:t>
-            </a:r>
-            <a:r>
-              <a:rPr sz="2000"/>
-              <a:t> are what make it look like a </a:t>
-            </a:r>
-            <a:r>
-              <a:rPr sz="2000" i="1"/>
-              <a:t>report</a:t>
-            </a:r>
-            <a:r>
-              <a:rPr sz="2000"/>
-              <a:t>, not a printout.</a:t>
-            </a:r>
-          </a:p>
-        </p:txBody>
-      </p:sp>
-      <p:sp>
-        <p:nvSpPr>
-          <p:cNvPr id="4" name="Content Placeholder 3"/>
-          <p:cNvSpPr>
-            <a:spLocks noGrp="1"/>
-          </p:cNvSpPr>
-          <p:nvPr>
-            <p:ph idx="2" sz="half"/>
-          </p:nvPr>
-        </p:nvSpPr>
-        <p:spPr/>
-        <p:txBody>
-          <a:bodyPr/>
-          <a:lstStyle/>
-          <a:p>
-            <a:pPr lvl="0" indent="0" marL="1270000">
-              <a:buNone/>
-            </a:pPr>
-            <a:r>
-              <a:rPr sz="2000" b="1"/>
-              <a:t>Tip</a:t>
-            </a:r>
-          </a:p>
-          <a:p>
-            <a:pPr lvl="0" indent="0" marL="1270000">
-              <a:buNone/>
-            </a:pPr>
-            <a:r>
-              <a:rPr sz="2000" b="1"/>
-              <a:t>🖐 Try it yourself</a:t>
-            </a:r>
-          </a:p>
-          <a:p>
-            <a:pPr lvl="0" indent="0" marL="1270000">
-              <a:buNone/>
-            </a:pPr>
-            <a:r>
-              <a:rPr sz="2000"/>
-              <a:t>The activity gives you a ready-made template with exactly this front matter. You just add your writing and render.</a:t>
-            </a:r>
-          </a:p>
-          <a:p>
-            <a:pPr lvl="0" indent="0" marL="0">
-              <a:buNone/>
-            </a:pPr>
-            <a:r>
-              <a:rPr/>
-              <a:t>📖 </a:t>
-            </a:r>
-            <a:r>
-              <a:rPr>
-                <a:hlinkClick r:id="rId2"/>
-              </a:rPr>
-              <a:t>R4DS Ch 29 — Quarto formats</a:t>
+              <a:t>Compute a group mean, then insert it into a sentence with inline code. Predict the number that will appear before you Render.</a:t>
             </a:r>
           </a:p>
         </p:txBody>
@@ -6223,7 +6989,7 @@
 </p:sld>
 </file>
 
-<file path=ppt/slides/slide18.xml><?xml version="1.0" encoding="utf-8"?>
+<file path=ppt/slides/slide27.xml><?xml version="1.0" encoding="utf-8"?>
 <p:sld xmlns:a="http://schemas.openxmlformats.org/drawingml/2006/main" xmlns:r="http://schemas.openxmlformats.org/officeDocument/2006/relationships" xmlns:p="http://schemas.openxmlformats.org/presentationml/2006/main">
   <p:cSld>
     <p:spTree>
@@ -6253,11 +7019,8 @@
         <p:spPr>
           <a:xfrm>
             <a:off x="0" y="0"/>
-            <a:ext cx="9144000" cy="602780"/>
+            <a:ext cx="9144000" cy="582780"/>
           </a:xfrm>
-          <a:solidFill>
-            <a:srgbClr val="1A1A2E"/>
-          </a:solidFill>
         </p:spPr>
         <p:txBody>
           <a:bodyPr/>
@@ -6268,7 +7031,7 @@
             </a:pPr>
             <a:r>
               <a:rPr/>
-              <a:t>Same file, many outputs</a:t>
+              <a:t>🧩 Chunk 4 of 4 · Rendering to Word &amp; Beyond</a:t>
             </a:r>
           </a:p>
         </p:txBody>
@@ -6280,7 +7043,7 @@
             <a:spLocks noGrp="1"/>
           </p:cNvSpPr>
           <p:nvPr>
-            <p:ph idx="1" sz="half"/>
+            <p:ph idx="1"/>
           </p:nvPr>
         </p:nvSpPr>
         <p:spPr/>
@@ -6292,274 +7055,21 @@
               <a:buNone/>
             </a:pPr>
             <a:r>
-              <a:rPr/>
-              <a:t>The best part: </a:t>
-            </a:r>
-            <a:r>
               <a:rPr b="1"/>
-              <a:t>one </a:t>
-            </a:r>
-            <a:r>
-              <a:rPr b="1">
-                <a:latin typeface="Courier"/>
-              </a:rPr>
-              <a:t>.qmd</a:t>
-            </a:r>
-            <a:r>
-              <a:rPr b="1"/>
-              <a:t>, many documents</a:t>
-            </a:r>
-            <a:r>
-              <a:rPr/>
-              <a:t>. Just list formats:</a:t>
-            </a:r>
-          </a:p>
-          <a:p>
-            <a:pPr lvl="0" indent="0">
-              <a:buNone/>
-            </a:pPr>
-            <a:r>
-              <a:rPr>
-                <a:solidFill>
-                  <a:srgbClr val="4758AB"/>
-                </a:solidFill>
-                <a:latin typeface="Courier"/>
-              </a:rPr>
-              <a:t>format</a:t>
-            </a:r>
-            <a:r>
-              <a:rPr b="1">
-                <a:solidFill>
-                  <a:srgbClr val="003B4F"/>
-                </a:solidFill>
-                <a:latin typeface="Courier"/>
-              </a:rPr>
-              <a:t>:</a:t>
-            </a:r>
-            <a:br/>
-            <a:r>
-              <a:rPr>
-                <a:solidFill>
-                  <a:srgbClr val="657422"/>
-                </a:solidFill>
-                <a:latin typeface="Courier"/>
-              </a:rPr>
-              <a:t>  </a:t>
-            </a:r>
-            <a:r>
-              <a:rPr>
-                <a:solidFill>
-                  <a:srgbClr val="4758AB"/>
-                </a:solidFill>
-                <a:latin typeface="Courier"/>
-              </a:rPr>
-              <a:t>docx</a:t>
-            </a:r>
-            <a:r>
-              <a:rPr b="1">
-                <a:solidFill>
-                  <a:srgbClr val="003B4F"/>
-                </a:solidFill>
-                <a:latin typeface="Courier"/>
-              </a:rPr>
-              <a:t>:</a:t>
-            </a:r>
-            <a:r>
-              <a:rPr>
-                <a:solidFill>
-                  <a:srgbClr val="657422"/>
-                </a:solidFill>
-                <a:latin typeface="Courier"/>
-              </a:rPr>
-              <a:t> default</a:t>
-            </a:r>
-            <a:r>
-              <a:rPr>
-                <a:solidFill>
-                  <a:srgbClr val="5E5E5E"/>
-                </a:solidFill>
-                <a:latin typeface="Courier"/>
-              </a:rPr>
-              <a:t>     # Word report</a:t>
-            </a:r>
-            <a:br/>
-            <a:r>
-              <a:rPr>
-                <a:solidFill>
-                  <a:srgbClr val="657422"/>
-                </a:solidFill>
-                <a:latin typeface="Courier"/>
-              </a:rPr>
-              <a:t>  </a:t>
-            </a:r>
-            <a:r>
-              <a:rPr>
-                <a:solidFill>
-                  <a:srgbClr val="4758AB"/>
-                </a:solidFill>
-                <a:latin typeface="Courier"/>
-              </a:rPr>
-              <a:t>html</a:t>
-            </a:r>
-            <a:r>
-              <a:rPr b="1">
-                <a:solidFill>
-                  <a:srgbClr val="003B4F"/>
-                </a:solidFill>
-                <a:latin typeface="Courier"/>
-              </a:rPr>
-              <a:t>:</a:t>
-            </a:r>
-            <a:r>
-              <a:rPr>
-                <a:solidFill>
-                  <a:srgbClr val="657422"/>
-                </a:solidFill>
-                <a:latin typeface="Courier"/>
-              </a:rPr>
-              <a:t> default</a:t>
-            </a:r>
-            <a:r>
-              <a:rPr>
-                <a:solidFill>
-                  <a:srgbClr val="5E5E5E"/>
-                </a:solidFill>
-                <a:latin typeface="Courier"/>
-              </a:rPr>
-              <a:t>     # web page</a:t>
-            </a:r>
-            <a:br/>
-            <a:r>
-              <a:rPr>
-                <a:solidFill>
-                  <a:srgbClr val="657422"/>
-                </a:solidFill>
-                <a:latin typeface="Courier"/>
-              </a:rPr>
-              <a:t>  </a:t>
-            </a:r>
-            <a:r>
-              <a:rPr>
-                <a:solidFill>
-                  <a:srgbClr val="4758AB"/>
-                </a:solidFill>
-                <a:latin typeface="Courier"/>
-              </a:rPr>
-              <a:t>pptx</a:t>
-            </a:r>
-            <a:r>
-              <a:rPr b="1">
-                <a:solidFill>
-                  <a:srgbClr val="003B4F"/>
-                </a:solidFill>
-                <a:latin typeface="Courier"/>
-              </a:rPr>
-              <a:t>:</a:t>
-            </a:r>
-            <a:r>
-              <a:rPr>
-                <a:solidFill>
-                  <a:srgbClr val="657422"/>
-                </a:solidFill>
-                <a:latin typeface="Courier"/>
-              </a:rPr>
-              <a:t> default</a:t>
-            </a:r>
-            <a:r>
-              <a:rPr>
-                <a:solidFill>
-                  <a:srgbClr val="5E5E5E"/>
-                </a:solidFill>
-                <a:latin typeface="Courier"/>
-              </a:rPr>
-              <a:t>     # PowerPoint</a:t>
-            </a:r>
-          </a:p>
-          <a:p>
-            <a:pPr lvl="0"/>
-            <a:r>
-              <a:rPr/>
-              <a:t>Hand in the </a:t>
-            </a:r>
-            <a:r>
-              <a:rPr b="1"/>
-              <a:t>Word</a:t>
-            </a:r>
-            <a:r>
-              <a:rPr/>
-              <a:t> file</a:t>
-            </a:r>
-          </a:p>
-          <a:p>
-            <a:pPr lvl="0"/>
-            <a:r>
-              <a:rPr/>
-              <a:t>Post the </a:t>
-            </a:r>
-            <a:r>
-              <a:rPr b="1"/>
-              <a:t>HTML</a:t>
-            </a:r>
-            <a:r>
-              <a:rPr/>
-              <a:t> to a site</a:t>
-            </a:r>
-          </a:p>
-          <a:p>
-            <a:pPr lvl="0"/>
-            <a:r>
-              <a:rPr/>
-              <a:t>Present the </a:t>
-            </a:r>
-            <a:r>
-              <a:rPr b="1"/>
-              <a:t>PowerPoint</a:t>
-            </a:r>
-            <a:r>
-              <a:rPr/>
-              <a:t> in lab</a:t>
-            </a:r>
-          </a:p>
-          <a:p>
-            <a:pPr lvl="0" indent="0" marL="0">
-              <a:buNone/>
-            </a:pPr>
-            <a:r>
-              <a:rPr/>
-              <a:t>All from the </a:t>
-            </a:r>
-            <a:r>
-              <a:rPr b="1"/>
-              <a:t>same</a:t>
-            </a:r>
-            <a:r>
-              <a:rPr/>
-              <a:t> analysis — no re-doing anything.</a:t>
-            </a:r>
-          </a:p>
-        </p:txBody>
-      </p:sp>
-      <p:sp>
-        <p:nvSpPr>
-          <p:cNvPr id="4" name="Content Placeholder 3"/>
-          <p:cNvSpPr>
-            <a:spLocks noGrp="1"/>
-          </p:cNvSpPr>
-          <p:nvPr>
-            <p:ph idx="2" sz="half"/>
-          </p:nvPr>
-        </p:nvSpPr>
-        <p:spPr/>
-        <p:txBody>
-          <a:bodyPr/>
-          <a:lstStyle/>
+              <a:t>We will cover:</a:t>
+            </a:r>
+            <a:r>
+              <a:rPr/>
+              <a:t> YAML for a professional Word doc, one file → many outputs, and the render-often workflow.</a:t>
+            </a:r>
+          </a:p>
           <a:p>
             <a:pPr lvl="0" indent="0" marL="1270000">
               <a:buNone/>
             </a:pPr>
             <a:r>
               <a:rPr sz="2000" b="1"/>
-              <a:t>Note</a:t>
+              <a:t>Tip</a:t>
             </a:r>
           </a:p>
           <a:p>
@@ -6568,24 +7078,11 @@
             </a:pPr>
             <a:r>
               <a:rPr sz="2000" b="1"/>
-              <a:t>✅ Key idea</a:t>
-            </a:r>
-          </a:p>
-          <a:p>
-            <a:pPr lvl="0" indent="0" marL="1270000">
-              <a:buNone/>
-            </a:pPr>
+              <a:t>🖐 After this chunk: Activity Steps 6–7</a:t>
+            </a:r>
             <a:r>
               <a:rPr sz="2000"/>
-              <a:t>This is exactly how </a:t>
-            </a:r>
-            <a:r>
-              <a:rPr sz="2000" i="1"/>
-              <a:t>these lecture slides</a:t>
-            </a:r>
-            <a:r>
-              <a:rPr sz="2000"/>
-              <a:t> are built. One file → slides, Word, and PowerPoint.</a:t>
+              <a:t> (make it professional; one file, three outputs).</a:t>
             </a:r>
           </a:p>
         </p:txBody>
@@ -6595,7 +7092,7 @@
 </p:sld>
 </file>
 
-<file path=ppt/slides/slide19.xml><?xml version="1.0" encoding="utf-8"?>
+<file path=ppt/slides/slide28.xml><?xml version="1.0" encoding="utf-8"?>
 <p:sld xmlns:a="http://schemas.openxmlformats.org/drawingml/2006/main" xmlns:r="http://schemas.openxmlformats.org/officeDocument/2006/relationships" xmlns:p="http://schemas.openxmlformats.org/presentationml/2006/main">
   <p:cSld>
     <p:spTree>
@@ -6625,11 +7122,8 @@
         <p:spPr>
           <a:xfrm>
             <a:off x="0" y="0"/>
-            <a:ext cx="9144000" cy="602780"/>
+            <a:ext cx="9144000" cy="582780"/>
           </a:xfrm>
-          <a:solidFill>
-            <a:srgbClr val="1A1A2E"/>
-          </a:solidFill>
         </p:spPr>
         <p:txBody>
           <a:bodyPr/>
@@ -6640,7 +7134,7 @@
             </a:pPr>
             <a:r>
               <a:rPr/>
-              <a:t>The render workflow</a:t>
+              <a:t>Part 3 · Rendering to Word</a:t>
             </a:r>
           </a:p>
         </p:txBody>
@@ -6652,7 +7146,7 @@
             <a:spLocks noGrp="1"/>
           </p:cNvSpPr>
           <p:nvPr>
-            <p:ph idx="1" sz="half"/>
+            <p:ph idx="1"/>
           </p:nvPr>
         </p:nvSpPr>
         <p:spPr/>
@@ -6661,152 +7155,20 @@
           <a:lstStyle/>
           <a:p>
             <a:pPr lvl="0" indent="0" marL="0">
-              <a:buNone/>
-            </a:pPr>
-            <a:r>
-              <a:rPr/>
-              <a:t>Every time, it is the same three moves:</a:t>
-            </a:r>
-          </a:p>
-          <a:p>
-            <a:pPr lvl="0" indent="-342900" marL="342900">
-              <a:buAutoNum type="arabicPeriod"/>
+              <a:spcBef>
+                <a:spcPts val="3000"/>
+              </a:spcBef>
+              <a:buNone/>
             </a:pPr>
             <a:r>
               <a:rPr b="1"/>
-              <a:t>Write</a:t>
-            </a:r>
-            <a:r>
-              <a:rPr/>
-              <a:t> — add Markdown text and named code chunks</a:t>
-            </a:r>
-          </a:p>
-          <a:p>
-            <a:pPr lvl="0" indent="-342900" marL="342900">
-              <a:buAutoNum type="arabicPeriod"/>
-            </a:pPr>
-            <a:r>
-              <a:rPr b="1"/>
-              <a:t>Render</a:t>
-            </a:r>
-            <a:r>
-              <a:rPr/>
-              <a:t> — Ctrl/Cmd + Shift + K</a:t>
-            </a:r>
-          </a:p>
-          <a:p>
-            <a:pPr lvl="0" indent="-342900" marL="342900">
-              <a:buAutoNum type="arabicPeriod"/>
-            </a:pPr>
-            <a:r>
-              <a:rPr b="1"/>
-              <a:t>Read</a:t>
-            </a:r>
-            <a:r>
-              <a:rPr/>
-              <a:t> the output; fix the named chunk if it errors</a:t>
-            </a:r>
-          </a:p>
-          <a:p>
-            <a:pPr lvl="0" indent="0" marL="0">
-              <a:buNone/>
-            </a:pPr>
-            <a:r>
-              <a:rPr/>
-              <a:t>Quarto runs your code </a:t>
-            </a:r>
-            <a:r>
-              <a:rPr b="1"/>
-              <a:t>top to bottom in a fresh session</a:t>
-            </a:r>
-            <a:r>
-              <a:rPr/>
-              <a:t> — so the order of your chunks matters.</a:t>
-            </a:r>
-          </a:p>
-          <a:p>
-            <a:pPr lvl="0" indent="0" marL="1270000">
-              <a:buNone/>
-            </a:pPr>
-            <a:r>
-              <a:rPr sz="2000" b="1"/>
-              <a:t>Warning</a:t>
-            </a:r>
-          </a:p>
-          <a:p>
-            <a:pPr lvl="0" indent="0" marL="1270000">
-              <a:buNone/>
-            </a:pPr>
-            <a:r>
-              <a:rPr sz="2000" b="1"/>
-              <a:t>⚠️ Watch out!</a:t>
-            </a:r>
-          </a:p>
-          <a:p>
-            <a:pPr lvl="0" indent="0" marL="1270000">
-              <a:buNone/>
-            </a:pPr>
-            <a:r>
-              <a:rPr sz="2000"/>
-              <a:t>If it renders differently than the console, it is almost always </a:t>
-            </a:r>
-            <a:r>
-              <a:rPr sz="2000" b="1"/>
-              <a:t>chunk order</a:t>
-            </a:r>
-            <a:r>
-              <a:rPr sz="2000"/>
-              <a:t>: load libraries and data </a:t>
-            </a:r>
-            <a:r>
-              <a:rPr sz="2000" b="1"/>
-              <a:t>first</a:t>
-            </a:r>
-            <a:r>
-              <a:rPr sz="2000"/>
-              <a:t>.</a:t>
-            </a:r>
-          </a:p>
-        </p:txBody>
-      </p:sp>
-      <p:sp>
-        <p:nvSpPr>
-          <p:cNvPr id="4" name="Content Placeholder 3"/>
-          <p:cNvSpPr>
-            <a:spLocks noGrp="1"/>
-          </p:cNvSpPr>
-          <p:nvPr>
-            <p:ph idx="2" sz="half"/>
-          </p:nvPr>
-        </p:nvSpPr>
-        <p:spPr/>
-        <p:txBody>
-          <a:bodyPr/>
-          <a:lstStyle/>
-          <a:p>
-            <a:pPr lvl="0" indent="0" marL="1270000">
-              <a:buNone/>
-            </a:pPr>
-            <a:r>
-              <a:rPr sz="2000" b="1"/>
-              <a:t>Tip</a:t>
-            </a:r>
-          </a:p>
-          <a:p>
-            <a:pPr lvl="0" indent="0" marL="1270000">
-              <a:buNone/>
-            </a:pPr>
-            <a:r>
-              <a:rPr sz="2000"/>
-              <a:t>Render </a:t>
-            </a:r>
-            <a:r>
-              <a:rPr sz="2000" b="1"/>
-              <a:t>often</a:t>
-            </a:r>
-            <a:r>
-              <a:rPr sz="2000"/>
-              <a:t> — after every few chunks — so a break is easy to trace. Same as running your script line by line.</a:t>
+              <a:t>One YAML block, a professional </a:t>
+            </a:r>
+            <a:r>
+              <a:rPr b="1">
+                <a:latin typeface="Courier"/>
+              </a:rPr>
+              <a:t>.docx</a:t>
             </a:r>
           </a:p>
         </p:txBody>
@@ -6816,7 +7178,7 @@
 </p:sld>
 </file>
 
-<file path=ppt/slides/slide2.xml><?xml version="1.0" encoding="utf-8"?>
+<file path=ppt/slides/slide29.xml><?xml version="1.0" encoding="utf-8"?>
 <p:sld xmlns:a="http://schemas.openxmlformats.org/drawingml/2006/main" xmlns:r="http://schemas.openxmlformats.org/officeDocument/2006/relationships" xmlns:p="http://schemas.openxmlformats.org/presentationml/2006/main">
   <p:cSld>
     <p:spTree>
@@ -6835,20 +7197,15 @@
       </p:grpSpPr>
       <p:sp>
         <p:nvSpPr>
-          <p:cNvPr id="2" name="Title 1"/>
-          <p:cNvSpPr>
-            <a:spLocks noGrp="1"/>
-          </p:cNvSpPr>
-          <p:nvPr>
-            <p:ph type="title"/>
-          </p:nvPr>
-        </p:nvSpPr>
-        <p:spPr>
-          <a:xfrm>
-            <a:off x="0" y="0"/>
-            <a:ext cx="9144000" cy="582780"/>
-          </a:xfrm>
-        </p:spPr>
+          <p:cNvPr id="3" name="Content Placeholder 2"/>
+          <p:cNvSpPr>
+            <a:spLocks noGrp="1"/>
+          </p:cNvSpPr>
+          <p:nvPr>
+            <p:ph idx="1" sz="half"/>
+          </p:nvPr>
+        </p:nvSpPr>
+        <p:spPr/>
         <p:txBody>
           <a:bodyPr/>
           <a:lstStyle/>
@@ -6858,136 +7215,398 @@
             </a:pPr>
             <a:r>
               <a:rPr/>
-              <a:t>Where we left off (Lecture 04)</a:t>
-            </a:r>
-          </a:p>
-        </p:txBody>
-      </p:sp>
-      <p:sp>
-        <p:nvSpPr>
-          <p:cNvPr id="3" name="Content Placeholder 2"/>
-          <p:cNvSpPr>
-            <a:spLocks noGrp="1"/>
-          </p:cNvSpPr>
-          <p:nvPr>
-            <p:ph idx="1"/>
-          </p:nvPr>
-        </p:nvSpPr>
-        <p:spPr/>
-        <p:txBody>
-          <a:bodyPr/>
-          <a:lstStyle/>
-          <a:p>
-            <a:pPr lvl="0"/>
+              <a:t>This front matter produces a clean, structured Word document:</a:t>
+            </a:r>
+          </a:p>
+          <a:p>
+            <a:pPr lvl="0" indent="0">
+              <a:buNone/>
+            </a:pPr>
+            <a:r>
+              <a:rPr>
+                <a:solidFill>
+                  <a:srgbClr val="AD0000"/>
+                </a:solidFill>
+                <a:latin typeface="Courier"/>
+              </a:rPr>
+              <a:t>---</a:t>
+            </a:r>
+            <a:br/>
+            <a:r>
+              <a:rPr>
+                <a:solidFill>
+                  <a:srgbClr val="4758AB"/>
+                </a:solidFill>
+                <a:latin typeface="Courier"/>
+              </a:rPr>
+              <a:t>title</a:t>
+            </a:r>
+            <a:r>
+              <a:rPr b="1">
+                <a:solidFill>
+                  <a:srgbClr val="003B4F"/>
+                </a:solidFill>
+                <a:latin typeface="Courier"/>
+              </a:rPr>
+              <a:t>:</a:t>
+            </a:r>
+            <a:r>
+              <a:rPr>
+                <a:solidFill>
+                  <a:srgbClr val="657422"/>
+                </a:solidFill>
+                <a:latin typeface="Courier"/>
+              </a:rPr>
+              <a:t> </a:t>
+            </a:r>
+            <a:r>
+              <a:rPr>
+                <a:solidFill>
+                  <a:srgbClr val="20794D"/>
+                </a:solidFill>
+                <a:latin typeface="Courier"/>
+              </a:rPr>
+              <a:t>"Leaf Morphology Report"</a:t>
+            </a:r>
+            <a:br/>
+            <a:r>
+              <a:rPr>
+                <a:solidFill>
+                  <a:srgbClr val="4758AB"/>
+                </a:solidFill>
+                <a:latin typeface="Courier"/>
+              </a:rPr>
+              <a:t>author</a:t>
+            </a:r>
+            <a:r>
+              <a:rPr b="1">
+                <a:solidFill>
+                  <a:srgbClr val="003B4F"/>
+                </a:solidFill>
+                <a:latin typeface="Courier"/>
+              </a:rPr>
+              <a:t>:</a:t>
+            </a:r>
+            <a:r>
+              <a:rPr>
+                <a:solidFill>
+                  <a:srgbClr val="657422"/>
+                </a:solidFill>
+                <a:latin typeface="Courier"/>
+              </a:rPr>
+              <a:t> </a:t>
+            </a:r>
+            <a:r>
+              <a:rPr>
+                <a:solidFill>
+                  <a:srgbClr val="20794D"/>
+                </a:solidFill>
+                <a:latin typeface="Courier"/>
+              </a:rPr>
+              <a:t>"Your Name"</a:t>
+            </a:r>
+            <a:br/>
+            <a:r>
+              <a:rPr>
+                <a:solidFill>
+                  <a:srgbClr val="4758AB"/>
+                </a:solidFill>
+                <a:latin typeface="Courier"/>
+              </a:rPr>
+              <a:t>date</a:t>
+            </a:r>
+            <a:r>
+              <a:rPr b="1">
+                <a:solidFill>
+                  <a:srgbClr val="003B4F"/>
+                </a:solidFill>
+                <a:latin typeface="Courier"/>
+              </a:rPr>
+              <a:t>:</a:t>
+            </a:r>
+            <a:r>
+              <a:rPr>
+                <a:solidFill>
+                  <a:srgbClr val="657422"/>
+                </a:solidFill>
+                <a:latin typeface="Courier"/>
+              </a:rPr>
+              <a:t> today</a:t>
+            </a:r>
+            <a:br/>
+            <a:r>
+              <a:rPr>
+                <a:solidFill>
+                  <a:srgbClr val="4758AB"/>
+                </a:solidFill>
+                <a:latin typeface="Courier"/>
+              </a:rPr>
+              <a:t>format</a:t>
+            </a:r>
+            <a:r>
+              <a:rPr b="1">
+                <a:solidFill>
+                  <a:srgbClr val="003B4F"/>
+                </a:solidFill>
+                <a:latin typeface="Courier"/>
+              </a:rPr>
+              <a:t>:</a:t>
+            </a:r>
+            <a:br/>
+            <a:r>
+              <a:rPr>
+                <a:solidFill>
+                  <a:srgbClr val="657422"/>
+                </a:solidFill>
+                <a:latin typeface="Courier"/>
+              </a:rPr>
+              <a:t>  </a:t>
+            </a:r>
+            <a:r>
+              <a:rPr>
+                <a:solidFill>
+                  <a:srgbClr val="4758AB"/>
+                </a:solidFill>
+                <a:latin typeface="Courier"/>
+              </a:rPr>
+              <a:t>docx</a:t>
+            </a:r>
+            <a:r>
+              <a:rPr b="1">
+                <a:solidFill>
+                  <a:srgbClr val="003B4F"/>
+                </a:solidFill>
+                <a:latin typeface="Courier"/>
+              </a:rPr>
+              <a:t>:</a:t>
+            </a:r>
+            <a:br/>
+            <a:r>
+              <a:rPr>
+                <a:solidFill>
+                  <a:srgbClr val="657422"/>
+                </a:solidFill>
+                <a:latin typeface="Courier"/>
+              </a:rPr>
+              <a:t>    </a:t>
+            </a:r>
+            <a:r>
+              <a:rPr>
+                <a:solidFill>
+                  <a:srgbClr val="4758AB"/>
+                </a:solidFill>
+                <a:latin typeface="Courier"/>
+              </a:rPr>
+              <a:t>toc</a:t>
+            </a:r>
+            <a:r>
+              <a:rPr b="1">
+                <a:solidFill>
+                  <a:srgbClr val="003B4F"/>
+                </a:solidFill>
+                <a:latin typeface="Courier"/>
+              </a:rPr>
+              <a:t>:</a:t>
+            </a:r>
+            <a:r>
+              <a:rPr>
+                <a:solidFill>
+                  <a:srgbClr val="657422"/>
+                </a:solidFill>
+                <a:latin typeface="Courier"/>
+              </a:rPr>
+              <a:t> </a:t>
+            </a:r>
+            <a:r>
+              <a:rPr>
+                <a:solidFill>
+                  <a:srgbClr val="20794D"/>
+                </a:solidFill>
+                <a:latin typeface="Courier"/>
+              </a:rPr>
+              <a:t>true</a:t>
+            </a:r>
+            <a:r>
+              <a:rPr>
+                <a:solidFill>
+                  <a:srgbClr val="5E5E5E"/>
+                </a:solidFill>
+                <a:latin typeface="Courier"/>
+              </a:rPr>
+              <a:t>            # table of contents</a:t>
+            </a:r>
+            <a:br/>
+            <a:r>
+              <a:rPr>
+                <a:solidFill>
+                  <a:srgbClr val="657422"/>
+                </a:solidFill>
+                <a:latin typeface="Courier"/>
+              </a:rPr>
+              <a:t>    </a:t>
+            </a:r>
+            <a:r>
+              <a:rPr>
+                <a:solidFill>
+                  <a:srgbClr val="4758AB"/>
+                </a:solidFill>
+                <a:latin typeface="Courier"/>
+              </a:rPr>
+              <a:t>number-sections</a:t>
+            </a:r>
+            <a:r>
+              <a:rPr b="1">
+                <a:solidFill>
+                  <a:srgbClr val="003B4F"/>
+                </a:solidFill>
+                <a:latin typeface="Courier"/>
+              </a:rPr>
+              <a:t>:</a:t>
+            </a:r>
+            <a:r>
+              <a:rPr>
+                <a:solidFill>
+                  <a:srgbClr val="657422"/>
+                </a:solidFill>
+                <a:latin typeface="Courier"/>
+              </a:rPr>
+              <a:t> </a:t>
+            </a:r>
+            <a:r>
+              <a:rPr>
+                <a:solidFill>
+                  <a:srgbClr val="20794D"/>
+                </a:solidFill>
+                <a:latin typeface="Courier"/>
+              </a:rPr>
+              <a:t>true</a:t>
+            </a:r>
+            <a:br/>
+            <a:r>
+              <a:rPr>
+                <a:solidFill>
+                  <a:srgbClr val="657422"/>
+                </a:solidFill>
+                <a:latin typeface="Courier"/>
+              </a:rPr>
+              <a:t>    </a:t>
+            </a:r>
+            <a:r>
+              <a:rPr>
+                <a:solidFill>
+                  <a:srgbClr val="4758AB"/>
+                </a:solidFill>
+                <a:latin typeface="Courier"/>
+              </a:rPr>
+              <a:t>fig-width</a:t>
+            </a:r>
+            <a:r>
+              <a:rPr b="1">
+                <a:solidFill>
+                  <a:srgbClr val="003B4F"/>
+                </a:solidFill>
+                <a:latin typeface="Courier"/>
+              </a:rPr>
+              <a:t>:</a:t>
+            </a:r>
+            <a:r>
+              <a:rPr>
+                <a:solidFill>
+                  <a:srgbClr val="657422"/>
+                </a:solidFill>
+                <a:latin typeface="Courier"/>
+              </a:rPr>
+              <a:t> </a:t>
+            </a:r>
+            <a:r>
+              <a:rPr>
+                <a:solidFill>
+                  <a:srgbClr val="AD0000"/>
+                </a:solidFill>
+                <a:latin typeface="Courier"/>
+              </a:rPr>
+              <a:t>6</a:t>
+            </a:r>
+            <a:br/>
+            <a:r>
+              <a:rPr>
+                <a:solidFill>
+                  <a:srgbClr val="657422"/>
+                </a:solidFill>
+                <a:latin typeface="Courier"/>
+              </a:rPr>
+              <a:t>    </a:t>
+            </a:r>
+            <a:r>
+              <a:rPr>
+                <a:solidFill>
+                  <a:srgbClr val="4758AB"/>
+                </a:solidFill>
+                <a:latin typeface="Courier"/>
+              </a:rPr>
+              <a:t>fig-height</a:t>
+            </a:r>
+            <a:r>
+              <a:rPr b="1">
+                <a:solidFill>
+                  <a:srgbClr val="003B4F"/>
+                </a:solidFill>
+                <a:latin typeface="Courier"/>
+              </a:rPr>
+              <a:t>:</a:t>
+            </a:r>
+            <a:r>
+              <a:rPr>
+                <a:solidFill>
+                  <a:srgbClr val="657422"/>
+                </a:solidFill>
+                <a:latin typeface="Courier"/>
+              </a:rPr>
+              <a:t> </a:t>
+            </a:r>
+            <a:r>
+              <a:rPr>
+                <a:solidFill>
+                  <a:srgbClr val="AD0000"/>
+                </a:solidFill>
+                <a:latin typeface="Courier"/>
+              </a:rPr>
+              <a:t>4</a:t>
+            </a:r>
+            <a:br/>
+            <a:r>
+              <a:rPr>
+                <a:solidFill>
+                  <a:srgbClr val="AD0000"/>
+                </a:solidFill>
+                <a:latin typeface="Courier"/>
+              </a:rPr>
+              <a:t>---</a:t>
+            </a:r>
+          </a:p>
+          <a:p>
+            <a:pPr lvl="0" indent="0" marL="0">
+              <a:buNone/>
+            </a:pPr>
+            <a:r>
+              <a:rPr/>
+              <a:t>Then press </a:t>
+            </a:r>
             <a:r>
               <a:rPr b="1"/>
-              <a:t>Wrangling</a:t>
-            </a:r>
-            <a:r>
-              <a:rPr/>
-              <a:t> — </a:t>
-            </a:r>
-            <a:r>
-              <a:rPr>
-                <a:latin typeface="Courier"/>
-              </a:rPr>
-              <a:t>filter()</a:t>
-            </a:r>
-            <a:r>
-              <a:rPr/>
-              <a:t>, </a:t>
-            </a:r>
-            <a:r>
-              <a:rPr>
-                <a:latin typeface="Courier"/>
-              </a:rPr>
-              <a:t>select()</a:t>
-            </a:r>
-            <a:r>
-              <a:rPr/>
-              <a:t>, </a:t>
-            </a:r>
-            <a:r>
-              <a:rPr>
-                <a:latin typeface="Courier"/>
-              </a:rPr>
-              <a:t>mutate()</a:t>
-            </a:r>
-            <a:r>
-              <a:rPr/>
-              <a:t>, </a:t>
-            </a:r>
-            <a:r>
-              <a:rPr>
-                <a:latin typeface="Courier"/>
-              </a:rPr>
-              <a:t>arrange()</a:t>
-            </a:r>
-          </a:p>
-          <a:p>
-            <a:pPr lvl="0"/>
+              <a:t>Render</a:t>
+            </a:r>
+            <a:r>
+              <a:rPr/>
+              <a:t> (or </a:t>
+            </a:r>
             <a:r>
               <a:rPr b="1"/>
-              <a:t>Descriptive stats</a:t>
-            </a:r>
-            <a:r>
-              <a:rPr/>
-              <a:t> — mean, median, SD, SE with </a:t>
-            </a:r>
-            <a:r>
-              <a:rPr>
-                <a:latin typeface="Courier"/>
-              </a:rPr>
-              <a:t>group_by()</a:t>
-            </a:r>
-            <a:r>
-              <a:rPr/>
-              <a:t> + </a:t>
-            </a:r>
-            <a:r>
-              <a:rPr>
-                <a:latin typeface="Courier"/>
-              </a:rPr>
-              <a:t>summarize()</a:t>
-            </a:r>
-          </a:p>
-          <a:p>
-            <a:pPr lvl="0"/>
-            <a:r>
-              <a:rPr b="1"/>
-              <a:t>Welch’s t-test</a:t>
-            </a:r>
-            <a:r>
-              <a:rPr/>
-              <a:t> — shady leaves significantly heavier than sunny</a:t>
-            </a:r>
-          </a:p>
-          <a:p>
-            <a:pPr lvl="0"/>
-            <a:r>
-              <a:rPr b="1"/>
-              <a:t>Figures</a:t>
-            </a:r>
-            <a:r>
-              <a:rPr/>
-              <a:t> — boxplots and mean ± SE, saved as PNG</a:t>
-            </a:r>
-          </a:p>
-          <a:p>
-            <a:pPr lvl="0"/>
-            <a:r>
-              <a:rPr/>
-              <a:t>Everything so far lives in a </a:t>
-            </a:r>
-            <a:r>
-              <a:rPr b="1">
-                <a:latin typeface="Courier"/>
-              </a:rPr>
-              <a:t>.R</a:t>
-            </a:r>
-            <a:r>
-              <a:rPr b="1"/>
-              <a:t> script</a:t>
+              <a:t>Ctrl/Cmd + Shift + K</a:t>
+            </a:r>
+            <a:r>
+              <a:rPr/>
+              <a:t>).</a:t>
             </a:r>
           </a:p>
           <a:p>
@@ -7005,7 +7624,7 @@
             </a:pPr>
             <a:r>
               <a:rPr sz="2000" b="1"/>
-              <a:t>✅ Key idea from Lecture 04</a:t>
+              <a:t>✅ Key idea</a:t>
             </a:r>
           </a:p>
           <a:p>
@@ -7013,203 +7632,50 @@
               <a:buNone/>
             </a:pPr>
             <a:r>
+              <a:rPr sz="2000">
+                <a:latin typeface="Courier"/>
+              </a:rPr>
+              <a:t>toc: true</a:t>
+            </a:r>
+            <a:r>
               <a:rPr sz="2000"/>
-              <a:t>You now have a complete analysis and a real result. Today we turn that pile of code into a </a:t>
-            </a:r>
-            <a:r>
-              <a:rPr sz="2000" b="1"/>
-              <a:t>report a human can read</a:t>
+              <a:t> and </a:t>
+            </a:r>
+            <a:r>
+              <a:rPr sz="2000">
+                <a:latin typeface="Courier"/>
+              </a:rPr>
+              <a:t>number-sections: true</a:t>
             </a:r>
             <a:r>
               <a:rPr sz="2000"/>
-              <a:t>.</a:t>
-            </a:r>
-          </a:p>
-        </p:txBody>
-      </p:sp>
-    </p:spTree>
-  </p:cSld>
-</p:sld>
-</file>
-
-<file path=ppt/slides/slide20.xml><?xml version="1.0" encoding="utf-8"?>
-<p:sld xmlns:a="http://schemas.openxmlformats.org/drawingml/2006/main" xmlns:r="http://schemas.openxmlformats.org/officeDocument/2006/relationships" xmlns:p="http://schemas.openxmlformats.org/presentationml/2006/main">
-  <p:cSld>
-    <p:spTree>
-      <p:nvGrpSpPr>
-        <p:cNvPr id="1" name=""/>
-        <p:cNvGrpSpPr/>
-        <p:nvPr/>
-      </p:nvGrpSpPr>
-      <p:grpSpPr>
-        <a:xfrm>
-          <a:off x="0" y="0"/>
-          <a:ext cx="0" cy="0"/>
-          <a:chOff x="0" y="0"/>
-          <a:chExt cx="0" cy="0"/>
-        </a:xfrm>
-      </p:grpSpPr>
-      <p:sp>
-        <p:nvSpPr>
-          <p:cNvPr id="2" name="Title 1"/>
-          <p:cNvSpPr>
-            <a:spLocks noGrp="1"/>
-          </p:cNvSpPr>
-          <p:nvPr>
-            <p:ph type="title"/>
-          </p:nvPr>
-        </p:nvSpPr>
-        <p:spPr>
-          <a:xfrm>
-            <a:off x="0" y="0"/>
-            <a:ext cx="9144000" cy="602780"/>
-          </a:xfrm>
-          <a:solidFill>
-            <a:srgbClr val="1A1A2E"/>
-          </a:solidFill>
-        </p:spPr>
-        <p:txBody>
-          <a:bodyPr/>
-          <a:lstStyle/>
-          <a:p>
-            <a:pPr lvl="0" indent="0" marL="0">
-              <a:buNone/>
-            </a:pPr>
-            <a:r>
-              <a:rPr/>
-              <a:t>Wrap-up · What you can now do</a:t>
-            </a:r>
-          </a:p>
-        </p:txBody>
-      </p:sp>
-      <p:sp>
-        <p:nvSpPr>
-          <p:cNvPr id="3" name="Content Placeholder 2"/>
-          <p:cNvSpPr>
-            <a:spLocks noGrp="1"/>
-          </p:cNvSpPr>
-          <p:nvPr>
-            <p:ph idx="1" sz="half"/>
+              <a:t> are what make it look like a </a:t>
+            </a:r>
+            <a:r>
+              <a:rPr sz="2000" i="1"/>
+              <a:t>report</a:t>
+            </a:r>
+            <a:r>
+              <a:rPr sz="2000"/>
+              <a:t>, not a printout.</a:t>
+            </a:r>
+          </a:p>
+        </p:txBody>
+      </p:sp>
+      <p:sp>
+        <p:nvSpPr>
+          <p:cNvPr id="4" name="Content Placeholder 3"/>
+          <p:cNvSpPr>
+            <a:spLocks noGrp="1"/>
+          </p:cNvSpPr>
+          <p:nvPr>
+            <p:ph idx="2" sz="half"/>
           </p:nvPr>
         </p:nvSpPr>
         <p:spPr/>
         <p:txBody>
           <a:bodyPr/>
           <a:lstStyle/>
-          <a:p>
-            <a:pPr lvl="0"/>
-            <a:r>
-              <a:rPr/>
-              <a:t>Explain </a:t>
-            </a:r>
-            <a:r>
-              <a:rPr b="1"/>
-              <a:t>why</a:t>
-            </a:r>
-            <a:r>
-              <a:rPr/>
-              <a:t> a Quarto report beats a bare script</a:t>
-            </a:r>
-          </a:p>
-          <a:p>
-            <a:pPr lvl="0"/>
-            <a:r>
-              <a:rPr/>
-              <a:t>Recognize the three parts: </a:t>
-            </a:r>
-            <a:r>
-              <a:rPr b="1"/>
-              <a:t>YAML</a:t>
-            </a:r>
-            <a:r>
-              <a:rPr/>
-              <a:t>, </a:t>
-            </a:r>
-            <a:r>
-              <a:rPr b="1"/>
-              <a:t>Markdown</a:t>
-            </a:r>
-            <a:r>
-              <a:rPr/>
-              <a:t>, </a:t>
-            </a:r>
-            <a:r>
-              <a:rPr b="1"/>
-              <a:t>code chunks</a:t>
-            </a:r>
-          </a:p>
-          <a:p>
-            <a:pPr lvl="0"/>
-            <a:r>
-              <a:rPr/>
-              <a:t>Write and </a:t>
-            </a:r>
-            <a:r>
-              <a:rPr b="1"/>
-              <a:t>name</a:t>
-            </a:r>
-            <a:r>
-              <a:rPr/>
-              <a:t> a code chunk, set </a:t>
-            </a:r>
-            <a:r>
-              <a:rPr>
-                <a:latin typeface="Courier"/>
-              </a:rPr>
-              <a:t>echo</a:t>
-            </a:r>
-            <a:r>
-              <a:rPr/>
-              <a:t>/</a:t>
-            </a:r>
-            <a:r>
-              <a:rPr>
-                <a:latin typeface="Courier"/>
-              </a:rPr>
-              <a:t>warning</a:t>
-            </a:r>
-            <a:r>
-              <a:rPr/>
-              <a:t> options</a:t>
-            </a:r>
-          </a:p>
-          <a:p>
-            <a:pPr lvl="0"/>
-            <a:r>
-              <a:rPr/>
-              <a:t>Put a </a:t>
-            </a:r>
-            <a:r>
-              <a:rPr b="1"/>
-              <a:t>live number in a sentence</a:t>
-            </a:r>
-            <a:r>
-              <a:rPr/>
-              <a:t> with inline code</a:t>
-            </a:r>
-          </a:p>
-          <a:p>
-            <a:pPr lvl="0"/>
-            <a:r>
-              <a:rPr/>
-              <a:t>Set up YAML to render a </a:t>
-            </a:r>
-            <a:r>
-              <a:rPr b="1"/>
-              <a:t>professional Word document</a:t>
-            </a:r>
-          </a:p>
-          <a:p>
-            <a:pPr lvl="0"/>
-            <a:r>
-              <a:rPr/>
-              <a:t>Render one file to </a:t>
-            </a:r>
-            <a:r>
-              <a:rPr b="1"/>
-              <a:t>Word, HTML, and PowerPoint</a:t>
-            </a:r>
-          </a:p>
           <a:p>
             <a:pPr lvl="0" indent="0" marL="1270000">
               <a:buNone/>
@@ -7225,7 +7691,7 @@
             </a:pPr>
             <a:r>
               <a:rPr sz="2000" b="1"/>
-              <a:t>🖐 Before next class</a:t>
+              <a:t>🖐 Try it yourself</a:t>
             </a:r>
           </a:p>
           <a:p>
@@ -7234,58 +7700,7 @@
             </a:pPr>
             <a:r>
               <a:rPr sz="2000"/>
-              <a:t>Open the activity template, drop in your Lecture 04 t-test, and render it to Word.</a:t>
-            </a:r>
-          </a:p>
-        </p:txBody>
-      </p:sp>
-      <p:sp>
-        <p:nvSpPr>
-          <p:cNvPr id="4" name="Content Placeholder 3"/>
-          <p:cNvSpPr>
-            <a:spLocks noGrp="1"/>
-          </p:cNvSpPr>
-          <p:nvPr>
-            <p:ph idx="2" sz="half"/>
-          </p:nvPr>
-        </p:nvSpPr>
-        <p:spPr/>
-        <p:txBody>
-          <a:bodyPr/>
-          <a:lstStyle/>
-          <a:p>
-            <a:pPr lvl="0" indent="0" marL="1270000">
-              <a:buNone/>
-            </a:pPr>
-            <a:r>
-              <a:rPr sz="2000" b="1"/>
-              <a:t>Note</a:t>
-            </a:r>
-          </a:p>
-          <a:p>
-            <a:pPr lvl="0" indent="0" marL="1270000">
-              <a:buNone/>
-            </a:pPr>
-            <a:r>
-              <a:rPr sz="2000" b="1"/>
-              <a:t>✅ Key idea</a:t>
-            </a:r>
-          </a:p>
-          <a:p>
-            <a:pPr lvl="0" indent="0" marL="1270000">
-              <a:buNone/>
-            </a:pPr>
-            <a:r>
-              <a:rPr sz="2000"/>
-              <a:t>You turned a script into a </a:t>
-            </a:r>
-            <a:r>
-              <a:rPr sz="2000" b="1"/>
-              <a:t>reproducible report</a:t>
-            </a:r>
-            <a:r>
-              <a:rPr sz="2000"/>
-              <a:t>. From here on, every analysis can be a document that rebuilds itself.</a:t>
+              <a:t>The activity gives you a ready-made template with exactly this front matter. You just add your writing and render.</a:t>
             </a:r>
           </a:p>
           <a:p>
@@ -7293,279 +7708,14 @@
               <a:buNone/>
             </a:pPr>
             <a:r>
-              <a:rPr b="1"/>
-              <a:t>Up next — Lecture 05:</a:t>
-            </a:r>
-          </a:p>
-          <a:p>
-            <a:pPr lvl="0"/>
-            <a:r>
-              <a:rPr/>
-              <a:t>Linear regression with </a:t>
-            </a:r>
-            <a:r>
-              <a:rPr>
-                <a:latin typeface="Courier"/>
-              </a:rPr>
-              <a:t>lm()</a:t>
-            </a:r>
-          </a:p>
-          <a:p>
-            <a:pPr lvl="0"/>
-            <a:r>
-              <a:rPr/>
-              <a:t>…written up in your new Quarto report!</a:t>
-            </a:r>
-          </a:p>
-        </p:txBody>
-      </p:sp>
-    </p:spTree>
-  </p:cSld>
-</p:sld>
-</file>
-
-<file path=ppt/slides/slide21.xml><?xml version="1.0" encoding="utf-8"?>
-<p:sld xmlns:a="http://schemas.openxmlformats.org/drawingml/2006/main" xmlns:r="http://schemas.openxmlformats.org/officeDocument/2006/relationships" xmlns:p="http://schemas.openxmlformats.org/presentationml/2006/main">
-  <p:cSld>
-    <p:spTree>
-      <p:nvGrpSpPr>
-        <p:cNvPr id="1" name=""/>
-        <p:cNvGrpSpPr/>
-        <p:nvPr/>
-      </p:nvGrpSpPr>
-      <p:grpSpPr>
-        <a:xfrm>
-          <a:off x="0" y="0"/>
-          <a:ext cx="0" cy="0"/>
-          <a:chOff x="0" y="0"/>
-          <a:chExt cx="0" cy="0"/>
-        </a:xfrm>
-      </p:grpSpPr>
-      <p:sp>
-        <p:nvSpPr>
-          <p:cNvPr id="2" name="Title 1"/>
-          <p:cNvSpPr>
-            <a:spLocks noGrp="1"/>
-          </p:cNvSpPr>
-          <p:nvPr>
-            <p:ph type="title"/>
-          </p:nvPr>
-        </p:nvSpPr>
-        <p:spPr>
-          <a:xfrm>
-            <a:off x="0" y="0"/>
-            <a:ext cx="9144000" cy="602780"/>
-          </a:xfrm>
-          <a:solidFill>
-            <a:srgbClr val="1A1A2E"/>
-          </a:solidFill>
-        </p:spPr>
-        <p:txBody>
-          <a:bodyPr/>
-          <a:lstStyle/>
-          <a:p>
-            <a:pPr lvl="0" indent="0" marL="0">
-              <a:buNone/>
-            </a:pPr>
-            <a:r>
-              <a:rPr/>
-              <a:t>Getting unstuck</a:t>
-            </a:r>
-          </a:p>
-        </p:txBody>
-      </p:sp>
-      <p:sp>
-        <p:nvSpPr>
-          <p:cNvPr id="3" name="Content Placeholder 2"/>
-          <p:cNvSpPr>
-            <a:spLocks noGrp="1"/>
-          </p:cNvSpPr>
-          <p:nvPr>
-            <p:ph idx="1" sz="half"/>
-          </p:nvPr>
-        </p:nvSpPr>
-        <p:spPr/>
-        <p:txBody>
-          <a:bodyPr/>
-          <a:lstStyle/>
-          <a:p>
-            <a:pPr lvl="0" indent="0" marL="0">
-              <a:buNone/>
-            </a:pPr>
-            <a:r>
-              <a:rPr/>
-              <a:t>When Render breaks (it will — that is normal):</a:t>
-            </a:r>
-          </a:p>
-          <a:p>
-            <a:pPr lvl="0"/>
-            <a:r>
-              <a:rPr/>
-              <a:t>Read which </a:t>
-            </a:r>
-            <a:r>
-              <a:rPr b="1"/>
-              <a:t>named chunk</a:t>
-            </a:r>
-            <a:r>
-              <a:rPr/>
-              <a:t> failed — it is in the message</a:t>
-            </a:r>
-          </a:p>
-          <a:p>
-            <a:pPr lvl="0"/>
-            <a:r>
-              <a:rPr/>
-              <a:t>Did you load </a:t>
-            </a:r>
-            <a:r>
-              <a:rPr>
-                <a:latin typeface="Courier"/>
-              </a:rPr>
-              <a:t>library(...)</a:t>
-            </a:r>
-            <a:r>
-              <a:rPr/>
-              <a:t> and the </a:t>
-            </a:r>
-            <a:r>
-              <a:rPr b="1"/>
-              <a:t>data</a:t>
-            </a:r>
-            <a:r>
-              <a:rPr/>
-              <a:t> in a chunk </a:t>
-            </a:r>
-            <a:r>
-              <a:rPr i="1"/>
-              <a:t>above</a:t>
-            </a:r>
-            <a:r>
-              <a:rPr/>
-              <a:t>?</a:t>
-            </a:r>
-          </a:p>
-          <a:p>
-            <a:pPr lvl="0"/>
-            <a:r>
-              <a:rPr/>
-              <a:t>Check the </a:t>
-            </a:r>
-            <a:r>
-              <a:rPr b="1"/>
-              <a:t>YAML</a:t>
-            </a:r>
-            <a:r>
-              <a:rPr/>
-              <a:t>: spaces not tabs, </a:t>
-            </a:r>
-            <a:r>
-              <a:rPr>
-                <a:latin typeface="Courier"/>
-              </a:rPr>
-              <a:t>---</a:t>
-            </a:r>
-            <a:r>
-              <a:rPr/>
-              <a:t> on its own line</a:t>
-            </a:r>
-          </a:p>
-          <a:p>
-            <a:pPr lvl="0"/>
-            <a:r>
-              <a:rPr/>
-              <a:t>Is every chunk label </a:t>
-            </a:r>
-            <a:r>
-              <a:rPr b="1"/>
-              <a:t>unique</a:t>
-            </a:r>
-            <a:r>
-              <a:rPr/>
-              <a:t>?</a:t>
-            </a:r>
-          </a:p>
-          <a:p>
-            <a:pPr lvl="0"/>
-            <a:r>
-              <a:rPr/>
-              <a:t>Render often so the break is easy to find</a:t>
-            </a:r>
-          </a:p>
-          <a:p>
-            <a:pPr lvl="0" indent="0" marL="1270000">
-              <a:buNone/>
-            </a:pPr>
-            <a:r>
-              <a:rPr sz="2000" b="1"/>
-              <a:t>Note</a:t>
-            </a:r>
-          </a:p>
-          <a:p>
-            <a:pPr lvl="0" indent="0" marL="1270000">
-              <a:buNone/>
-            </a:pPr>
-            <a:r>
-              <a:rPr sz="2000" b="1"/>
-              <a:t>✅ Key idea</a:t>
-            </a:r>
-          </a:p>
-          <a:p>
-            <a:pPr lvl="0" indent="0" marL="1270000">
-              <a:buNone/>
-            </a:pPr>
-            <a:r>
-              <a:rPr sz="2000"/>
-              <a:t>A Quarto error names the chunk. That is a gift — go straight to that block.</a:t>
-            </a:r>
-          </a:p>
-        </p:txBody>
-      </p:sp>
-      <p:sp>
-        <p:nvSpPr>
-          <p:cNvPr id="4" name="Content Placeholder 3"/>
-          <p:cNvSpPr>
-            <a:spLocks noGrp="1"/>
-          </p:cNvSpPr>
-          <p:nvPr>
-            <p:ph idx="2" sz="half"/>
-          </p:nvPr>
-        </p:nvSpPr>
-        <p:spPr/>
-        <p:txBody>
-          <a:bodyPr/>
-          <a:lstStyle/>
-          <a:p>
-            <a:pPr lvl="0" indent="0" marL="1270000">
-              <a:buNone/>
-            </a:pPr>
-            <a:r>
-              <a:rPr sz="2000" b="1"/>
-              <a:t>Note</a:t>
-            </a:r>
-          </a:p>
-          <a:p>
-            <a:pPr lvl="0" indent="0" marL="1270000">
-              <a:buNone/>
-            </a:pPr>
-            <a:r>
-              <a:rPr sz="2000" b="1"/>
-              <a:t>📊 Reference</a:t>
-            </a:r>
-          </a:p>
-          <a:p>
-            <a:pPr lvl="0" indent="0" marL="1270000">
-              <a:buNone/>
-            </a:pPr>
-            <a:r>
-              <a:rPr sz="2000"/>
-              <a:t>The Quarto guide is excellent and searchable: </a:t>
-            </a:r>
-            <a:r>
-              <a:rPr sz="2000">
+              <a:rPr/>
+              <a:t>📖 </a:t>
+            </a:r>
+            <a:r>
+              <a:rPr>
                 <a:hlinkClick r:id="rId2"/>
               </a:rPr>
-              <a:t>quarto.org/docs/guide</a:t>
+              <a:t>R4DS Ch 29 — Quarto formats</a:t>
             </a:r>
           </a:p>
         </p:txBody>
@@ -7854,6 +8004,1219 @@
 </p:sld>
 </file>
 
+<file path=ppt/slides/slide30.xml><?xml version="1.0" encoding="utf-8"?>
+<p:sld xmlns:a="http://schemas.openxmlformats.org/drawingml/2006/main" xmlns:r="http://schemas.openxmlformats.org/officeDocument/2006/relationships" xmlns:p="http://schemas.openxmlformats.org/presentationml/2006/main">
+  <p:cSld>
+    <p:spTree>
+      <p:nvGrpSpPr>
+        <p:cNvPr id="1" name=""/>
+        <p:cNvGrpSpPr/>
+        <p:nvPr/>
+      </p:nvGrpSpPr>
+      <p:grpSpPr>
+        <a:xfrm>
+          <a:off x="0" y="0"/>
+          <a:ext cx="0" cy="0"/>
+          <a:chOff x="0" y="0"/>
+          <a:chExt cx="0" cy="0"/>
+        </a:xfrm>
+      </p:grpSpPr>
+      <p:sp>
+        <p:nvSpPr>
+          <p:cNvPr id="2" name="Title 1"/>
+          <p:cNvSpPr>
+            <a:spLocks noGrp="1"/>
+          </p:cNvSpPr>
+          <p:nvPr>
+            <p:ph type="title"/>
+          </p:nvPr>
+        </p:nvSpPr>
+        <p:spPr>
+          <a:xfrm>
+            <a:off x="0" y="0"/>
+            <a:ext cx="9144000" cy="602780"/>
+          </a:xfrm>
+          <a:solidFill>
+            <a:srgbClr val="1A1A2E"/>
+          </a:solidFill>
+        </p:spPr>
+        <p:txBody>
+          <a:bodyPr/>
+          <a:lstStyle/>
+          <a:p>
+            <a:pPr lvl="0" indent="0" marL="0">
+              <a:buNone/>
+            </a:pPr>
+            <a:r>
+              <a:rPr/>
+              <a:t>Same file, many outputs</a:t>
+            </a:r>
+          </a:p>
+        </p:txBody>
+      </p:sp>
+      <p:sp>
+        <p:nvSpPr>
+          <p:cNvPr id="3" name="Content Placeholder 2"/>
+          <p:cNvSpPr>
+            <a:spLocks noGrp="1"/>
+          </p:cNvSpPr>
+          <p:nvPr>
+            <p:ph idx="1" sz="half"/>
+          </p:nvPr>
+        </p:nvSpPr>
+        <p:spPr/>
+        <p:txBody>
+          <a:bodyPr/>
+          <a:lstStyle/>
+          <a:p>
+            <a:pPr lvl="0" indent="0" marL="0">
+              <a:buNone/>
+            </a:pPr>
+            <a:r>
+              <a:rPr/>
+              <a:t>The best part: </a:t>
+            </a:r>
+            <a:r>
+              <a:rPr b="1"/>
+              <a:t>one </a:t>
+            </a:r>
+            <a:r>
+              <a:rPr b="1">
+                <a:latin typeface="Courier"/>
+              </a:rPr>
+              <a:t>.qmd</a:t>
+            </a:r>
+            <a:r>
+              <a:rPr b="1"/>
+              <a:t>, many documents</a:t>
+            </a:r>
+            <a:r>
+              <a:rPr/>
+              <a:t>. Just list formats:</a:t>
+            </a:r>
+          </a:p>
+          <a:p>
+            <a:pPr lvl="0" indent="0">
+              <a:buNone/>
+            </a:pPr>
+            <a:r>
+              <a:rPr>
+                <a:solidFill>
+                  <a:srgbClr val="4758AB"/>
+                </a:solidFill>
+                <a:latin typeface="Courier"/>
+              </a:rPr>
+              <a:t>format</a:t>
+            </a:r>
+            <a:r>
+              <a:rPr b="1">
+                <a:solidFill>
+                  <a:srgbClr val="003B4F"/>
+                </a:solidFill>
+                <a:latin typeface="Courier"/>
+              </a:rPr>
+              <a:t>:</a:t>
+            </a:r>
+            <a:br/>
+            <a:r>
+              <a:rPr>
+                <a:solidFill>
+                  <a:srgbClr val="657422"/>
+                </a:solidFill>
+                <a:latin typeface="Courier"/>
+              </a:rPr>
+              <a:t>  </a:t>
+            </a:r>
+            <a:r>
+              <a:rPr>
+                <a:solidFill>
+                  <a:srgbClr val="4758AB"/>
+                </a:solidFill>
+                <a:latin typeface="Courier"/>
+              </a:rPr>
+              <a:t>docx</a:t>
+            </a:r>
+            <a:r>
+              <a:rPr b="1">
+                <a:solidFill>
+                  <a:srgbClr val="003B4F"/>
+                </a:solidFill>
+                <a:latin typeface="Courier"/>
+              </a:rPr>
+              <a:t>:</a:t>
+            </a:r>
+            <a:r>
+              <a:rPr>
+                <a:solidFill>
+                  <a:srgbClr val="657422"/>
+                </a:solidFill>
+                <a:latin typeface="Courier"/>
+              </a:rPr>
+              <a:t> default</a:t>
+            </a:r>
+            <a:r>
+              <a:rPr>
+                <a:solidFill>
+                  <a:srgbClr val="5E5E5E"/>
+                </a:solidFill>
+                <a:latin typeface="Courier"/>
+              </a:rPr>
+              <a:t>     # Word report</a:t>
+            </a:r>
+            <a:br/>
+            <a:r>
+              <a:rPr>
+                <a:solidFill>
+                  <a:srgbClr val="657422"/>
+                </a:solidFill>
+                <a:latin typeface="Courier"/>
+              </a:rPr>
+              <a:t>  </a:t>
+            </a:r>
+            <a:r>
+              <a:rPr>
+                <a:solidFill>
+                  <a:srgbClr val="4758AB"/>
+                </a:solidFill>
+                <a:latin typeface="Courier"/>
+              </a:rPr>
+              <a:t>html</a:t>
+            </a:r>
+            <a:r>
+              <a:rPr b="1">
+                <a:solidFill>
+                  <a:srgbClr val="003B4F"/>
+                </a:solidFill>
+                <a:latin typeface="Courier"/>
+              </a:rPr>
+              <a:t>:</a:t>
+            </a:r>
+            <a:r>
+              <a:rPr>
+                <a:solidFill>
+                  <a:srgbClr val="657422"/>
+                </a:solidFill>
+                <a:latin typeface="Courier"/>
+              </a:rPr>
+              <a:t> default</a:t>
+            </a:r>
+            <a:r>
+              <a:rPr>
+                <a:solidFill>
+                  <a:srgbClr val="5E5E5E"/>
+                </a:solidFill>
+                <a:latin typeface="Courier"/>
+              </a:rPr>
+              <a:t>     # web page</a:t>
+            </a:r>
+            <a:br/>
+            <a:r>
+              <a:rPr>
+                <a:solidFill>
+                  <a:srgbClr val="657422"/>
+                </a:solidFill>
+                <a:latin typeface="Courier"/>
+              </a:rPr>
+              <a:t>  </a:t>
+            </a:r>
+            <a:r>
+              <a:rPr>
+                <a:solidFill>
+                  <a:srgbClr val="4758AB"/>
+                </a:solidFill>
+                <a:latin typeface="Courier"/>
+              </a:rPr>
+              <a:t>pptx</a:t>
+            </a:r>
+            <a:r>
+              <a:rPr b="1">
+                <a:solidFill>
+                  <a:srgbClr val="003B4F"/>
+                </a:solidFill>
+                <a:latin typeface="Courier"/>
+              </a:rPr>
+              <a:t>:</a:t>
+            </a:r>
+            <a:r>
+              <a:rPr>
+                <a:solidFill>
+                  <a:srgbClr val="657422"/>
+                </a:solidFill>
+                <a:latin typeface="Courier"/>
+              </a:rPr>
+              <a:t> default</a:t>
+            </a:r>
+            <a:r>
+              <a:rPr>
+                <a:solidFill>
+                  <a:srgbClr val="5E5E5E"/>
+                </a:solidFill>
+                <a:latin typeface="Courier"/>
+              </a:rPr>
+              <a:t>     # PowerPoint</a:t>
+            </a:r>
+          </a:p>
+          <a:p>
+            <a:pPr lvl="0"/>
+            <a:r>
+              <a:rPr/>
+              <a:t>Hand in the </a:t>
+            </a:r>
+            <a:r>
+              <a:rPr b="1"/>
+              <a:t>Word</a:t>
+            </a:r>
+            <a:r>
+              <a:rPr/>
+              <a:t> file</a:t>
+            </a:r>
+          </a:p>
+          <a:p>
+            <a:pPr lvl="0"/>
+            <a:r>
+              <a:rPr/>
+              <a:t>Post the </a:t>
+            </a:r>
+            <a:r>
+              <a:rPr b="1"/>
+              <a:t>HTML</a:t>
+            </a:r>
+            <a:r>
+              <a:rPr/>
+              <a:t> to a site</a:t>
+            </a:r>
+          </a:p>
+          <a:p>
+            <a:pPr lvl="0"/>
+            <a:r>
+              <a:rPr/>
+              <a:t>Present the </a:t>
+            </a:r>
+            <a:r>
+              <a:rPr b="1"/>
+              <a:t>PowerPoint</a:t>
+            </a:r>
+            <a:r>
+              <a:rPr/>
+              <a:t> in lab</a:t>
+            </a:r>
+          </a:p>
+          <a:p>
+            <a:pPr lvl="0" indent="0" marL="0">
+              <a:buNone/>
+            </a:pPr>
+            <a:r>
+              <a:rPr/>
+              <a:t>All from the </a:t>
+            </a:r>
+            <a:r>
+              <a:rPr b="1"/>
+              <a:t>same</a:t>
+            </a:r>
+            <a:r>
+              <a:rPr/>
+              <a:t> analysis — no re-doing anything.</a:t>
+            </a:r>
+          </a:p>
+        </p:txBody>
+      </p:sp>
+      <p:sp>
+        <p:nvSpPr>
+          <p:cNvPr id="4" name="Content Placeholder 3"/>
+          <p:cNvSpPr>
+            <a:spLocks noGrp="1"/>
+          </p:cNvSpPr>
+          <p:nvPr>
+            <p:ph idx="2" sz="half"/>
+          </p:nvPr>
+        </p:nvSpPr>
+        <p:spPr/>
+        <p:txBody>
+          <a:bodyPr/>
+          <a:lstStyle/>
+          <a:p>
+            <a:pPr lvl="0" indent="0" marL="1270000">
+              <a:buNone/>
+            </a:pPr>
+            <a:r>
+              <a:rPr sz="2000" b="1"/>
+              <a:t>Note</a:t>
+            </a:r>
+          </a:p>
+          <a:p>
+            <a:pPr lvl="0" indent="0" marL="1270000">
+              <a:buNone/>
+            </a:pPr>
+            <a:r>
+              <a:rPr sz="2000" b="1"/>
+              <a:t>✅ Key idea</a:t>
+            </a:r>
+          </a:p>
+          <a:p>
+            <a:pPr lvl="0" indent="0" marL="1270000">
+              <a:buNone/>
+            </a:pPr>
+            <a:r>
+              <a:rPr sz="2000"/>
+              <a:t>This is exactly how </a:t>
+            </a:r>
+            <a:r>
+              <a:rPr sz="2000" i="1"/>
+              <a:t>these lecture slides</a:t>
+            </a:r>
+            <a:r>
+              <a:rPr sz="2000"/>
+              <a:t> are built. One file → slides, Word, and PowerPoint.</a:t>
+            </a:r>
+          </a:p>
+        </p:txBody>
+      </p:sp>
+    </p:spTree>
+  </p:cSld>
+</p:sld>
+</file>
+
+<file path=ppt/slides/slide31.xml><?xml version="1.0" encoding="utf-8"?>
+<p:sld xmlns:a="http://schemas.openxmlformats.org/drawingml/2006/main" xmlns:r="http://schemas.openxmlformats.org/officeDocument/2006/relationships" xmlns:p="http://schemas.openxmlformats.org/presentationml/2006/main">
+  <p:cSld>
+    <p:spTree>
+      <p:nvGrpSpPr>
+        <p:cNvPr id="1" name=""/>
+        <p:cNvGrpSpPr/>
+        <p:nvPr/>
+      </p:nvGrpSpPr>
+      <p:grpSpPr>
+        <a:xfrm>
+          <a:off x="0" y="0"/>
+          <a:ext cx="0" cy="0"/>
+          <a:chOff x="0" y="0"/>
+          <a:chExt cx="0" cy="0"/>
+        </a:xfrm>
+      </p:grpSpPr>
+      <p:sp>
+        <p:nvSpPr>
+          <p:cNvPr id="2" name="Title 1"/>
+          <p:cNvSpPr>
+            <a:spLocks noGrp="1"/>
+          </p:cNvSpPr>
+          <p:nvPr>
+            <p:ph type="title"/>
+          </p:nvPr>
+        </p:nvSpPr>
+        <p:spPr>
+          <a:xfrm>
+            <a:off x="0" y="0"/>
+            <a:ext cx="9144000" cy="602780"/>
+          </a:xfrm>
+          <a:solidFill>
+            <a:srgbClr val="1A1A2E"/>
+          </a:solidFill>
+        </p:spPr>
+        <p:txBody>
+          <a:bodyPr/>
+          <a:lstStyle/>
+          <a:p>
+            <a:pPr lvl="0" indent="0" marL="0">
+              <a:buNone/>
+            </a:pPr>
+            <a:r>
+              <a:rPr/>
+              <a:t>The render workflow</a:t>
+            </a:r>
+          </a:p>
+        </p:txBody>
+      </p:sp>
+      <p:sp>
+        <p:nvSpPr>
+          <p:cNvPr id="3" name="Content Placeholder 2"/>
+          <p:cNvSpPr>
+            <a:spLocks noGrp="1"/>
+          </p:cNvSpPr>
+          <p:nvPr>
+            <p:ph idx="1" sz="half"/>
+          </p:nvPr>
+        </p:nvSpPr>
+        <p:spPr/>
+        <p:txBody>
+          <a:bodyPr/>
+          <a:lstStyle/>
+          <a:p>
+            <a:pPr lvl="0" indent="0" marL="0">
+              <a:buNone/>
+            </a:pPr>
+            <a:r>
+              <a:rPr/>
+              <a:t>Every time, it is the same three moves:</a:t>
+            </a:r>
+          </a:p>
+          <a:p>
+            <a:pPr lvl="0" indent="-342900" marL="342900">
+              <a:buAutoNum type="arabicPeriod"/>
+            </a:pPr>
+            <a:r>
+              <a:rPr b="1"/>
+              <a:t>Write</a:t>
+            </a:r>
+            <a:r>
+              <a:rPr/>
+              <a:t> — add Markdown text and named code chunks</a:t>
+            </a:r>
+          </a:p>
+          <a:p>
+            <a:pPr lvl="0" indent="-342900" marL="342900">
+              <a:buAutoNum type="arabicPeriod"/>
+            </a:pPr>
+            <a:r>
+              <a:rPr b="1"/>
+              <a:t>Render</a:t>
+            </a:r>
+            <a:r>
+              <a:rPr/>
+              <a:t> — Ctrl/Cmd + Shift + K</a:t>
+            </a:r>
+          </a:p>
+          <a:p>
+            <a:pPr lvl="0" indent="-342900" marL="342900">
+              <a:buAutoNum type="arabicPeriod"/>
+            </a:pPr>
+            <a:r>
+              <a:rPr b="1"/>
+              <a:t>Read</a:t>
+            </a:r>
+            <a:r>
+              <a:rPr/>
+              <a:t> the output; fix the named chunk if it errors</a:t>
+            </a:r>
+          </a:p>
+          <a:p>
+            <a:pPr lvl="0" indent="0" marL="0">
+              <a:buNone/>
+            </a:pPr>
+            <a:r>
+              <a:rPr/>
+              <a:t>Quarto runs your code </a:t>
+            </a:r>
+            <a:r>
+              <a:rPr b="1"/>
+              <a:t>top to bottom in a fresh session</a:t>
+            </a:r>
+            <a:r>
+              <a:rPr/>
+              <a:t> — so the order of your chunks matters.</a:t>
+            </a:r>
+          </a:p>
+          <a:p>
+            <a:pPr lvl="0" indent="0" marL="1270000">
+              <a:buNone/>
+            </a:pPr>
+            <a:r>
+              <a:rPr sz="2000" b="1"/>
+              <a:t>Warning</a:t>
+            </a:r>
+          </a:p>
+          <a:p>
+            <a:pPr lvl="0" indent="0" marL="1270000">
+              <a:buNone/>
+            </a:pPr>
+            <a:r>
+              <a:rPr sz="2000" b="1"/>
+              <a:t>⚠️ Watch out!</a:t>
+            </a:r>
+          </a:p>
+          <a:p>
+            <a:pPr lvl="0" indent="0" marL="1270000">
+              <a:buNone/>
+            </a:pPr>
+            <a:r>
+              <a:rPr sz="2000"/>
+              <a:t>If it renders differently than the console, it is almost always </a:t>
+            </a:r>
+            <a:r>
+              <a:rPr sz="2000" b="1"/>
+              <a:t>chunk order</a:t>
+            </a:r>
+            <a:r>
+              <a:rPr sz="2000"/>
+              <a:t>: load libraries and data </a:t>
+            </a:r>
+            <a:r>
+              <a:rPr sz="2000" b="1"/>
+              <a:t>first</a:t>
+            </a:r>
+            <a:r>
+              <a:rPr sz="2000"/>
+              <a:t>.</a:t>
+            </a:r>
+          </a:p>
+        </p:txBody>
+      </p:sp>
+      <p:sp>
+        <p:nvSpPr>
+          <p:cNvPr id="4" name="Content Placeholder 3"/>
+          <p:cNvSpPr>
+            <a:spLocks noGrp="1"/>
+          </p:cNvSpPr>
+          <p:nvPr>
+            <p:ph idx="2" sz="half"/>
+          </p:nvPr>
+        </p:nvSpPr>
+        <p:spPr/>
+        <p:txBody>
+          <a:bodyPr/>
+          <a:lstStyle/>
+          <a:p>
+            <a:pPr lvl="0" indent="0" marL="1270000">
+              <a:buNone/>
+            </a:pPr>
+            <a:r>
+              <a:rPr sz="2000" b="1"/>
+              <a:t>Tip</a:t>
+            </a:r>
+          </a:p>
+          <a:p>
+            <a:pPr lvl="0" indent="0" marL="1270000">
+              <a:buNone/>
+            </a:pPr>
+            <a:r>
+              <a:rPr sz="2000"/>
+              <a:t>Render </a:t>
+            </a:r>
+            <a:r>
+              <a:rPr sz="2000" b="1"/>
+              <a:t>often</a:t>
+            </a:r>
+            <a:r>
+              <a:rPr sz="2000"/>
+              <a:t> — after every few chunks — so a break is easy to trace. Same as running your script line by line.</a:t>
+            </a:r>
+          </a:p>
+        </p:txBody>
+      </p:sp>
+    </p:spTree>
+  </p:cSld>
+</p:sld>
+</file>
+
+<file path=ppt/slides/slide32.xml><?xml version="1.0" encoding="utf-8"?>
+<p:sld xmlns:a="http://schemas.openxmlformats.org/drawingml/2006/main" xmlns:r="http://schemas.openxmlformats.org/officeDocument/2006/relationships" xmlns:p="http://schemas.openxmlformats.org/presentationml/2006/main">
+  <p:cSld>
+    <p:spTree>
+      <p:nvGrpSpPr>
+        <p:cNvPr id="1" name=""/>
+        <p:cNvGrpSpPr/>
+        <p:nvPr/>
+      </p:nvGrpSpPr>
+      <p:grpSpPr>
+        <a:xfrm>
+          <a:off x="0" y="0"/>
+          <a:ext cx="0" cy="0"/>
+          <a:chOff x="0" y="0"/>
+          <a:chExt cx="0" cy="0"/>
+        </a:xfrm>
+      </p:grpSpPr>
+      <p:sp>
+        <p:nvSpPr>
+          <p:cNvPr id="2" name="Title 1"/>
+          <p:cNvSpPr>
+            <a:spLocks noGrp="1"/>
+          </p:cNvSpPr>
+          <p:nvPr>
+            <p:ph type="title"/>
+          </p:nvPr>
+        </p:nvSpPr>
+        <p:spPr>
+          <a:xfrm>
+            <a:off x="0" y="0"/>
+            <a:ext cx="9144000" cy="582780"/>
+          </a:xfrm>
+        </p:spPr>
+        <p:txBody>
+          <a:bodyPr/>
+          <a:lstStyle/>
+          <a:p>
+            <a:pPr lvl="0" indent="0" marL="0">
+              <a:buNone/>
+            </a:pPr>
+            <a:r>
+              <a:rPr/>
+              <a:t>🛑 Pause — Do Activity Steps 6–7 Now</a:t>
+            </a:r>
+          </a:p>
+        </p:txBody>
+      </p:sp>
+      <p:sp>
+        <p:nvSpPr>
+          <p:cNvPr id="3" name="Content Placeholder 2"/>
+          <p:cNvSpPr>
+            <a:spLocks noGrp="1"/>
+          </p:cNvSpPr>
+          <p:nvPr>
+            <p:ph idx="1"/>
+          </p:nvPr>
+        </p:nvSpPr>
+        <p:spPr/>
+        <p:txBody>
+          <a:bodyPr/>
+          <a:lstStyle/>
+          <a:p>
+            <a:pPr lvl="0" indent="0" marL="0">
+              <a:buNone/>
+            </a:pPr>
+            <a:r>
+              <a:rPr/>
+              <a:t>Upgrade the YAML for a TOC and numbered sections, copy in the template’s table and figure, then render to Word, HTML, and PowerPoint.</a:t>
+            </a:r>
+          </a:p>
+        </p:txBody>
+      </p:sp>
+    </p:spTree>
+  </p:cSld>
+</p:sld>
+</file>
+
+<file path=ppt/slides/slide33.xml><?xml version="1.0" encoding="utf-8"?>
+<p:sld xmlns:a="http://schemas.openxmlformats.org/drawingml/2006/main" xmlns:r="http://schemas.openxmlformats.org/officeDocument/2006/relationships" xmlns:p="http://schemas.openxmlformats.org/presentationml/2006/main">
+  <p:cSld>
+    <p:spTree>
+      <p:nvGrpSpPr>
+        <p:cNvPr id="1" name=""/>
+        <p:cNvGrpSpPr/>
+        <p:nvPr/>
+      </p:nvGrpSpPr>
+      <p:grpSpPr>
+        <a:xfrm>
+          <a:off x="0" y="0"/>
+          <a:ext cx="0" cy="0"/>
+          <a:chOff x="0" y="0"/>
+          <a:chExt cx="0" cy="0"/>
+        </a:xfrm>
+      </p:grpSpPr>
+      <p:sp>
+        <p:nvSpPr>
+          <p:cNvPr id="2" name="Title 1"/>
+          <p:cNvSpPr>
+            <a:spLocks noGrp="1"/>
+          </p:cNvSpPr>
+          <p:nvPr>
+            <p:ph type="title"/>
+          </p:nvPr>
+        </p:nvSpPr>
+        <p:spPr>
+          <a:xfrm>
+            <a:off x="0" y="0"/>
+            <a:ext cx="9144000" cy="602780"/>
+          </a:xfrm>
+          <a:solidFill>
+            <a:srgbClr val="1A1A2E"/>
+          </a:solidFill>
+        </p:spPr>
+        <p:txBody>
+          <a:bodyPr/>
+          <a:lstStyle/>
+          <a:p>
+            <a:pPr lvl="0" indent="0" marL="0">
+              <a:buNone/>
+            </a:pPr>
+            <a:r>
+              <a:rPr/>
+              <a:t>Wrap-up · What you can now do</a:t>
+            </a:r>
+          </a:p>
+        </p:txBody>
+      </p:sp>
+      <p:sp>
+        <p:nvSpPr>
+          <p:cNvPr id="3" name="Content Placeholder 2"/>
+          <p:cNvSpPr>
+            <a:spLocks noGrp="1"/>
+          </p:cNvSpPr>
+          <p:nvPr>
+            <p:ph idx="1" sz="half"/>
+          </p:nvPr>
+        </p:nvSpPr>
+        <p:spPr/>
+        <p:txBody>
+          <a:bodyPr/>
+          <a:lstStyle/>
+          <a:p>
+            <a:pPr lvl="0"/>
+            <a:r>
+              <a:rPr/>
+              <a:t>Explain </a:t>
+            </a:r>
+            <a:r>
+              <a:rPr b="1"/>
+              <a:t>why</a:t>
+            </a:r>
+            <a:r>
+              <a:rPr/>
+              <a:t> a Quarto report beats a bare script</a:t>
+            </a:r>
+          </a:p>
+          <a:p>
+            <a:pPr lvl="0"/>
+            <a:r>
+              <a:rPr/>
+              <a:t>Recognize the three parts: </a:t>
+            </a:r>
+            <a:r>
+              <a:rPr b="1"/>
+              <a:t>YAML</a:t>
+            </a:r>
+            <a:r>
+              <a:rPr/>
+              <a:t>, </a:t>
+            </a:r>
+            <a:r>
+              <a:rPr b="1"/>
+              <a:t>Markdown</a:t>
+            </a:r>
+            <a:r>
+              <a:rPr/>
+              <a:t>, </a:t>
+            </a:r>
+            <a:r>
+              <a:rPr b="1"/>
+              <a:t>code chunks</a:t>
+            </a:r>
+          </a:p>
+          <a:p>
+            <a:pPr lvl="0"/>
+            <a:r>
+              <a:rPr/>
+              <a:t>Write and </a:t>
+            </a:r>
+            <a:r>
+              <a:rPr b="1"/>
+              <a:t>name</a:t>
+            </a:r>
+            <a:r>
+              <a:rPr/>
+              <a:t> a code chunk, set </a:t>
+            </a:r>
+            <a:r>
+              <a:rPr>
+                <a:latin typeface="Courier"/>
+              </a:rPr>
+              <a:t>echo</a:t>
+            </a:r>
+            <a:r>
+              <a:rPr/>
+              <a:t>/</a:t>
+            </a:r>
+            <a:r>
+              <a:rPr>
+                <a:latin typeface="Courier"/>
+              </a:rPr>
+              <a:t>warning</a:t>
+            </a:r>
+            <a:r>
+              <a:rPr/>
+              <a:t> options</a:t>
+            </a:r>
+          </a:p>
+          <a:p>
+            <a:pPr lvl="0"/>
+            <a:r>
+              <a:rPr/>
+              <a:t>Put a </a:t>
+            </a:r>
+            <a:r>
+              <a:rPr b="1"/>
+              <a:t>live number in a sentence</a:t>
+            </a:r>
+            <a:r>
+              <a:rPr/>
+              <a:t> with inline code</a:t>
+            </a:r>
+          </a:p>
+          <a:p>
+            <a:pPr lvl="0"/>
+            <a:r>
+              <a:rPr/>
+              <a:t>Set up YAML to render a </a:t>
+            </a:r>
+            <a:r>
+              <a:rPr b="1"/>
+              <a:t>professional Word document</a:t>
+            </a:r>
+          </a:p>
+          <a:p>
+            <a:pPr lvl="0"/>
+            <a:r>
+              <a:rPr/>
+              <a:t>Render one file to </a:t>
+            </a:r>
+            <a:r>
+              <a:rPr b="1"/>
+              <a:t>Word, HTML, and PowerPoint</a:t>
+            </a:r>
+          </a:p>
+          <a:p>
+            <a:pPr lvl="0" indent="0" marL="1270000">
+              <a:buNone/>
+            </a:pPr>
+            <a:r>
+              <a:rPr sz="2000" b="1"/>
+              <a:t>Tip</a:t>
+            </a:r>
+          </a:p>
+          <a:p>
+            <a:pPr lvl="0" indent="0" marL="1270000">
+              <a:buNone/>
+            </a:pPr>
+            <a:r>
+              <a:rPr sz="2000" b="1"/>
+              <a:t>🖐 Before next class</a:t>
+            </a:r>
+          </a:p>
+          <a:p>
+            <a:pPr lvl="0" indent="0" marL="1270000">
+              <a:buNone/>
+            </a:pPr>
+            <a:r>
+              <a:rPr sz="2000"/>
+              <a:t>Open the activity template, drop in your Lecture 04 t-test, and render it to Word.</a:t>
+            </a:r>
+          </a:p>
+        </p:txBody>
+      </p:sp>
+      <p:sp>
+        <p:nvSpPr>
+          <p:cNvPr id="4" name="Content Placeholder 3"/>
+          <p:cNvSpPr>
+            <a:spLocks noGrp="1"/>
+          </p:cNvSpPr>
+          <p:nvPr>
+            <p:ph idx="2" sz="half"/>
+          </p:nvPr>
+        </p:nvSpPr>
+        <p:spPr/>
+        <p:txBody>
+          <a:bodyPr/>
+          <a:lstStyle/>
+          <a:p>
+            <a:pPr lvl="0" indent="0" marL="1270000">
+              <a:buNone/>
+            </a:pPr>
+            <a:r>
+              <a:rPr sz="2000" b="1"/>
+              <a:t>Note</a:t>
+            </a:r>
+          </a:p>
+          <a:p>
+            <a:pPr lvl="0" indent="0" marL="1270000">
+              <a:buNone/>
+            </a:pPr>
+            <a:r>
+              <a:rPr sz="2000" b="1"/>
+              <a:t>✅ Key idea</a:t>
+            </a:r>
+          </a:p>
+          <a:p>
+            <a:pPr lvl="0" indent="0" marL="1270000">
+              <a:buNone/>
+            </a:pPr>
+            <a:r>
+              <a:rPr sz="2000"/>
+              <a:t>You turned a script into a </a:t>
+            </a:r>
+            <a:r>
+              <a:rPr sz="2000" b="1"/>
+              <a:t>reproducible report</a:t>
+            </a:r>
+            <a:r>
+              <a:rPr sz="2000"/>
+              <a:t>. From here on, every analysis can be a document that rebuilds itself.</a:t>
+            </a:r>
+          </a:p>
+          <a:p>
+            <a:pPr lvl="0" indent="0" marL="0">
+              <a:buNone/>
+            </a:pPr>
+            <a:r>
+              <a:rPr b="1"/>
+              <a:t>Up next — Lecture 05:</a:t>
+            </a:r>
+          </a:p>
+          <a:p>
+            <a:pPr lvl="0"/>
+            <a:r>
+              <a:rPr/>
+              <a:t>Linear regression with </a:t>
+            </a:r>
+            <a:r>
+              <a:rPr>
+                <a:latin typeface="Courier"/>
+              </a:rPr>
+              <a:t>lm()</a:t>
+            </a:r>
+          </a:p>
+          <a:p>
+            <a:pPr lvl="0"/>
+            <a:r>
+              <a:rPr/>
+              <a:t>…written up in your new Quarto report!</a:t>
+            </a:r>
+          </a:p>
+        </p:txBody>
+      </p:sp>
+    </p:spTree>
+  </p:cSld>
+</p:sld>
+</file>
+
+<file path=ppt/slides/slide34.xml><?xml version="1.0" encoding="utf-8"?>
+<p:sld xmlns:a="http://schemas.openxmlformats.org/drawingml/2006/main" xmlns:r="http://schemas.openxmlformats.org/officeDocument/2006/relationships" xmlns:p="http://schemas.openxmlformats.org/presentationml/2006/main">
+  <p:cSld>
+    <p:spTree>
+      <p:nvGrpSpPr>
+        <p:cNvPr id="1" name=""/>
+        <p:cNvGrpSpPr/>
+        <p:nvPr/>
+      </p:nvGrpSpPr>
+      <p:grpSpPr>
+        <a:xfrm>
+          <a:off x="0" y="0"/>
+          <a:ext cx="0" cy="0"/>
+          <a:chOff x="0" y="0"/>
+          <a:chExt cx="0" cy="0"/>
+        </a:xfrm>
+      </p:grpSpPr>
+      <p:sp>
+        <p:nvSpPr>
+          <p:cNvPr id="2" name="Title 1"/>
+          <p:cNvSpPr>
+            <a:spLocks noGrp="1"/>
+          </p:cNvSpPr>
+          <p:nvPr>
+            <p:ph type="title"/>
+          </p:nvPr>
+        </p:nvSpPr>
+        <p:spPr>
+          <a:xfrm>
+            <a:off x="0" y="0"/>
+            <a:ext cx="9144000" cy="602780"/>
+          </a:xfrm>
+          <a:solidFill>
+            <a:srgbClr val="1A1A2E"/>
+          </a:solidFill>
+        </p:spPr>
+        <p:txBody>
+          <a:bodyPr/>
+          <a:lstStyle/>
+          <a:p>
+            <a:pPr lvl="0" indent="0" marL="0">
+              <a:buNone/>
+            </a:pPr>
+            <a:r>
+              <a:rPr/>
+              <a:t>Getting unstuck</a:t>
+            </a:r>
+          </a:p>
+        </p:txBody>
+      </p:sp>
+      <p:sp>
+        <p:nvSpPr>
+          <p:cNvPr id="3" name="Content Placeholder 2"/>
+          <p:cNvSpPr>
+            <a:spLocks noGrp="1"/>
+          </p:cNvSpPr>
+          <p:nvPr>
+            <p:ph idx="1" sz="half"/>
+          </p:nvPr>
+        </p:nvSpPr>
+        <p:spPr/>
+        <p:txBody>
+          <a:bodyPr/>
+          <a:lstStyle/>
+          <a:p>
+            <a:pPr lvl="0" indent="0" marL="0">
+              <a:buNone/>
+            </a:pPr>
+            <a:r>
+              <a:rPr/>
+              <a:t>When Render breaks (it will — that is normal):</a:t>
+            </a:r>
+          </a:p>
+          <a:p>
+            <a:pPr lvl="0"/>
+            <a:r>
+              <a:rPr/>
+              <a:t>Read which </a:t>
+            </a:r>
+            <a:r>
+              <a:rPr b="1"/>
+              <a:t>named chunk</a:t>
+            </a:r>
+            <a:r>
+              <a:rPr/>
+              <a:t> failed — it is in the message</a:t>
+            </a:r>
+          </a:p>
+          <a:p>
+            <a:pPr lvl="0"/>
+            <a:r>
+              <a:rPr/>
+              <a:t>Did you load </a:t>
+            </a:r>
+            <a:r>
+              <a:rPr>
+                <a:latin typeface="Courier"/>
+              </a:rPr>
+              <a:t>library(...)</a:t>
+            </a:r>
+            <a:r>
+              <a:rPr/>
+              <a:t> and the </a:t>
+            </a:r>
+            <a:r>
+              <a:rPr b="1"/>
+              <a:t>data</a:t>
+            </a:r>
+            <a:r>
+              <a:rPr/>
+              <a:t> in a chunk </a:t>
+            </a:r>
+            <a:r>
+              <a:rPr i="1"/>
+              <a:t>above</a:t>
+            </a:r>
+            <a:r>
+              <a:rPr/>
+              <a:t>?</a:t>
+            </a:r>
+          </a:p>
+          <a:p>
+            <a:pPr lvl="0"/>
+            <a:r>
+              <a:rPr/>
+              <a:t>Check the </a:t>
+            </a:r>
+            <a:r>
+              <a:rPr b="1"/>
+              <a:t>YAML</a:t>
+            </a:r>
+            <a:r>
+              <a:rPr/>
+              <a:t>: spaces not tabs, </a:t>
+            </a:r>
+            <a:r>
+              <a:rPr>
+                <a:latin typeface="Courier"/>
+              </a:rPr>
+              <a:t>---</a:t>
+            </a:r>
+            <a:r>
+              <a:rPr/>
+              <a:t> on its own line</a:t>
+            </a:r>
+          </a:p>
+          <a:p>
+            <a:pPr lvl="0"/>
+            <a:r>
+              <a:rPr/>
+              <a:t>Is every chunk label </a:t>
+            </a:r>
+            <a:r>
+              <a:rPr b="1"/>
+              <a:t>unique</a:t>
+            </a:r>
+            <a:r>
+              <a:rPr/>
+              <a:t>?</a:t>
+            </a:r>
+          </a:p>
+          <a:p>
+            <a:pPr lvl="0"/>
+            <a:r>
+              <a:rPr/>
+              <a:t>Render often so the break is easy to find</a:t>
+            </a:r>
+          </a:p>
+          <a:p>
+            <a:pPr lvl="0" indent="0" marL="1270000">
+              <a:buNone/>
+            </a:pPr>
+            <a:r>
+              <a:rPr sz="2000" b="1"/>
+              <a:t>Note</a:t>
+            </a:r>
+          </a:p>
+          <a:p>
+            <a:pPr lvl="0" indent="0" marL="1270000">
+              <a:buNone/>
+            </a:pPr>
+            <a:r>
+              <a:rPr sz="2000" b="1"/>
+              <a:t>✅ Key idea</a:t>
+            </a:r>
+          </a:p>
+          <a:p>
+            <a:pPr lvl="0" indent="0" marL="1270000">
+              <a:buNone/>
+            </a:pPr>
+            <a:r>
+              <a:rPr sz="2000"/>
+              <a:t>A Quarto error names the chunk. That is a gift — go straight to that block.</a:t>
+            </a:r>
+          </a:p>
+        </p:txBody>
+      </p:sp>
+      <p:sp>
+        <p:nvSpPr>
+          <p:cNvPr id="4" name="Content Placeholder 3"/>
+          <p:cNvSpPr>
+            <a:spLocks noGrp="1"/>
+          </p:cNvSpPr>
+          <p:nvPr>
+            <p:ph idx="2" sz="half"/>
+          </p:nvPr>
+        </p:nvSpPr>
+        <p:spPr/>
+        <p:txBody>
+          <a:bodyPr/>
+          <a:lstStyle/>
+          <a:p>
+            <a:pPr lvl="0" indent="0" marL="1270000">
+              <a:buNone/>
+            </a:pPr>
+            <a:r>
+              <a:rPr sz="2000" b="1"/>
+              <a:t>Note</a:t>
+            </a:r>
+          </a:p>
+          <a:p>
+            <a:pPr lvl="0" indent="0" marL="1270000">
+              <a:buNone/>
+            </a:pPr>
+            <a:r>
+              <a:rPr sz="2000" b="1"/>
+              <a:t>📊 Reference</a:t>
+            </a:r>
+          </a:p>
+          <a:p>
+            <a:pPr lvl="0" indent="0" marL="1270000">
+              <a:buNone/>
+            </a:pPr>
+            <a:r>
+              <a:rPr sz="2000"/>
+              <a:t>The Quarto guide is excellent and searchable: </a:t>
+            </a:r>
+            <a:r>
+              <a:rPr sz="2000">
+                <a:hlinkClick r:id="rId2"/>
+              </a:rPr>
+              <a:t>quarto.org/docs/guide</a:t>
+            </a:r>
+          </a:p>
+        </p:txBody>
+      </p:sp>
+    </p:spTree>
+  </p:cSld>
+</p:sld>
+</file>
+
 <file path=ppt/slides/slide4.xml><?xml version="1.0" encoding="utf-8"?>
 <p:sld xmlns:a="http://schemas.openxmlformats.org/drawingml/2006/main" xmlns:r="http://schemas.openxmlformats.org/officeDocument/2006/relationships" xmlns:p="http://schemas.openxmlformats.org/presentationml/2006/main">
   <p:cSld>
@@ -7884,8 +9247,11 @@
         <p:spPr>
           <a:xfrm>
             <a:off x="0" y="0"/>
-            <a:ext cx="9144000" cy="582780"/>
+            <a:ext cx="9144000" cy="602780"/>
           </a:xfrm>
+          <a:solidFill>
+            <a:srgbClr val="1A1A2E"/>
+          </a:solidFill>
         </p:spPr>
         <p:txBody>
           <a:bodyPr/>
@@ -7896,7 +9262,7 @@
             </a:pPr>
             <a:r>
               <a:rPr/>
-              <a:t>Part 1 · The problem with scripts</a:t>
+              <a:t>How to Use These Slides — Predict · Type · Render</a:t>
             </a:r>
           </a:p>
         </p:txBody>
@@ -7908,7 +9274,7 @@
             <a:spLocks noGrp="1"/>
           </p:cNvSpPr>
           <p:nvPr>
-            <p:ph idx="1"/>
+            <p:ph idx="1" sz="half"/>
           </p:nvPr>
         </p:nvSpPr>
         <p:spPr/>
@@ -7917,14 +9283,150 @@
           <a:lstStyle/>
           <a:p>
             <a:pPr lvl="0" indent="0" marL="0">
-              <a:spcBef>
-                <a:spcPts val="3000"/>
-              </a:spcBef>
-              <a:buNone/>
-            </a:pPr>
+              <a:buNone/>
+            </a:pPr>
+            <a:r>
+              <a:rPr/>
+              <a:t>This lecture runs in </a:t>
+            </a:r>
             <a:r>
               <a:rPr b="1"/>
-              <a:t>What happens after the analysis?</a:t>
+              <a:t>four short chunks</a:t>
+            </a:r>
+            <a:r>
+              <a:rPr/>
+              <a:t>. After each chunk you switch to the </a:t>
+            </a:r>
+            <a:r>
+              <a:rPr b="1"/>
+              <a:t>activity</a:t>
+            </a:r>
+            <a:r>
+              <a:rPr/>
+              <a:t> and build your own report.</a:t>
+            </a:r>
+          </a:p>
+          <a:p>
+            <a:pPr lvl="0" indent="0" marL="0">
+              <a:buNone/>
+            </a:pPr>
+            <a:r>
+              <a:rPr b="1"/>
+              <a:t>For every snippet, do three things:</a:t>
+            </a:r>
+          </a:p>
+          <a:p>
+            <a:pPr lvl="0" indent="-342900" marL="342900">
+              <a:buAutoNum type="arabicPeriod"/>
+            </a:pPr>
+            <a:r>
+              <a:rPr b="1"/>
+              <a:t>Predict</a:t>
+            </a:r>
+            <a:r>
+              <a:rPr/>
+              <a:t> — before you Render, say what the document will show</a:t>
+            </a:r>
+          </a:p>
+          <a:p>
+            <a:pPr lvl="0" indent="-342900" marL="342900">
+              <a:buAutoNum type="arabicPeriod"/>
+            </a:pPr>
+            <a:r>
+              <a:rPr b="1"/>
+              <a:t>Type</a:t>
+            </a:r>
+            <a:r>
+              <a:rPr/>
+              <a:t> it out by hand — do not copy-paste</a:t>
+            </a:r>
+          </a:p>
+          <a:p>
+            <a:pPr lvl="0" indent="-342900" marL="342900">
+              <a:buAutoNum type="arabicPeriod"/>
+            </a:pPr>
+            <a:r>
+              <a:rPr b="1"/>
+              <a:t>Render</a:t>
+            </a:r>
+            <a:r>
+              <a:rPr/>
+              <a:t> and compare to your prediction</a:t>
+            </a:r>
+          </a:p>
+        </p:txBody>
+      </p:sp>
+      <p:sp>
+        <p:nvSpPr>
+          <p:cNvPr id="4" name="Content Placeholder 3"/>
+          <p:cNvSpPr>
+            <a:spLocks noGrp="1"/>
+          </p:cNvSpPr>
+          <p:nvPr>
+            <p:ph idx="2" sz="half"/>
+          </p:nvPr>
+        </p:nvSpPr>
+        <p:spPr/>
+        <p:txBody>
+          <a:bodyPr/>
+          <a:lstStyle/>
+          <a:p>
+            <a:pPr lvl="0" indent="0" marL="1270000">
+              <a:buNone/>
+            </a:pPr>
+            <a:r>
+              <a:rPr sz="2000" b="1"/>
+              <a:t>Note</a:t>
+            </a:r>
+          </a:p>
+          <a:p>
+            <a:pPr lvl="0" indent="0" marL="1270000">
+              <a:buNone/>
+            </a:pPr>
+            <a:r>
+              <a:rPr sz="2000" b="1"/>
+              <a:t>✅ Why bother? (the evidence)</a:t>
+            </a:r>
+          </a:p>
+          <a:p>
+            <a:pPr lvl="0"/>
+            <a:r>
+              <a:rPr sz="2000" b="1"/>
+              <a:t>Predicting first</a:t>
+            </a:r>
+            <a:r>
+              <a:rPr sz="2000"/>
+              <a:t> forces you to </a:t>
+            </a:r>
+            <a:r>
+              <a:rPr sz="2000" i="1"/>
+              <a:t>retrieve</a:t>
+            </a:r>
+            <a:r>
+              <a:rPr sz="2000"/>
+              <a:t> how Markdown and chunks behave. The surprise when you’re wrong is what makes it stick.</a:t>
+            </a:r>
+          </a:p>
+          <a:p>
+            <a:pPr lvl="0"/>
+            <a:r>
+              <a:rPr sz="2000" b="1"/>
+              <a:t>Typing by hand</a:t>
+            </a:r>
+            <a:r>
+              <a:rPr sz="2000"/>
+              <a:t> builds muscle memory for YAML indentation and chunk syntax — exactly where beginners slip.</a:t>
+            </a:r>
+          </a:p>
+          <a:p>
+            <a:pPr lvl="0"/>
+            <a:r>
+              <a:rPr sz="2000" b="1"/>
+              <a:t>Chunk → immediate practice</a:t>
+            </a:r>
+            <a:r>
+              <a:rPr sz="2000"/>
+              <a:t> keeps each new idea in working memory long enough to form a lasting schema.</a:t>
             </a:r>
           </a:p>
         </p:txBody>
@@ -7953,12 +9455,42 @@
       </p:grpSpPr>
       <p:sp>
         <p:nvSpPr>
+          <p:cNvPr id="2" name="Title 1"/>
+          <p:cNvSpPr>
+            <a:spLocks noGrp="1"/>
+          </p:cNvSpPr>
+          <p:nvPr>
+            <p:ph type="title"/>
+          </p:nvPr>
+        </p:nvSpPr>
+        <p:spPr>
+          <a:xfrm>
+            <a:off x="0" y="0"/>
+            <a:ext cx="9144000" cy="582780"/>
+          </a:xfrm>
+        </p:spPr>
+        <p:txBody>
+          <a:bodyPr/>
+          <a:lstStyle/>
+          <a:p>
+            <a:pPr lvl="0" indent="0" marL="0">
+              <a:buNone/>
+            </a:pPr>
+            <a:r>
+              <a:rPr/>
+              <a:t>🧩 Chunk 1 of 4 · Why Quarto?</a:t>
+            </a:r>
+          </a:p>
+        </p:txBody>
+      </p:sp>
+      <p:sp>
+        <p:nvSpPr>
           <p:cNvPr id="3" name="Content Placeholder 2"/>
           <p:cNvSpPr>
             <a:spLocks noGrp="1"/>
           </p:cNvSpPr>
           <p:nvPr>
-            <p:ph idx="1" sz="half"/>
+            <p:ph idx="1"/>
           </p:nvPr>
         </p:nvSpPr>
         <p:spPr/>
@@ -7970,70 +9502,12 @@
               <a:buNone/>
             </a:pPr>
             <a:r>
-              <a:rPr/>
-              <a:t>Your </a:t>
-            </a:r>
-            <a:r>
-              <a:rPr>
-                <a:latin typeface="Courier"/>
-              </a:rPr>
-              <a:t>.R</a:t>
-            </a:r>
-            <a:r>
-              <a:rPr/>
-              <a:t> script is great for </a:t>
-            </a:r>
-            <a:r>
-              <a:rPr i="1"/>
-              <a:t>running</a:t>
-            </a:r>
-            <a:r>
-              <a:rPr/>
-              <a:t> code. But when the lab report is due you have to:</a:t>
-            </a:r>
-          </a:p>
-          <a:p>
-            <a:pPr lvl="0"/>
-            <a:r>
-              <a:rPr/>
-              <a:t>Run the script</a:t>
-            </a:r>
-          </a:p>
-          <a:p>
-            <a:pPr lvl="0"/>
-            <a:r>
               <a:rPr b="1"/>
-              <a:t>Copy</a:t>
-            </a:r>
-            <a:r>
-              <a:rPr/>
-              <a:t> each number into Word by hand</a:t>
-            </a:r>
-          </a:p>
-          <a:p>
-            <a:pPr lvl="0"/>
-            <a:r>
-              <a:rPr b="1"/>
-              <a:t>Export</a:t>
-            </a:r>
-            <a:r>
-              <a:rPr/>
-              <a:t> every plot, then drag it in</a:t>
-            </a:r>
-          </a:p>
-          <a:p>
-            <a:pPr lvl="0"/>
-            <a:r>
-              <a:rPr/>
-              <a:t>Re-do </a:t>
-            </a:r>
-            <a:r>
-              <a:rPr i="1"/>
-              <a:t>all of it</a:t>
-            </a:r>
-            <a:r>
-              <a:rPr/>
-              <a:t> when the data changes</a:t>
+              <a:t>We will cover:</a:t>
+            </a:r>
+            <a:r>
+              <a:rPr/>
+              <a:t> the pain of script-plus-copy-paste, literate programming, and reproducibility — the real payoff.</a:t>
             </a:r>
           </a:p>
           <a:p>
@@ -8042,7 +9516,7 @@
             </a:pPr>
             <a:r>
               <a:rPr sz="2000" b="1"/>
-              <a:t>Warning</a:t>
+              <a:t>Tip</a:t>
             </a:r>
           </a:p>
           <a:p>
@@ -8051,59 +9525,29 @@
             </a:pPr>
             <a:r>
               <a:rPr sz="2000" b="1"/>
-              <a:t>⚠️ Watch out!</a:t>
-            </a:r>
-          </a:p>
-          <a:p>
-            <a:pPr lvl="0" indent="0" marL="1270000">
-              <a:buNone/>
-            </a:pPr>
+              <a:t>🖐 After this chunk:</a:t>
+            </a:r>
             <a:r>
               <a:rPr sz="2000"/>
-              <a:t>Every hand-copied number is a chance for a typo. Change one data point and the whole report is out of date.</a:t>
-            </a:r>
-          </a:p>
-        </p:txBody>
-      </p:sp>
-      <p:sp>
-        <p:nvSpPr>
-          <p:cNvPr id="4" name="Content Placeholder 3"/>
-          <p:cNvSpPr>
-            <a:spLocks noGrp="1"/>
-          </p:cNvSpPr>
-          <p:nvPr>
-            <p:ph idx="2" sz="half"/>
-          </p:nvPr>
-        </p:nvSpPr>
-        <p:spPr/>
-        <p:txBody>
-          <a:bodyPr/>
-          <a:lstStyle/>
-          <a:p>
-            <a:pPr lvl="0" indent="0" marL="1270000">
-              <a:buNone/>
-            </a:pPr>
+              <a:t> open the finished example </a:t>
+            </a:r>
+            <a:r>
+              <a:rPr sz="2000" b="1">
+                <a:latin typeface="Courier"/>
+              </a:rPr>
+              <a:t>t_test_report.qmd</a:t>
+            </a:r>
+            <a:r>
+              <a:rPr sz="2000"/>
+              <a:t>, Render it, then start </a:t>
+            </a:r>
             <a:r>
               <a:rPr sz="2000" b="1"/>
-              <a:t>Note</a:t>
-            </a:r>
-          </a:p>
-          <a:p>
-            <a:pPr lvl="0" indent="0" marL="1270000">
-              <a:buNone/>
-            </a:pPr>
-            <a:r>
-              <a:rPr sz="2000" b="1"/>
-              <a:t>📊 Coming from Excel?</a:t>
-            </a:r>
-          </a:p>
-          <a:p>
-            <a:pPr lvl="0" indent="0" marL="1270000">
-              <a:buNone/>
-            </a:pPr>
+              <a:t>Activity Step 1</a:t>
+            </a:r>
             <a:r>
               <a:rPr sz="2000"/>
-              <a:t>This is the same pain as pasting a chart into Word, then editing the spreadsheet and forgetting to update the chart.</a:t>
+              <a:t>.</a:t>
             </a:r>
           </a:p>
         </p:txBody>
@@ -8143,6 +9587,265 @@
         <p:spPr>
           <a:xfrm>
             <a:off x="0" y="0"/>
+            <a:ext cx="9144000" cy="582780"/>
+          </a:xfrm>
+        </p:spPr>
+        <p:txBody>
+          <a:bodyPr/>
+          <a:lstStyle/>
+          <a:p>
+            <a:pPr lvl="0" indent="0" marL="0">
+              <a:buNone/>
+            </a:pPr>
+            <a:r>
+              <a:rPr/>
+              <a:t>Part 1 · The problem with scripts</a:t>
+            </a:r>
+          </a:p>
+        </p:txBody>
+      </p:sp>
+      <p:sp>
+        <p:nvSpPr>
+          <p:cNvPr id="3" name="Content Placeholder 2"/>
+          <p:cNvSpPr>
+            <a:spLocks noGrp="1"/>
+          </p:cNvSpPr>
+          <p:nvPr>
+            <p:ph idx="1"/>
+          </p:nvPr>
+        </p:nvSpPr>
+        <p:spPr/>
+        <p:txBody>
+          <a:bodyPr/>
+          <a:lstStyle/>
+          <a:p>
+            <a:pPr lvl="0" indent="0" marL="0">
+              <a:spcBef>
+                <a:spcPts val="3000"/>
+              </a:spcBef>
+              <a:buNone/>
+            </a:pPr>
+            <a:r>
+              <a:rPr b="1"/>
+              <a:t>What happens after the analysis?</a:t>
+            </a:r>
+          </a:p>
+        </p:txBody>
+      </p:sp>
+    </p:spTree>
+  </p:cSld>
+</p:sld>
+</file>
+
+<file path=ppt/slides/slide7.xml><?xml version="1.0" encoding="utf-8"?>
+<p:sld xmlns:a="http://schemas.openxmlformats.org/drawingml/2006/main" xmlns:r="http://schemas.openxmlformats.org/officeDocument/2006/relationships" xmlns:p="http://schemas.openxmlformats.org/presentationml/2006/main">
+  <p:cSld>
+    <p:spTree>
+      <p:nvGrpSpPr>
+        <p:cNvPr id="1" name=""/>
+        <p:cNvGrpSpPr/>
+        <p:nvPr/>
+      </p:nvGrpSpPr>
+      <p:grpSpPr>
+        <a:xfrm>
+          <a:off x="0" y="0"/>
+          <a:ext cx="0" cy="0"/>
+          <a:chOff x="0" y="0"/>
+          <a:chExt cx="0" cy="0"/>
+        </a:xfrm>
+      </p:grpSpPr>
+      <p:sp>
+        <p:nvSpPr>
+          <p:cNvPr id="3" name="Content Placeholder 2"/>
+          <p:cNvSpPr>
+            <a:spLocks noGrp="1"/>
+          </p:cNvSpPr>
+          <p:nvPr>
+            <p:ph idx="1" sz="half"/>
+          </p:nvPr>
+        </p:nvSpPr>
+        <p:spPr/>
+        <p:txBody>
+          <a:bodyPr/>
+          <a:lstStyle/>
+          <a:p>
+            <a:pPr lvl="0" indent="0" marL="0">
+              <a:buNone/>
+            </a:pPr>
+            <a:r>
+              <a:rPr/>
+              <a:t>Your </a:t>
+            </a:r>
+            <a:r>
+              <a:rPr>
+                <a:latin typeface="Courier"/>
+              </a:rPr>
+              <a:t>.R</a:t>
+            </a:r>
+            <a:r>
+              <a:rPr/>
+              <a:t> script is great for </a:t>
+            </a:r>
+            <a:r>
+              <a:rPr i="1"/>
+              <a:t>running</a:t>
+            </a:r>
+            <a:r>
+              <a:rPr/>
+              <a:t> code. But when the lab report is due you have to:</a:t>
+            </a:r>
+          </a:p>
+          <a:p>
+            <a:pPr lvl="0"/>
+            <a:r>
+              <a:rPr/>
+              <a:t>Run the script</a:t>
+            </a:r>
+          </a:p>
+          <a:p>
+            <a:pPr lvl="0"/>
+            <a:r>
+              <a:rPr b="1"/>
+              <a:t>Copy</a:t>
+            </a:r>
+            <a:r>
+              <a:rPr/>
+              <a:t> each number into Word by hand</a:t>
+            </a:r>
+          </a:p>
+          <a:p>
+            <a:pPr lvl="0"/>
+            <a:r>
+              <a:rPr b="1"/>
+              <a:t>Export</a:t>
+            </a:r>
+            <a:r>
+              <a:rPr/>
+              <a:t> every plot, then drag it in</a:t>
+            </a:r>
+          </a:p>
+          <a:p>
+            <a:pPr lvl="0"/>
+            <a:r>
+              <a:rPr/>
+              <a:t>Re-do </a:t>
+            </a:r>
+            <a:r>
+              <a:rPr i="1"/>
+              <a:t>all of it</a:t>
+            </a:r>
+            <a:r>
+              <a:rPr/>
+              <a:t> when the data changes</a:t>
+            </a:r>
+          </a:p>
+          <a:p>
+            <a:pPr lvl="0" indent="0" marL="1270000">
+              <a:buNone/>
+            </a:pPr>
+            <a:r>
+              <a:rPr sz="2000" b="1"/>
+              <a:t>Warning</a:t>
+            </a:r>
+          </a:p>
+          <a:p>
+            <a:pPr lvl="0" indent="0" marL="1270000">
+              <a:buNone/>
+            </a:pPr>
+            <a:r>
+              <a:rPr sz="2000" b="1"/>
+              <a:t>⚠️ Watch out!</a:t>
+            </a:r>
+          </a:p>
+          <a:p>
+            <a:pPr lvl="0" indent="0" marL="1270000">
+              <a:buNone/>
+            </a:pPr>
+            <a:r>
+              <a:rPr sz="2000"/>
+              <a:t>Every hand-copied number is a chance for a typo. Change one data point and the whole report is out of date.</a:t>
+            </a:r>
+          </a:p>
+        </p:txBody>
+      </p:sp>
+      <p:sp>
+        <p:nvSpPr>
+          <p:cNvPr id="4" name="Content Placeholder 3"/>
+          <p:cNvSpPr>
+            <a:spLocks noGrp="1"/>
+          </p:cNvSpPr>
+          <p:nvPr>
+            <p:ph idx="2" sz="half"/>
+          </p:nvPr>
+        </p:nvSpPr>
+        <p:spPr/>
+        <p:txBody>
+          <a:bodyPr/>
+          <a:lstStyle/>
+          <a:p>
+            <a:pPr lvl="0" indent="0" marL="1270000">
+              <a:buNone/>
+            </a:pPr>
+            <a:r>
+              <a:rPr sz="2000" b="1"/>
+              <a:t>Note</a:t>
+            </a:r>
+          </a:p>
+          <a:p>
+            <a:pPr lvl="0" indent="0" marL="1270000">
+              <a:buNone/>
+            </a:pPr>
+            <a:r>
+              <a:rPr sz="2000" b="1"/>
+              <a:t>📊 Coming from Excel?</a:t>
+            </a:r>
+          </a:p>
+          <a:p>
+            <a:pPr lvl="0" indent="0" marL="1270000">
+              <a:buNone/>
+            </a:pPr>
+            <a:r>
+              <a:rPr sz="2000"/>
+              <a:t>This is the same pain as pasting a chart into Word, then editing the spreadsheet and forgetting to update the chart.</a:t>
+            </a:r>
+          </a:p>
+        </p:txBody>
+      </p:sp>
+    </p:spTree>
+  </p:cSld>
+</p:sld>
+</file>
+
+<file path=ppt/slides/slide8.xml><?xml version="1.0" encoding="utf-8"?>
+<p:sld xmlns:a="http://schemas.openxmlformats.org/drawingml/2006/main" xmlns:r="http://schemas.openxmlformats.org/officeDocument/2006/relationships" xmlns:p="http://schemas.openxmlformats.org/presentationml/2006/main">
+  <p:cSld>
+    <p:spTree>
+      <p:nvGrpSpPr>
+        <p:cNvPr id="1" name=""/>
+        <p:cNvGrpSpPr/>
+        <p:nvPr/>
+      </p:nvGrpSpPr>
+      <p:grpSpPr>
+        <a:xfrm>
+          <a:off x="0" y="0"/>
+          <a:ext cx="0" cy="0"/>
+          <a:chOff x="0" y="0"/>
+          <a:chExt cx="0" cy="0"/>
+        </a:xfrm>
+      </p:grpSpPr>
+      <p:sp>
+        <p:nvSpPr>
+          <p:cNvPr id="2" name="Title 1"/>
+          <p:cNvSpPr>
+            <a:spLocks noGrp="1"/>
+          </p:cNvSpPr>
+          <p:nvPr>
+            <p:ph type="title"/>
+          </p:nvPr>
+        </p:nvSpPr>
+        <p:spPr>
+          <a:xfrm>
+            <a:off x="0" y="0"/>
             <a:ext cx="9144000" cy="602780"/>
           </a:xfrm>
           <a:solidFill>
@@ -8386,7 +10089,7 @@
 </p:sld>
 </file>
 
-<file path=ppt/slides/slide7.xml><?xml version="1.0" encoding="utf-8"?>
+<file path=ppt/slides/slide9.xml><?xml version="1.0" encoding="utf-8"?>
 <p:sld xmlns:a="http://schemas.openxmlformats.org/drawingml/2006/main" xmlns:r="http://schemas.openxmlformats.org/officeDocument/2006/relationships" xmlns:p="http://schemas.openxmlformats.org/presentationml/2006/main">
   <p:cSld>
     <p:spTree>
@@ -8584,291 +10287,6 @@
           </a:ln>
         </p:spPr>
       </p:pic>
-    </p:spTree>
-  </p:cSld>
-</p:sld>
-</file>
-
-<file path=ppt/slides/slide8.xml><?xml version="1.0" encoding="utf-8"?>
-<p:sld xmlns:a="http://schemas.openxmlformats.org/drawingml/2006/main" xmlns:r="http://schemas.openxmlformats.org/officeDocument/2006/relationships" xmlns:p="http://schemas.openxmlformats.org/presentationml/2006/main">
-  <p:cSld>
-    <p:spTree>
-      <p:nvGrpSpPr>
-        <p:cNvPr id="1" name=""/>
-        <p:cNvGrpSpPr/>
-        <p:nvPr/>
-      </p:nvGrpSpPr>
-      <p:grpSpPr>
-        <a:xfrm>
-          <a:off x="0" y="0"/>
-          <a:ext cx="0" cy="0"/>
-          <a:chOff x="0" y="0"/>
-          <a:chExt cx="0" cy="0"/>
-        </a:xfrm>
-      </p:grpSpPr>
-      <p:sp>
-        <p:nvSpPr>
-          <p:cNvPr id="2" name="Title 1"/>
-          <p:cNvSpPr>
-            <a:spLocks noGrp="1"/>
-          </p:cNvSpPr>
-          <p:nvPr>
-            <p:ph type="title"/>
-          </p:nvPr>
-        </p:nvSpPr>
-        <p:spPr>
-          <a:xfrm>
-            <a:off x="0" y="0"/>
-            <a:ext cx="9144000" cy="582780"/>
-          </a:xfrm>
-        </p:spPr>
-        <p:txBody>
-          <a:bodyPr/>
-          <a:lstStyle/>
-          <a:p>
-            <a:pPr lvl="0" indent="0" marL="0">
-              <a:buNone/>
-            </a:pPr>
-            <a:r>
-              <a:rPr/>
-              <a:t>Part 2 · Anatomy of a </a:t>
-            </a:r>
-            <a:r>
-              <a:rPr>
-                <a:latin typeface="Courier"/>
-              </a:rPr>
-              <a:t>.qmd</a:t>
-            </a:r>
-            <a:r>
-              <a:rPr/>
-              <a:t> file</a:t>
-            </a:r>
-          </a:p>
-        </p:txBody>
-      </p:sp>
-      <p:sp>
-        <p:nvSpPr>
-          <p:cNvPr id="3" name="Content Placeholder 2"/>
-          <p:cNvSpPr>
-            <a:spLocks noGrp="1"/>
-          </p:cNvSpPr>
-          <p:nvPr>
-            <p:ph idx="1"/>
-          </p:nvPr>
-        </p:nvSpPr>
-        <p:spPr/>
-        <p:txBody>
-          <a:bodyPr/>
-          <a:lstStyle/>
-          <a:p>
-            <a:pPr lvl="0" indent="0" marL="0">
-              <a:spcBef>
-                <a:spcPts val="3000"/>
-              </a:spcBef>
-              <a:buNone/>
-            </a:pPr>
-            <a:r>
-              <a:rPr b="1"/>
-              <a:t>Three parts, top to bottom</a:t>
-            </a:r>
-          </a:p>
-        </p:txBody>
-      </p:sp>
-    </p:spTree>
-  </p:cSld>
-</p:sld>
-</file>
-
-<file path=ppt/slides/slide9.xml><?xml version="1.0" encoding="utf-8"?>
-<p:sld xmlns:a="http://schemas.openxmlformats.org/drawingml/2006/main" xmlns:r="http://schemas.openxmlformats.org/officeDocument/2006/relationships" xmlns:p="http://schemas.openxmlformats.org/presentationml/2006/main">
-  <p:cSld>
-    <p:spTree>
-      <p:nvGrpSpPr>
-        <p:cNvPr id="1" name=""/>
-        <p:cNvGrpSpPr/>
-        <p:nvPr/>
-      </p:nvGrpSpPr>
-      <p:grpSpPr>
-        <a:xfrm>
-          <a:off x="0" y="0"/>
-          <a:ext cx="0" cy="0"/>
-          <a:chOff x="0" y="0"/>
-          <a:chExt cx="0" cy="0"/>
-        </a:xfrm>
-      </p:grpSpPr>
-      <p:sp>
-        <p:nvSpPr>
-          <p:cNvPr id="3" name="Content Placeholder 2"/>
-          <p:cNvSpPr>
-            <a:spLocks noGrp="1"/>
-          </p:cNvSpPr>
-          <p:nvPr>
-            <p:ph idx="1" sz="half"/>
-          </p:nvPr>
-        </p:nvSpPr>
-        <p:spPr/>
-        <p:txBody>
-          <a:bodyPr/>
-          <a:lstStyle/>
-          <a:p>
-            <a:pPr lvl="0" indent="0" marL="0">
-              <a:buNone/>
-            </a:pPr>
-            <a:r>
-              <a:rPr/>
-              <a:t>Every Quarto document has the same three ingredients:</a:t>
-            </a:r>
-          </a:p>
-          <a:p>
-            <a:pPr lvl="0" indent="0">
-              <a:buNone/>
-            </a:pPr>
-            <a:r>
-              <a:rPr>
-                <a:latin typeface="Courier"/>
-              </a:rPr>
-              <a:t>1. YAML front matter  ← the recipe (title, output type)
-2. Markdown text      ← your writing, formatted
-3. Code chunks        ← R that runs and shows results</a:t>
-            </a:r>
-          </a:p>
-          <a:p>
-            <a:pPr lvl="0" indent="0" marL="0">
-              <a:buNone/>
-            </a:pPr>
-            <a:r>
-              <a:rPr/>
-              <a:t>You already </a:t>
-            </a:r>
-            <a:r>
-              <a:rPr i="1"/>
-              <a:t>read</a:t>
-            </a:r>
-            <a:r>
-              <a:rPr/>
-              <a:t> these every day — this whole lecture is a </a:t>
-            </a:r>
-            <a:r>
-              <a:rPr>
-                <a:latin typeface="Courier"/>
-              </a:rPr>
-              <a:t>.qmd</a:t>
-            </a:r>
-            <a:r>
-              <a:rPr/>
-              <a:t> file.</a:t>
-            </a:r>
-          </a:p>
-          <a:p>
-            <a:pPr lvl="0" indent="0" marL="1270000">
-              <a:buNone/>
-            </a:pPr>
-            <a:r>
-              <a:rPr sz="2000" b="1"/>
-              <a:t>Note</a:t>
-            </a:r>
-          </a:p>
-          <a:p>
-            <a:pPr lvl="0" indent="0" marL="1270000">
-              <a:buNone/>
-            </a:pPr>
-            <a:r>
-              <a:rPr sz="2000" b="1"/>
-              <a:t>📖 New word</a:t>
-            </a:r>
-          </a:p>
-          <a:p>
-            <a:pPr lvl="0" indent="0" marL="1270000">
-              <a:buNone/>
-            </a:pPr>
-            <a:r>
-              <a:rPr sz="2000" b="1">
-                <a:latin typeface="Courier"/>
-              </a:rPr>
-              <a:t>.qmd</a:t>
-            </a:r>
-            <a:r>
-              <a:rPr sz="2000"/>
-              <a:t> = a </a:t>
-            </a:r>
-            <a:r>
-              <a:rPr sz="2000" b="1"/>
-              <a:t>Q</a:t>
-            </a:r>
-            <a:r>
-              <a:rPr sz="2000"/>
-              <a:t>uarto </a:t>
-            </a:r>
-            <a:r>
-              <a:rPr sz="2000" b="1"/>
-              <a:t>m</a:t>
-            </a:r>
-            <a:r>
-              <a:rPr sz="2000"/>
-              <a:t>ark</a:t>
-            </a:r>
-            <a:r>
-              <a:rPr sz="2000" b="1"/>
-              <a:t>d</a:t>
-            </a:r>
-            <a:r>
-              <a:rPr sz="2000"/>
-              <a:t>own file. Plain text you can open anywhere.</a:t>
-            </a:r>
-          </a:p>
-        </p:txBody>
-      </p:sp>
-      <p:sp>
-        <p:nvSpPr>
-          <p:cNvPr id="4" name="Content Placeholder 3"/>
-          <p:cNvSpPr>
-            <a:spLocks noGrp="1"/>
-          </p:cNvSpPr>
-          <p:nvPr>
-            <p:ph idx="2" sz="half"/>
-          </p:nvPr>
-        </p:nvSpPr>
-        <p:spPr/>
-        <p:txBody>
-          <a:bodyPr/>
-          <a:lstStyle/>
-          <a:p>
-            <a:pPr lvl="0" indent="0" marL="1270000">
-              <a:buNone/>
-            </a:pPr>
-            <a:r>
-              <a:rPr sz="2000" b="1"/>
-              <a:t>Note</a:t>
-            </a:r>
-          </a:p>
-          <a:p>
-            <a:pPr lvl="0" indent="0" marL="1270000">
-              <a:buNone/>
-            </a:pPr>
-            <a:r>
-              <a:rPr sz="2000" b="1"/>
-              <a:t>✅ Key idea</a:t>
-            </a:r>
-          </a:p>
-          <a:p>
-            <a:pPr lvl="0" indent="0" marL="1270000">
-              <a:buNone/>
-            </a:pPr>
-            <a:r>
-              <a:rPr sz="2000"/>
-              <a:t>If you can write a script and write an email, you already know two of the three parts. Only the </a:t>
-            </a:r>
-            <a:r>
-              <a:rPr sz="2000" b="1"/>
-              <a:t>YAML</a:t>
-            </a:r>
-            <a:r>
-              <a:rPr sz="2000"/>
-              <a:t> is new.</a:t>
-            </a:r>
-          </a:p>
-        </p:txBody>
-      </p:sp>
     </p:spTree>
   </p:cSld>
 </p:sld>
